--- a/projects/spanisch/kl07/sequenz-05-tiempo-libre/05a-hobbys/PPT-05a.pptx
+++ b/projects/spanisch/kl07/sequenz-05-tiempo-libre/05a-hobbys/PPT-05a.pptx
@@ -9,6 +9,15 @@
     <p:sldId id="257" r:id="rId8"/>
     <p:sldId id="258" r:id="rId9"/>
     <p:sldId id="259" r:id="rId10"/>
+    <p:sldId id="260" r:id="rId11"/>
+    <p:sldId id="261" r:id="rId12"/>
+    <p:sldId id="262" r:id="rId13"/>
+    <p:sldId id="263" r:id="rId14"/>
+    <p:sldId id="264" r:id="rId15"/>
+    <p:sldId id="265" r:id="rId16"/>
+    <p:sldId id="266" r:id="rId17"/>
+    <p:sldId id="267" r:id="rId18"/>
+    <p:sldId id="268" r:id="rId19"/>
   </p:sldIdLst>
   <p:sldSz cx="12191695" cy="6858000" type="screen4x3"/>
   <p:notesSz cx="6858000" cy="9144000"/>
@@ -3322,6 +3331,2216 @@
 </p:sld>
 </file>
 
+<file path=ppt/slides/slide10.xml><?xml version="1.0" encoding="utf-8"?>
+<p:sld xmlns:a="http://schemas.openxmlformats.org/drawingml/2006/main" xmlns:p="http://schemas.openxmlformats.org/presentationml/2006/main" xmlns:r="http://schemas.openxmlformats.org/officeDocument/2006/relationships">
+  <p:cSld>
+    <p:spTree>
+      <p:nvGrpSpPr>
+        <p:cNvPr id="1" name=""/>
+        <p:cNvGrpSpPr/>
+        <p:nvPr/>
+      </p:nvGrpSpPr>
+      <p:grpSpPr/>
+      <p:sp>
+        <p:nvSpPr>
+          <p:cNvPr id="2" name="Rectangle 1"/>
+          <p:cNvSpPr/>
+          <p:nvPr/>
+        </p:nvSpPr>
+        <p:spPr>
+          <a:xfrm>
+            <a:off x="0" y="0"/>
+            <a:ext cx="12191695" cy="457200"/>
+          </a:xfrm>
+          <a:prstGeom prst="rect">
+            <a:avLst/>
+          </a:prstGeom>
+          <a:solidFill>
+            <a:srgbClr val="C41E3A"/>
+          </a:solidFill>
+          <a:ln>
+            <a:noFill/>
+          </a:ln>
+        </p:spPr>
+        <p:style>
+          <a:lnRef idx="1">
+            <a:schemeClr val="accent1"/>
+          </a:lnRef>
+          <a:fillRef idx="3">
+            <a:schemeClr val="accent1"/>
+          </a:fillRef>
+          <a:effectRef idx="2">
+            <a:schemeClr val="accent1"/>
+          </a:effectRef>
+          <a:fontRef idx="minor">
+            <a:schemeClr val="lt1"/>
+          </a:fontRef>
+        </p:style>
+        <p:txBody>
+          <a:bodyPr rtlCol="0" anchor="ctr"/>
+          <a:lstStyle/>
+          <a:p>
+            <a:pPr algn="ctr"/>
+          </a:p>
+        </p:txBody>
+      </p:sp>
+      <p:sp>
+        <p:nvSpPr>
+          <p:cNvPr id="3" name="TextBox 2"/>
+          <p:cNvSpPr txBox="1"/>
+          <p:nvPr/>
+        </p:nvSpPr>
+        <p:spPr>
+          <a:xfrm>
+            <a:off x="274320" y="91440"/>
+            <a:ext cx="3657600" cy="274320"/>
+          </a:xfrm>
+          <a:prstGeom prst="rect">
+            <a:avLst/>
+          </a:prstGeom>
+          <a:noFill/>
+        </p:spPr>
+        <p:txBody>
+          <a:bodyPr wrap="none">
+            <a:spAutoFit/>
+          </a:bodyPr>
+          <a:lstStyle/>
+          <a:p>
+            <a:pPr algn="l">
+              <a:defRPr sz="1400" b="1">
+                <a:solidFill>
+                  <a:srgbClr val="FFFFFF"/>
+                </a:solidFill>
+                <a:latin typeface="Arial"/>
+              </a:defRPr>
+            </a:pPr>
+            <a:r>
+              <a:t>Spanisch Klasse 7 · LP-05a</a:t>
+            </a:r>
+          </a:p>
+        </p:txBody>
+      </p:sp>
+      <p:sp>
+        <p:nvSpPr>
+          <p:cNvPr id="4" name="Rectangle 3"/>
+          <p:cNvSpPr/>
+          <p:nvPr/>
+        </p:nvSpPr>
+        <p:spPr>
+          <a:xfrm>
+            <a:off x="0" y="6583680"/>
+            <a:ext cx="12191695" cy="274320"/>
+          </a:xfrm>
+          <a:prstGeom prst="rect">
+            <a:avLst/>
+          </a:prstGeom>
+          <a:solidFill>
+            <a:srgbClr val="F5F5F5"/>
+          </a:solidFill>
+          <a:ln>
+            <a:noFill/>
+          </a:ln>
+        </p:spPr>
+        <p:style>
+          <a:lnRef idx="1">
+            <a:schemeClr val="accent1"/>
+          </a:lnRef>
+          <a:fillRef idx="3">
+            <a:schemeClr val="accent1"/>
+          </a:fillRef>
+          <a:effectRef idx="2">
+            <a:schemeClr val="accent1"/>
+          </a:effectRef>
+          <a:fontRef idx="minor">
+            <a:schemeClr val="lt1"/>
+          </a:fontRef>
+        </p:style>
+        <p:txBody>
+          <a:bodyPr rtlCol="0" anchor="ctr"/>
+          <a:lstStyle/>
+          <a:p>
+            <a:pPr algn="ctr"/>
+          </a:p>
+        </p:txBody>
+      </p:sp>
+      <p:sp>
+        <p:nvSpPr>
+          <p:cNvPr id="5" name="TextBox 4"/>
+          <p:cNvSpPr txBox="1"/>
+          <p:nvPr/>
+        </p:nvSpPr>
+        <p:spPr>
+          <a:xfrm>
+            <a:off x="274320" y="6601968"/>
+            <a:ext cx="4572000" cy="228600"/>
+          </a:xfrm>
+          <a:prstGeom prst="rect">
+            <a:avLst/>
+          </a:prstGeom>
+          <a:noFill/>
+        </p:spPr>
+        <p:txBody>
+          <a:bodyPr wrap="none">
+            <a:spAutoFit/>
+          </a:bodyPr>
+          <a:lstStyle/>
+          <a:p>
+            <a:pPr algn="l">
+              <a:defRPr sz="1000" b="0">
+                <a:solidFill>
+                  <a:srgbClr val="555555"/>
+                </a:solidFill>
+                <a:latin typeface="Arial"/>
+              </a:defRPr>
+            </a:pPr>
+            <a:r>
+              <a:t>Los hobbys</a:t>
+            </a:r>
+          </a:p>
+        </p:txBody>
+      </p:sp>
+      <p:sp>
+        <p:nvSpPr>
+          <p:cNvPr id="6" name="TextBox 5"/>
+          <p:cNvSpPr txBox="1"/>
+          <p:nvPr/>
+        </p:nvSpPr>
+        <p:spPr>
+          <a:xfrm>
+            <a:off x="9144000" y="6601968"/>
+            <a:ext cx="2743200" cy="228600"/>
+          </a:xfrm>
+          <a:prstGeom prst="rect">
+            <a:avLst/>
+          </a:prstGeom>
+          <a:noFill/>
+        </p:spPr>
+        <p:txBody>
+          <a:bodyPr wrap="none">
+            <a:spAutoFit/>
+          </a:bodyPr>
+          <a:lstStyle/>
+          <a:p>
+            <a:pPr algn="r">
+              <a:defRPr sz="1000" b="0">
+                <a:solidFill>
+                  <a:srgbClr val="555555"/>
+                </a:solidFill>
+                <a:latin typeface="Arial"/>
+              </a:defRPr>
+            </a:pPr>
+            <a:r>
+              <a:t>Sequenz 5</a:t>
+            </a:r>
+          </a:p>
+        </p:txBody>
+      </p:sp>
+      <p:sp>
+        <p:nvSpPr>
+          <p:cNvPr id="7" name="Rectangle 6"/>
+          <p:cNvSpPr/>
+          <p:nvPr/>
+        </p:nvSpPr>
+        <p:spPr>
+          <a:xfrm>
+            <a:off x="457200" y="640080"/>
+            <a:ext cx="1828800" cy="457200"/>
+          </a:xfrm>
+          <a:prstGeom prst="rect">
+            <a:avLst/>
+          </a:prstGeom>
+          <a:solidFill>
+            <a:srgbClr val="2A7A4B"/>
+          </a:solidFill>
+          <a:ln>
+            <a:noFill/>
+          </a:ln>
+        </p:spPr>
+        <p:style>
+          <a:lnRef idx="1">
+            <a:schemeClr val="accent1"/>
+          </a:lnRef>
+          <a:fillRef idx="3">
+            <a:schemeClr val="accent1"/>
+          </a:fillRef>
+          <a:effectRef idx="2">
+            <a:schemeClr val="accent1"/>
+          </a:effectRef>
+          <a:fontRef idx="minor">
+            <a:schemeClr val="lt1"/>
+          </a:fontRef>
+        </p:style>
+        <p:txBody>
+          <a:bodyPr rtlCol="0" anchor="ctr"/>
+          <a:lstStyle/>
+          <a:p>
+            <a:pPr algn="ctr"/>
+          </a:p>
+        </p:txBody>
+      </p:sp>
+      <p:sp>
+        <p:nvSpPr>
+          <p:cNvPr id="8" name="TextBox 7"/>
+          <p:cNvSpPr txBox="1"/>
+          <p:nvPr/>
+        </p:nvSpPr>
+        <p:spPr>
+          <a:xfrm>
+            <a:off x="548640" y="713231"/>
+            <a:ext cx="1645920" cy="320040"/>
+          </a:xfrm>
+          <a:prstGeom prst="rect">
+            <a:avLst/>
+          </a:prstGeom>
+          <a:noFill/>
+        </p:spPr>
+        <p:txBody>
+          <a:bodyPr wrap="none">
+            <a:spAutoFit/>
+          </a:bodyPr>
+          <a:lstStyle/>
+          <a:p>
+            <a:pPr algn="ctr">
+              <a:defRPr sz="1400" b="1">
+                <a:solidFill>
+                  <a:srgbClr val="FFFFFF"/>
+                </a:solidFill>
+                <a:latin typeface="Arial"/>
+              </a:defRPr>
+            </a:pPr>
+            <a:r>
+              <a:t>LÖSUNG</a:t>
+            </a:r>
+          </a:p>
+        </p:txBody>
+      </p:sp>
+      <p:sp>
+        <p:nvSpPr>
+          <p:cNvPr id="9" name="TextBox 8"/>
+          <p:cNvSpPr txBox="1"/>
+          <p:nvPr/>
+        </p:nvSpPr>
+        <p:spPr>
+          <a:xfrm>
+            <a:off x="457200" y="1280160"/>
+            <a:ext cx="11274552" cy="731520"/>
+          </a:xfrm>
+          <a:prstGeom prst="rect">
+            <a:avLst/>
+          </a:prstGeom>
+          <a:noFill/>
+        </p:spPr>
+        <p:txBody>
+          <a:bodyPr wrap="none">
+            <a:spAutoFit/>
+          </a:bodyPr>
+          <a:lstStyle/>
+          <a:p>
+            <a:pPr algn="l">
+              <a:defRPr sz="3200" b="1">
+                <a:solidFill>
+                  <a:srgbClr val="C41E3A"/>
+                </a:solidFill>
+                <a:latin typeface="Arial"/>
+              </a:defRPr>
+            </a:pPr>
+            <a:r>
+              <a:t>✅ Lösung</a:t>
+            </a:r>
+          </a:p>
+        </p:txBody>
+      </p:sp>
+      <p:sp>
+        <p:nvSpPr>
+          <p:cNvPr id="10" name="TextBox 9"/>
+          <p:cNvSpPr txBox="1"/>
+          <p:nvPr/>
+        </p:nvSpPr>
+        <p:spPr>
+          <a:xfrm>
+            <a:off x="640080" y="2011680"/>
+            <a:ext cx="5029200" cy="548640"/>
+          </a:xfrm>
+          <a:prstGeom prst="rect">
+            <a:avLst/>
+          </a:prstGeom>
+          <a:noFill/>
+        </p:spPr>
+        <p:txBody>
+          <a:bodyPr wrap="none">
+            <a:spAutoFit/>
+          </a:bodyPr>
+          <a:lstStyle/>
+          <a:p>
+            <a:pPr algn="l">
+              <a:defRPr sz="2400" b="1">
+                <a:solidFill>
+                  <a:srgbClr val="C41E3A"/>
+                </a:solidFill>
+                <a:latin typeface="Arial"/>
+              </a:defRPr>
+            </a:pPr>
+            <a:r>
+              <a:t>Jugar al tenis</a:t>
+            </a:r>
+          </a:p>
+        </p:txBody>
+      </p:sp>
+      <p:sp>
+        <p:nvSpPr>
+          <p:cNvPr id="11" name="TextBox 10"/>
+          <p:cNvSpPr txBox="1"/>
+          <p:nvPr/>
+        </p:nvSpPr>
+        <p:spPr>
+          <a:xfrm>
+            <a:off x="5943600" y="2011680"/>
+            <a:ext cx="5029200" cy="548640"/>
+          </a:xfrm>
+          <a:prstGeom prst="rect">
+            <a:avLst/>
+          </a:prstGeom>
+          <a:noFill/>
+        </p:spPr>
+        <p:txBody>
+          <a:bodyPr wrap="none">
+            <a:spAutoFit/>
+          </a:bodyPr>
+          <a:lstStyle/>
+          <a:p>
+            <a:pPr algn="l">
+              <a:defRPr sz="2400" b="1">
+                <a:solidFill>
+                  <a:srgbClr val="2A7A4B"/>
+                </a:solidFill>
+                <a:latin typeface="Arial"/>
+              </a:defRPr>
+            </a:pPr>
+            <a:r>
+              <a:t>✓</a:t>
+            </a:r>
+          </a:p>
+        </p:txBody>
+      </p:sp>
+      <p:sp>
+        <p:nvSpPr>
+          <p:cNvPr id="12" name="TextBox 11"/>
+          <p:cNvSpPr txBox="1"/>
+          <p:nvPr/>
+        </p:nvSpPr>
+        <p:spPr>
+          <a:xfrm>
+            <a:off x="640080" y="3108960"/>
+            <a:ext cx="5029200" cy="548640"/>
+          </a:xfrm>
+          <a:prstGeom prst="rect">
+            <a:avLst/>
+          </a:prstGeom>
+          <a:noFill/>
+        </p:spPr>
+        <p:txBody>
+          <a:bodyPr wrap="none">
+            <a:spAutoFit/>
+          </a:bodyPr>
+          <a:lstStyle/>
+          <a:p>
+            <a:pPr algn="l">
+              <a:defRPr sz="2400" b="1">
+                <a:solidFill>
+                  <a:srgbClr val="C41E3A"/>
+                </a:solidFill>
+                <a:latin typeface="Arial"/>
+              </a:defRPr>
+            </a:pPr>
+            <a:r>
+              <a:t>Tocar el violín</a:t>
+            </a:r>
+          </a:p>
+        </p:txBody>
+      </p:sp>
+      <p:sp>
+        <p:nvSpPr>
+          <p:cNvPr id="13" name="TextBox 12"/>
+          <p:cNvSpPr txBox="1"/>
+          <p:nvPr/>
+        </p:nvSpPr>
+        <p:spPr>
+          <a:xfrm>
+            <a:off x="5943600" y="3108960"/>
+            <a:ext cx="5029200" cy="548640"/>
+          </a:xfrm>
+          <a:prstGeom prst="rect">
+            <a:avLst/>
+          </a:prstGeom>
+          <a:noFill/>
+        </p:spPr>
+        <p:txBody>
+          <a:bodyPr wrap="none">
+            <a:spAutoFit/>
+          </a:bodyPr>
+          <a:lstStyle/>
+          <a:p>
+            <a:pPr algn="l">
+              <a:defRPr sz="2400" b="1">
+                <a:solidFill>
+                  <a:srgbClr val="2A7A4B"/>
+                </a:solidFill>
+                <a:latin typeface="Arial"/>
+              </a:defRPr>
+            </a:pPr>
+            <a:r>
+              <a:t>✓</a:t>
+            </a:r>
+          </a:p>
+        </p:txBody>
+      </p:sp>
+      <p:sp>
+        <p:nvSpPr>
+          <p:cNvPr id="14" name="TextBox 13"/>
+          <p:cNvSpPr txBox="1"/>
+          <p:nvPr/>
+        </p:nvSpPr>
+        <p:spPr>
+          <a:xfrm>
+            <a:off x="640080" y="4206240"/>
+            <a:ext cx="5029200" cy="548640"/>
+          </a:xfrm>
+          <a:prstGeom prst="rect">
+            <a:avLst/>
+          </a:prstGeom>
+          <a:noFill/>
+        </p:spPr>
+        <p:txBody>
+          <a:bodyPr wrap="none">
+            <a:spAutoFit/>
+          </a:bodyPr>
+          <a:lstStyle/>
+          <a:p>
+            <a:pPr algn="l">
+              <a:defRPr sz="2400" b="1">
+                <a:solidFill>
+                  <a:srgbClr val="C41E3A"/>
+                </a:solidFill>
+                <a:latin typeface="Arial"/>
+              </a:defRPr>
+            </a:pPr>
+            <a:r>
+              <a:t>Jugar a videojuegos</a:t>
+            </a:r>
+          </a:p>
+        </p:txBody>
+      </p:sp>
+      <p:sp>
+        <p:nvSpPr>
+          <p:cNvPr id="15" name="TextBox 14"/>
+          <p:cNvSpPr txBox="1"/>
+          <p:nvPr/>
+        </p:nvSpPr>
+        <p:spPr>
+          <a:xfrm>
+            <a:off x="5943600" y="4206240"/>
+            <a:ext cx="5029200" cy="548640"/>
+          </a:xfrm>
+          <a:prstGeom prst="rect">
+            <a:avLst/>
+          </a:prstGeom>
+          <a:noFill/>
+        </p:spPr>
+        <p:txBody>
+          <a:bodyPr wrap="none">
+            <a:spAutoFit/>
+          </a:bodyPr>
+          <a:lstStyle/>
+          <a:p>
+            <a:pPr algn="l">
+              <a:defRPr sz="2400" b="1">
+                <a:solidFill>
+                  <a:srgbClr val="2A7A4B"/>
+                </a:solidFill>
+                <a:latin typeface="Arial"/>
+              </a:defRPr>
+            </a:pPr>
+            <a:r>
+              <a:t>✓</a:t>
+            </a:r>
+          </a:p>
+        </p:txBody>
+      </p:sp>
+    </p:spTree>
+  </p:cSld>
+  <p:clrMapOvr>
+    <a:masterClrMapping/>
+  </p:clrMapOvr>
+</p:sld>
+</file>
+
+<file path=ppt/slides/slide11.xml><?xml version="1.0" encoding="utf-8"?>
+<p:sld xmlns:a="http://schemas.openxmlformats.org/drawingml/2006/main" xmlns:p="http://schemas.openxmlformats.org/presentationml/2006/main" xmlns:r="http://schemas.openxmlformats.org/officeDocument/2006/relationships">
+  <p:cSld>
+    <p:spTree>
+      <p:nvGrpSpPr>
+        <p:cNvPr id="1" name=""/>
+        <p:cNvGrpSpPr/>
+        <p:nvPr/>
+      </p:nvGrpSpPr>
+      <p:grpSpPr/>
+      <p:sp>
+        <p:nvSpPr>
+          <p:cNvPr id="2" name="Rectangle 1"/>
+          <p:cNvSpPr/>
+          <p:nvPr/>
+        </p:nvSpPr>
+        <p:spPr>
+          <a:xfrm>
+            <a:off x="0" y="0"/>
+            <a:ext cx="12191695" cy="457200"/>
+          </a:xfrm>
+          <a:prstGeom prst="rect">
+            <a:avLst/>
+          </a:prstGeom>
+          <a:solidFill>
+            <a:srgbClr val="C41E3A"/>
+          </a:solidFill>
+          <a:ln>
+            <a:noFill/>
+          </a:ln>
+        </p:spPr>
+        <p:style>
+          <a:lnRef idx="1">
+            <a:schemeClr val="accent1"/>
+          </a:lnRef>
+          <a:fillRef idx="3">
+            <a:schemeClr val="accent1"/>
+          </a:fillRef>
+          <a:effectRef idx="2">
+            <a:schemeClr val="accent1"/>
+          </a:effectRef>
+          <a:fontRef idx="minor">
+            <a:schemeClr val="lt1"/>
+          </a:fontRef>
+        </p:style>
+        <p:txBody>
+          <a:bodyPr rtlCol="0" anchor="ctr"/>
+          <a:lstStyle/>
+          <a:p>
+            <a:pPr algn="ctr"/>
+          </a:p>
+        </p:txBody>
+      </p:sp>
+      <p:sp>
+        <p:nvSpPr>
+          <p:cNvPr id="3" name="TextBox 2"/>
+          <p:cNvSpPr txBox="1"/>
+          <p:nvPr/>
+        </p:nvSpPr>
+        <p:spPr>
+          <a:xfrm>
+            <a:off x="274320" y="91440"/>
+            <a:ext cx="3657600" cy="274320"/>
+          </a:xfrm>
+          <a:prstGeom prst="rect">
+            <a:avLst/>
+          </a:prstGeom>
+          <a:noFill/>
+        </p:spPr>
+        <p:txBody>
+          <a:bodyPr wrap="none">
+            <a:spAutoFit/>
+          </a:bodyPr>
+          <a:lstStyle/>
+          <a:p>
+            <a:pPr algn="l">
+              <a:defRPr sz="1400" b="1">
+                <a:solidFill>
+                  <a:srgbClr val="FFFFFF"/>
+                </a:solidFill>
+                <a:latin typeface="Arial"/>
+              </a:defRPr>
+            </a:pPr>
+            <a:r>
+              <a:t>Spanisch Klasse 7 · LP-05a</a:t>
+            </a:r>
+          </a:p>
+        </p:txBody>
+      </p:sp>
+      <p:sp>
+        <p:nvSpPr>
+          <p:cNvPr id="4" name="Rectangle 3"/>
+          <p:cNvSpPr/>
+          <p:nvPr/>
+        </p:nvSpPr>
+        <p:spPr>
+          <a:xfrm>
+            <a:off x="0" y="6583680"/>
+            <a:ext cx="12191695" cy="274320"/>
+          </a:xfrm>
+          <a:prstGeom prst="rect">
+            <a:avLst/>
+          </a:prstGeom>
+          <a:solidFill>
+            <a:srgbClr val="F5F5F5"/>
+          </a:solidFill>
+          <a:ln>
+            <a:noFill/>
+          </a:ln>
+        </p:spPr>
+        <p:style>
+          <a:lnRef idx="1">
+            <a:schemeClr val="accent1"/>
+          </a:lnRef>
+          <a:fillRef idx="3">
+            <a:schemeClr val="accent1"/>
+          </a:fillRef>
+          <a:effectRef idx="2">
+            <a:schemeClr val="accent1"/>
+          </a:effectRef>
+          <a:fontRef idx="minor">
+            <a:schemeClr val="lt1"/>
+          </a:fontRef>
+        </p:style>
+        <p:txBody>
+          <a:bodyPr rtlCol="0" anchor="ctr"/>
+          <a:lstStyle/>
+          <a:p>
+            <a:pPr algn="ctr"/>
+          </a:p>
+        </p:txBody>
+      </p:sp>
+      <p:sp>
+        <p:nvSpPr>
+          <p:cNvPr id="5" name="TextBox 4"/>
+          <p:cNvSpPr txBox="1"/>
+          <p:nvPr/>
+        </p:nvSpPr>
+        <p:spPr>
+          <a:xfrm>
+            <a:off x="274320" y="6601968"/>
+            <a:ext cx="4572000" cy="228600"/>
+          </a:xfrm>
+          <a:prstGeom prst="rect">
+            <a:avLst/>
+          </a:prstGeom>
+          <a:noFill/>
+        </p:spPr>
+        <p:txBody>
+          <a:bodyPr wrap="none">
+            <a:spAutoFit/>
+          </a:bodyPr>
+          <a:lstStyle/>
+          <a:p>
+            <a:pPr algn="l">
+              <a:defRPr sz="1000" b="0">
+                <a:solidFill>
+                  <a:srgbClr val="555555"/>
+                </a:solidFill>
+                <a:latin typeface="Arial"/>
+              </a:defRPr>
+            </a:pPr>
+            <a:r>
+              <a:t>Los hobbys</a:t>
+            </a:r>
+          </a:p>
+        </p:txBody>
+      </p:sp>
+      <p:sp>
+        <p:nvSpPr>
+          <p:cNvPr id="6" name="TextBox 5"/>
+          <p:cNvSpPr txBox="1"/>
+          <p:nvPr/>
+        </p:nvSpPr>
+        <p:spPr>
+          <a:xfrm>
+            <a:off x="9144000" y="6601968"/>
+            <a:ext cx="2743200" cy="228600"/>
+          </a:xfrm>
+          <a:prstGeom prst="rect">
+            <a:avLst/>
+          </a:prstGeom>
+          <a:noFill/>
+        </p:spPr>
+        <p:txBody>
+          <a:bodyPr wrap="none">
+            <a:spAutoFit/>
+          </a:bodyPr>
+          <a:lstStyle/>
+          <a:p>
+            <a:pPr algn="r">
+              <a:defRPr sz="1000" b="0">
+                <a:solidFill>
+                  <a:srgbClr val="555555"/>
+                </a:solidFill>
+                <a:latin typeface="Arial"/>
+              </a:defRPr>
+            </a:pPr>
+            <a:r>
+              <a:t>Sequenz 5</a:t>
+            </a:r>
+          </a:p>
+        </p:txBody>
+      </p:sp>
+      <p:sp>
+        <p:nvSpPr>
+          <p:cNvPr id="7" name="Rectangle 6"/>
+          <p:cNvSpPr/>
+          <p:nvPr/>
+        </p:nvSpPr>
+        <p:spPr>
+          <a:xfrm>
+            <a:off x="457200" y="640080"/>
+            <a:ext cx="1828800" cy="457200"/>
+          </a:xfrm>
+          <a:prstGeom prst="rect">
+            <a:avLst/>
+          </a:prstGeom>
+          <a:solidFill>
+            <a:srgbClr val="C41E3A"/>
+          </a:solidFill>
+          <a:ln>
+            <a:noFill/>
+          </a:ln>
+        </p:spPr>
+        <p:style>
+          <a:lnRef idx="1">
+            <a:schemeClr val="accent1"/>
+          </a:lnRef>
+          <a:fillRef idx="3">
+            <a:schemeClr val="accent1"/>
+          </a:fillRef>
+          <a:effectRef idx="2">
+            <a:schemeClr val="accent1"/>
+          </a:effectRef>
+          <a:fontRef idx="minor">
+            <a:schemeClr val="lt1"/>
+          </a:fontRef>
+        </p:style>
+        <p:txBody>
+          <a:bodyPr rtlCol="0" anchor="ctr"/>
+          <a:lstStyle/>
+          <a:p>
+            <a:pPr algn="ctr"/>
+          </a:p>
+        </p:txBody>
+      </p:sp>
+      <p:sp>
+        <p:nvSpPr>
+          <p:cNvPr id="8" name="TextBox 7"/>
+          <p:cNvSpPr txBox="1"/>
+          <p:nvPr/>
+        </p:nvSpPr>
+        <p:spPr>
+          <a:xfrm>
+            <a:off x="548640" y="713231"/>
+            <a:ext cx="1645920" cy="320040"/>
+          </a:xfrm>
+          <a:prstGeom prst="rect">
+            <a:avLst/>
+          </a:prstGeom>
+          <a:noFill/>
+        </p:spPr>
+        <p:txBody>
+          <a:bodyPr wrap="none">
+            <a:spAutoFit/>
+          </a:bodyPr>
+          <a:lstStyle/>
+          <a:p>
+            <a:pPr algn="ctr">
+              <a:defRPr sz="1400" b="1">
+                <a:solidFill>
+                  <a:srgbClr val="FFFFFF"/>
+                </a:solidFill>
+                <a:latin typeface="Arial"/>
+              </a:defRPr>
+            </a:pPr>
+            <a:r>
+              <a:t>ÜBUNG</a:t>
+            </a:r>
+          </a:p>
+        </p:txBody>
+      </p:sp>
+      <p:sp>
+        <p:nvSpPr>
+          <p:cNvPr id="9" name="TextBox 8"/>
+          <p:cNvSpPr txBox="1"/>
+          <p:nvPr/>
+        </p:nvSpPr>
+        <p:spPr>
+          <a:xfrm>
+            <a:off x="457200" y="1280160"/>
+            <a:ext cx="11274552" cy="731520"/>
+          </a:xfrm>
+          <a:prstGeom prst="rect">
+            <a:avLst/>
+          </a:prstGeom>
+          <a:noFill/>
+        </p:spPr>
+        <p:txBody>
+          <a:bodyPr wrap="none">
+            <a:spAutoFit/>
+          </a:bodyPr>
+          <a:lstStyle/>
+          <a:p>
+            <a:pPr algn="l">
+              <a:defRPr sz="3200" b="1">
+                <a:solidFill>
+                  <a:srgbClr val="C41E3A"/>
+                </a:solidFill>
+                <a:latin typeface="Arial"/>
+              </a:defRPr>
+            </a:pPr>
+            <a:r>
+              <a:t>✏️ Übung: Übersetzen</a:t>
+            </a:r>
+          </a:p>
+        </p:txBody>
+      </p:sp>
+      <p:sp>
+        <p:nvSpPr>
+          <p:cNvPr id="10" name="TextBox 9"/>
+          <p:cNvSpPr txBox="1"/>
+          <p:nvPr/>
+        </p:nvSpPr>
+        <p:spPr>
+          <a:xfrm>
+            <a:off x="640080" y="2011680"/>
+            <a:ext cx="5029200" cy="548640"/>
+          </a:xfrm>
+          <a:prstGeom prst="rect">
+            <a:avLst/>
+          </a:prstGeom>
+          <a:noFill/>
+        </p:spPr>
+        <p:txBody>
+          <a:bodyPr wrap="none">
+            <a:spAutoFit/>
+          </a:bodyPr>
+          <a:lstStyle/>
+          <a:p>
+            <a:pPr algn="l">
+              <a:defRPr sz="2200" b="1">
+                <a:solidFill>
+                  <a:srgbClr val="C41E3A"/>
+                </a:solidFill>
+                <a:latin typeface="Arial"/>
+              </a:defRPr>
+            </a:pPr>
+            <a:r>
+              <a:t>Ich spiele Fußball.</a:t>
+            </a:r>
+          </a:p>
+        </p:txBody>
+      </p:sp>
+      <p:sp>
+        <p:nvSpPr>
+          <p:cNvPr id="11" name="TextBox 10"/>
+          <p:cNvSpPr txBox="1"/>
+          <p:nvPr/>
+        </p:nvSpPr>
+        <p:spPr>
+          <a:xfrm>
+            <a:off x="5943600" y="2011680"/>
+            <a:ext cx="5029200" cy="548640"/>
+          </a:xfrm>
+          <a:prstGeom prst="rect">
+            <a:avLst/>
+          </a:prstGeom>
+          <a:noFill/>
+        </p:spPr>
+        <p:txBody>
+          <a:bodyPr wrap="none">
+            <a:spAutoFit/>
+          </a:bodyPr>
+          <a:lstStyle/>
+          <a:p>
+            <a:pPr algn="l">
+              <a:defRPr sz="2200" b="0">
+                <a:solidFill>
+                  <a:srgbClr val="888888"/>
+                </a:solidFill>
+                <a:latin typeface="Arial"/>
+              </a:defRPr>
+            </a:pPr>
+            <a:r>
+              <a:t>___</a:t>
+            </a:r>
+          </a:p>
+        </p:txBody>
+      </p:sp>
+      <p:sp>
+        <p:nvSpPr>
+          <p:cNvPr id="12" name="TextBox 11"/>
+          <p:cNvSpPr txBox="1"/>
+          <p:nvPr/>
+        </p:nvSpPr>
+        <p:spPr>
+          <a:xfrm>
+            <a:off x="640080" y="2926080"/>
+            <a:ext cx="5029200" cy="548640"/>
+          </a:xfrm>
+          <a:prstGeom prst="rect">
+            <a:avLst/>
+          </a:prstGeom>
+          <a:noFill/>
+        </p:spPr>
+        <p:txBody>
+          <a:bodyPr wrap="none">
+            <a:spAutoFit/>
+          </a:bodyPr>
+          <a:lstStyle/>
+          <a:p>
+            <a:pPr algn="l">
+              <a:defRPr sz="2200" b="1">
+                <a:solidFill>
+                  <a:srgbClr val="C41E3A"/>
+                </a:solidFill>
+                <a:latin typeface="Arial"/>
+              </a:defRPr>
+            </a:pPr>
+            <a:r>
+              <a:t>Sie spielt Gitarre.</a:t>
+            </a:r>
+          </a:p>
+        </p:txBody>
+      </p:sp>
+      <p:sp>
+        <p:nvSpPr>
+          <p:cNvPr id="13" name="TextBox 12"/>
+          <p:cNvSpPr txBox="1"/>
+          <p:nvPr/>
+        </p:nvSpPr>
+        <p:spPr>
+          <a:xfrm>
+            <a:off x="5943600" y="2926080"/>
+            <a:ext cx="5029200" cy="548640"/>
+          </a:xfrm>
+          <a:prstGeom prst="rect">
+            <a:avLst/>
+          </a:prstGeom>
+          <a:noFill/>
+        </p:spPr>
+        <p:txBody>
+          <a:bodyPr wrap="none">
+            <a:spAutoFit/>
+          </a:bodyPr>
+          <a:lstStyle/>
+          <a:p>
+            <a:pPr algn="l">
+              <a:defRPr sz="2200" b="0">
+                <a:solidFill>
+                  <a:srgbClr val="888888"/>
+                </a:solidFill>
+                <a:latin typeface="Arial"/>
+              </a:defRPr>
+            </a:pPr>
+            <a:r>
+              <a:t>___</a:t>
+            </a:r>
+          </a:p>
+        </p:txBody>
+      </p:sp>
+      <p:sp>
+        <p:nvSpPr>
+          <p:cNvPr id="14" name="Rectangle 13"/>
+          <p:cNvSpPr/>
+          <p:nvPr/>
+        </p:nvSpPr>
+        <p:spPr>
+          <a:xfrm>
+            <a:off x="457200" y="5943600"/>
+            <a:ext cx="11274552" cy="548640"/>
+          </a:xfrm>
+          <a:prstGeom prst="rect">
+            <a:avLst/>
+          </a:prstGeom>
+          <a:solidFill>
+            <a:srgbClr val="FDF2F4"/>
+          </a:solidFill>
+          <a:ln>
+            <a:solidFill>
+              <a:srgbClr val="C41E3A"/>
+            </a:solidFill>
+          </a:ln>
+        </p:spPr>
+        <p:style>
+          <a:lnRef idx="1">
+            <a:schemeClr val="accent1"/>
+          </a:lnRef>
+          <a:fillRef idx="3">
+            <a:schemeClr val="accent1"/>
+          </a:fillRef>
+          <a:effectRef idx="2">
+            <a:schemeClr val="accent1"/>
+          </a:effectRef>
+          <a:fontRef idx="minor">
+            <a:schemeClr val="lt1"/>
+          </a:fontRef>
+        </p:style>
+        <p:txBody>
+          <a:bodyPr rtlCol="0" anchor="ctr"/>
+          <a:lstStyle/>
+          <a:p>
+            <a:pPr algn="ctr"/>
+          </a:p>
+        </p:txBody>
+      </p:sp>
+      <p:sp>
+        <p:nvSpPr>
+          <p:cNvPr id="15" name="TextBox 14"/>
+          <p:cNvSpPr txBox="1"/>
+          <p:nvPr/>
+        </p:nvSpPr>
+        <p:spPr>
+          <a:xfrm>
+            <a:off x="640080" y="6053328"/>
+            <a:ext cx="10972800" cy="365760"/>
+          </a:xfrm>
+          <a:prstGeom prst="rect">
+            <a:avLst/>
+          </a:prstGeom>
+          <a:noFill/>
+        </p:spPr>
+        <p:txBody>
+          <a:bodyPr wrap="none">
+            <a:spAutoFit/>
+          </a:bodyPr>
+          <a:lstStyle/>
+          <a:p>
+            <a:pPr algn="l">
+              <a:defRPr sz="1400" b="1">
+                <a:solidFill>
+                  <a:srgbClr val="C41E3A"/>
+                </a:solidFill>
+                <a:latin typeface="Arial"/>
+              </a:defRPr>
+            </a:pPr>
+            <a:r>
+              <a:t>📝 AB-05a: Aufgabe 2</a:t>
+            </a:r>
+          </a:p>
+        </p:txBody>
+      </p:sp>
+    </p:spTree>
+  </p:cSld>
+  <p:clrMapOvr>
+    <a:masterClrMapping/>
+  </p:clrMapOvr>
+</p:sld>
+</file>
+
+<file path=ppt/slides/slide12.xml><?xml version="1.0" encoding="utf-8"?>
+<p:sld xmlns:a="http://schemas.openxmlformats.org/drawingml/2006/main" xmlns:p="http://schemas.openxmlformats.org/presentationml/2006/main" xmlns:r="http://schemas.openxmlformats.org/officeDocument/2006/relationships">
+  <p:cSld>
+    <p:spTree>
+      <p:nvGrpSpPr>
+        <p:cNvPr id="1" name=""/>
+        <p:cNvGrpSpPr/>
+        <p:nvPr/>
+      </p:nvGrpSpPr>
+      <p:grpSpPr/>
+      <p:sp>
+        <p:nvSpPr>
+          <p:cNvPr id="2" name="Rectangle 1"/>
+          <p:cNvSpPr/>
+          <p:nvPr/>
+        </p:nvSpPr>
+        <p:spPr>
+          <a:xfrm>
+            <a:off x="0" y="0"/>
+            <a:ext cx="12191695" cy="457200"/>
+          </a:xfrm>
+          <a:prstGeom prst="rect">
+            <a:avLst/>
+          </a:prstGeom>
+          <a:solidFill>
+            <a:srgbClr val="C41E3A"/>
+          </a:solidFill>
+          <a:ln>
+            <a:noFill/>
+          </a:ln>
+        </p:spPr>
+        <p:style>
+          <a:lnRef idx="1">
+            <a:schemeClr val="accent1"/>
+          </a:lnRef>
+          <a:fillRef idx="3">
+            <a:schemeClr val="accent1"/>
+          </a:fillRef>
+          <a:effectRef idx="2">
+            <a:schemeClr val="accent1"/>
+          </a:effectRef>
+          <a:fontRef idx="minor">
+            <a:schemeClr val="lt1"/>
+          </a:fontRef>
+        </p:style>
+        <p:txBody>
+          <a:bodyPr rtlCol="0" anchor="ctr"/>
+          <a:lstStyle/>
+          <a:p>
+            <a:pPr algn="ctr"/>
+          </a:p>
+        </p:txBody>
+      </p:sp>
+      <p:sp>
+        <p:nvSpPr>
+          <p:cNvPr id="3" name="TextBox 2"/>
+          <p:cNvSpPr txBox="1"/>
+          <p:nvPr/>
+        </p:nvSpPr>
+        <p:spPr>
+          <a:xfrm>
+            <a:off x="274320" y="91440"/>
+            <a:ext cx="3657600" cy="274320"/>
+          </a:xfrm>
+          <a:prstGeom prst="rect">
+            <a:avLst/>
+          </a:prstGeom>
+          <a:noFill/>
+        </p:spPr>
+        <p:txBody>
+          <a:bodyPr wrap="none">
+            <a:spAutoFit/>
+          </a:bodyPr>
+          <a:lstStyle/>
+          <a:p>
+            <a:pPr algn="l">
+              <a:defRPr sz="1400" b="1">
+                <a:solidFill>
+                  <a:srgbClr val="FFFFFF"/>
+                </a:solidFill>
+                <a:latin typeface="Arial"/>
+              </a:defRPr>
+            </a:pPr>
+            <a:r>
+              <a:t>Spanisch Klasse 7 · LP-05a</a:t>
+            </a:r>
+          </a:p>
+        </p:txBody>
+      </p:sp>
+      <p:sp>
+        <p:nvSpPr>
+          <p:cNvPr id="4" name="Rectangle 3"/>
+          <p:cNvSpPr/>
+          <p:nvPr/>
+        </p:nvSpPr>
+        <p:spPr>
+          <a:xfrm>
+            <a:off x="0" y="6583680"/>
+            <a:ext cx="12191695" cy="274320"/>
+          </a:xfrm>
+          <a:prstGeom prst="rect">
+            <a:avLst/>
+          </a:prstGeom>
+          <a:solidFill>
+            <a:srgbClr val="F5F5F5"/>
+          </a:solidFill>
+          <a:ln>
+            <a:noFill/>
+          </a:ln>
+        </p:spPr>
+        <p:style>
+          <a:lnRef idx="1">
+            <a:schemeClr val="accent1"/>
+          </a:lnRef>
+          <a:fillRef idx="3">
+            <a:schemeClr val="accent1"/>
+          </a:fillRef>
+          <a:effectRef idx="2">
+            <a:schemeClr val="accent1"/>
+          </a:effectRef>
+          <a:fontRef idx="minor">
+            <a:schemeClr val="lt1"/>
+          </a:fontRef>
+        </p:style>
+        <p:txBody>
+          <a:bodyPr rtlCol="0" anchor="ctr"/>
+          <a:lstStyle/>
+          <a:p>
+            <a:pPr algn="ctr"/>
+          </a:p>
+        </p:txBody>
+      </p:sp>
+      <p:sp>
+        <p:nvSpPr>
+          <p:cNvPr id="5" name="TextBox 4"/>
+          <p:cNvSpPr txBox="1"/>
+          <p:nvPr/>
+        </p:nvSpPr>
+        <p:spPr>
+          <a:xfrm>
+            <a:off x="274320" y="6601968"/>
+            <a:ext cx="4572000" cy="228600"/>
+          </a:xfrm>
+          <a:prstGeom prst="rect">
+            <a:avLst/>
+          </a:prstGeom>
+          <a:noFill/>
+        </p:spPr>
+        <p:txBody>
+          <a:bodyPr wrap="none">
+            <a:spAutoFit/>
+          </a:bodyPr>
+          <a:lstStyle/>
+          <a:p>
+            <a:pPr algn="l">
+              <a:defRPr sz="1000" b="0">
+                <a:solidFill>
+                  <a:srgbClr val="555555"/>
+                </a:solidFill>
+                <a:latin typeface="Arial"/>
+              </a:defRPr>
+            </a:pPr>
+            <a:r>
+              <a:t>Los hobbys</a:t>
+            </a:r>
+          </a:p>
+        </p:txBody>
+      </p:sp>
+      <p:sp>
+        <p:nvSpPr>
+          <p:cNvPr id="6" name="TextBox 5"/>
+          <p:cNvSpPr txBox="1"/>
+          <p:nvPr/>
+        </p:nvSpPr>
+        <p:spPr>
+          <a:xfrm>
+            <a:off x="9144000" y="6601968"/>
+            <a:ext cx="2743200" cy="228600"/>
+          </a:xfrm>
+          <a:prstGeom prst="rect">
+            <a:avLst/>
+          </a:prstGeom>
+          <a:noFill/>
+        </p:spPr>
+        <p:txBody>
+          <a:bodyPr wrap="none">
+            <a:spAutoFit/>
+          </a:bodyPr>
+          <a:lstStyle/>
+          <a:p>
+            <a:pPr algn="r">
+              <a:defRPr sz="1000" b="0">
+                <a:solidFill>
+                  <a:srgbClr val="555555"/>
+                </a:solidFill>
+                <a:latin typeface="Arial"/>
+              </a:defRPr>
+            </a:pPr>
+            <a:r>
+              <a:t>Sequenz 5</a:t>
+            </a:r>
+          </a:p>
+        </p:txBody>
+      </p:sp>
+      <p:sp>
+        <p:nvSpPr>
+          <p:cNvPr id="7" name="TextBox 6"/>
+          <p:cNvSpPr txBox="1"/>
+          <p:nvPr/>
+        </p:nvSpPr>
+        <p:spPr>
+          <a:xfrm>
+            <a:off x="457200" y="640080"/>
+            <a:ext cx="11274552" cy="731520"/>
+          </a:xfrm>
+          <a:prstGeom prst="rect">
+            <a:avLst/>
+          </a:prstGeom>
+          <a:noFill/>
+        </p:spPr>
+        <p:txBody>
+          <a:bodyPr wrap="none">
+            <a:spAutoFit/>
+          </a:bodyPr>
+          <a:lstStyle/>
+          <a:p>
+            <a:pPr algn="l">
+              <a:defRPr sz="3200" b="1">
+                <a:solidFill>
+                  <a:srgbClr val="C41E3A"/>
+                </a:solidFill>
+                <a:latin typeface="Arial"/>
+              </a:defRPr>
+            </a:pPr>
+            <a:r>
+              <a:t>📋 Zusammenfassung</a:t>
+            </a:r>
+          </a:p>
+        </p:txBody>
+      </p:sp>
+      <p:sp>
+        <p:nvSpPr>
+          <p:cNvPr id="8" name="TextBox 7"/>
+          <p:cNvSpPr txBox="1"/>
+          <p:nvPr/>
+        </p:nvSpPr>
+        <p:spPr>
+          <a:xfrm>
+            <a:off x="640080" y="1463040"/>
+            <a:ext cx="5029200" cy="457200"/>
+          </a:xfrm>
+          <a:prstGeom prst="rect">
+            <a:avLst/>
+          </a:prstGeom>
+          <a:noFill/>
+        </p:spPr>
+        <p:txBody>
+          <a:bodyPr wrap="none">
+            <a:spAutoFit/>
+          </a:bodyPr>
+          <a:lstStyle/>
+          <a:p>
+            <a:pPr algn="l">
+              <a:defRPr sz="2000" b="1">
+                <a:solidFill>
+                  <a:srgbClr val="C41E3A"/>
+                </a:solidFill>
+                <a:latin typeface="Arial"/>
+              </a:defRPr>
+            </a:pPr>
+            <a:r>
+              <a:t>Vokabeln</a:t>
+            </a:r>
+          </a:p>
+        </p:txBody>
+      </p:sp>
+      <p:sp>
+        <p:nvSpPr>
+          <p:cNvPr id="9" name="TextBox 8"/>
+          <p:cNvSpPr txBox="1"/>
+          <p:nvPr/>
+        </p:nvSpPr>
+        <p:spPr>
+          <a:xfrm>
+            <a:off x="822960" y="2011680"/>
+            <a:ext cx="4846320" cy="457200"/>
+          </a:xfrm>
+          <a:prstGeom prst="rect">
+            <a:avLst/>
+          </a:prstGeom>
+          <a:noFill/>
+        </p:spPr>
+        <p:txBody>
+          <a:bodyPr wrap="none">
+            <a:spAutoFit/>
+          </a:bodyPr>
+          <a:lstStyle/>
+          <a:p>
+            <a:pPr algn="l">
+              <a:defRPr sz="1800" b="0">
+                <a:solidFill>
+                  <a:srgbClr val="222222"/>
+                </a:solidFill>
+                <a:latin typeface="Arial"/>
+              </a:defRPr>
+            </a:pPr>
+            <a:r>
+              <a:t>•  jugar al fútbol/baloncesto</a:t>
+            </a:r>
+          </a:p>
+        </p:txBody>
+      </p:sp>
+      <p:sp>
+        <p:nvSpPr>
+          <p:cNvPr id="10" name="TextBox 9"/>
+          <p:cNvSpPr txBox="1"/>
+          <p:nvPr/>
+        </p:nvSpPr>
+        <p:spPr>
+          <a:xfrm>
+            <a:off x="822960" y="2560320"/>
+            <a:ext cx="4846320" cy="457200"/>
+          </a:xfrm>
+          <a:prstGeom prst="rect">
+            <a:avLst/>
+          </a:prstGeom>
+          <a:noFill/>
+        </p:spPr>
+        <p:txBody>
+          <a:bodyPr wrap="none">
+            <a:spAutoFit/>
+          </a:bodyPr>
+          <a:lstStyle/>
+          <a:p>
+            <a:pPr algn="l">
+              <a:defRPr sz="1800" b="0">
+                <a:solidFill>
+                  <a:srgbClr val="222222"/>
+                </a:solidFill>
+                <a:latin typeface="Arial"/>
+              </a:defRPr>
+            </a:pPr>
+            <a:r>
+              <a:t>•  tocar la guitarra/el piano</a:t>
+            </a:r>
+          </a:p>
+        </p:txBody>
+      </p:sp>
+      <p:sp>
+        <p:nvSpPr>
+          <p:cNvPr id="11" name="TextBox 10"/>
+          <p:cNvSpPr txBox="1"/>
+          <p:nvPr/>
+        </p:nvSpPr>
+        <p:spPr>
+          <a:xfrm>
+            <a:off x="822960" y="3108960"/>
+            <a:ext cx="4846320" cy="457200"/>
+          </a:xfrm>
+          <a:prstGeom prst="rect">
+            <a:avLst/>
+          </a:prstGeom>
+          <a:noFill/>
+        </p:spPr>
+        <p:txBody>
+          <a:bodyPr wrap="none">
+            <a:spAutoFit/>
+          </a:bodyPr>
+          <a:lstStyle/>
+          <a:p>
+            <a:pPr algn="l">
+              <a:defRPr sz="1800" b="0">
+                <a:solidFill>
+                  <a:srgbClr val="222222"/>
+                </a:solidFill>
+                <a:latin typeface="Arial"/>
+              </a:defRPr>
+            </a:pPr>
+            <a:r>
+              <a:t>•  ver la tele, leer libros</a:t>
+            </a:r>
+          </a:p>
+        </p:txBody>
+      </p:sp>
+      <p:sp>
+        <p:nvSpPr>
+          <p:cNvPr id="12" name="TextBox 11"/>
+          <p:cNvSpPr txBox="1"/>
+          <p:nvPr/>
+        </p:nvSpPr>
+        <p:spPr>
+          <a:xfrm>
+            <a:off x="6400800" y="1463040"/>
+            <a:ext cx="5029200" cy="457200"/>
+          </a:xfrm>
+          <a:prstGeom prst="rect">
+            <a:avLst/>
+          </a:prstGeom>
+          <a:noFill/>
+        </p:spPr>
+        <p:txBody>
+          <a:bodyPr wrap="none">
+            <a:spAutoFit/>
+          </a:bodyPr>
+          <a:lstStyle/>
+          <a:p>
+            <a:pPr algn="l">
+              <a:defRPr sz="2000" b="1">
+                <a:solidFill>
+                  <a:srgbClr val="C41E3A"/>
+                </a:solidFill>
+                <a:latin typeface="Arial"/>
+              </a:defRPr>
+            </a:pPr>
+            <a:r>
+              <a:t>Grammatik</a:t>
+            </a:r>
+          </a:p>
+        </p:txBody>
+      </p:sp>
+      <p:sp>
+        <p:nvSpPr>
+          <p:cNvPr id="13" name="TextBox 12"/>
+          <p:cNvSpPr txBox="1"/>
+          <p:nvPr/>
+        </p:nvSpPr>
+        <p:spPr>
+          <a:xfrm>
+            <a:off x="6583680" y="2011680"/>
+            <a:ext cx="4846320" cy="457200"/>
+          </a:xfrm>
+          <a:prstGeom prst="rect">
+            <a:avLst/>
+          </a:prstGeom>
+          <a:noFill/>
+        </p:spPr>
+        <p:txBody>
+          <a:bodyPr wrap="none">
+            <a:spAutoFit/>
+          </a:bodyPr>
+          <a:lstStyle/>
+          <a:p>
+            <a:pPr algn="l">
+              <a:defRPr sz="1800" b="0">
+                <a:solidFill>
+                  <a:srgbClr val="222222"/>
+                </a:solidFill>
+                <a:latin typeface="Arial"/>
+              </a:defRPr>
+            </a:pPr>
+            <a:r>
+              <a:t>•  jugar a + Sport/Spiel</a:t>
+            </a:r>
+          </a:p>
+        </p:txBody>
+      </p:sp>
+      <p:sp>
+        <p:nvSpPr>
+          <p:cNvPr id="14" name="TextBox 13"/>
+          <p:cNvSpPr txBox="1"/>
+          <p:nvPr/>
+        </p:nvSpPr>
+        <p:spPr>
+          <a:xfrm>
+            <a:off x="6583680" y="2560320"/>
+            <a:ext cx="4846320" cy="457200"/>
+          </a:xfrm>
+          <a:prstGeom prst="rect">
+            <a:avLst/>
+          </a:prstGeom>
+          <a:noFill/>
+        </p:spPr>
+        <p:txBody>
+          <a:bodyPr wrap="none">
+            <a:spAutoFit/>
+          </a:bodyPr>
+          <a:lstStyle/>
+          <a:p>
+            <a:pPr algn="l">
+              <a:defRPr sz="1800" b="0">
+                <a:solidFill>
+                  <a:srgbClr val="222222"/>
+                </a:solidFill>
+                <a:latin typeface="Arial"/>
+              </a:defRPr>
+            </a:pPr>
+            <a:r>
+              <a:t>•  tocar + Instrument</a:t>
+            </a:r>
+          </a:p>
+        </p:txBody>
+      </p:sp>
+      <p:sp>
+        <p:nvSpPr>
+          <p:cNvPr id="15" name="TextBox 14"/>
+          <p:cNvSpPr txBox="1"/>
+          <p:nvPr/>
+        </p:nvSpPr>
+        <p:spPr>
+          <a:xfrm>
+            <a:off x="6583680" y="3108960"/>
+            <a:ext cx="4846320" cy="457200"/>
+          </a:xfrm>
+          <a:prstGeom prst="rect">
+            <a:avLst/>
+          </a:prstGeom>
+          <a:noFill/>
+        </p:spPr>
+        <p:txBody>
+          <a:bodyPr wrap="none">
+            <a:spAutoFit/>
+          </a:bodyPr>
+          <a:lstStyle/>
+          <a:p>
+            <a:pPr algn="l">
+              <a:defRPr sz="1800" b="0">
+                <a:solidFill>
+                  <a:srgbClr val="222222"/>
+                </a:solidFill>
+                <a:latin typeface="Arial"/>
+              </a:defRPr>
+            </a:pPr>
+            <a:r>
+              <a:t>•  nadar, correr, dibujar</a:t>
+            </a:r>
+          </a:p>
+        </p:txBody>
+      </p:sp>
+    </p:spTree>
+  </p:cSld>
+  <p:clrMapOvr>
+    <a:masterClrMapping/>
+  </p:clrMapOvr>
+</p:sld>
+</file>
+
+<file path=ppt/slides/slide13.xml><?xml version="1.0" encoding="utf-8"?>
+<p:sld xmlns:a="http://schemas.openxmlformats.org/drawingml/2006/main" xmlns:p="http://schemas.openxmlformats.org/presentationml/2006/main" xmlns:r="http://schemas.openxmlformats.org/officeDocument/2006/relationships">
+  <p:cSld>
+    <p:spTree>
+      <p:nvGrpSpPr>
+        <p:cNvPr id="1" name=""/>
+        <p:cNvGrpSpPr/>
+        <p:nvPr/>
+      </p:nvGrpSpPr>
+      <p:grpSpPr/>
+      <p:sp>
+        <p:nvSpPr>
+          <p:cNvPr id="2" name="Rectangle 1"/>
+          <p:cNvSpPr/>
+          <p:nvPr/>
+        </p:nvSpPr>
+        <p:spPr>
+          <a:xfrm>
+            <a:off x="0" y="0"/>
+            <a:ext cx="12191695" cy="457200"/>
+          </a:xfrm>
+          <a:prstGeom prst="rect">
+            <a:avLst/>
+          </a:prstGeom>
+          <a:solidFill>
+            <a:srgbClr val="C41E3A"/>
+          </a:solidFill>
+          <a:ln>
+            <a:noFill/>
+          </a:ln>
+        </p:spPr>
+        <p:style>
+          <a:lnRef idx="1">
+            <a:schemeClr val="accent1"/>
+          </a:lnRef>
+          <a:fillRef idx="3">
+            <a:schemeClr val="accent1"/>
+          </a:fillRef>
+          <a:effectRef idx="2">
+            <a:schemeClr val="accent1"/>
+          </a:effectRef>
+          <a:fontRef idx="minor">
+            <a:schemeClr val="lt1"/>
+          </a:fontRef>
+        </p:style>
+        <p:txBody>
+          <a:bodyPr rtlCol="0" anchor="ctr"/>
+          <a:lstStyle/>
+          <a:p>
+            <a:pPr algn="ctr"/>
+          </a:p>
+        </p:txBody>
+      </p:sp>
+      <p:sp>
+        <p:nvSpPr>
+          <p:cNvPr id="3" name="TextBox 2"/>
+          <p:cNvSpPr txBox="1"/>
+          <p:nvPr/>
+        </p:nvSpPr>
+        <p:spPr>
+          <a:xfrm>
+            <a:off x="274320" y="91440"/>
+            <a:ext cx="3657600" cy="274320"/>
+          </a:xfrm>
+          <a:prstGeom prst="rect">
+            <a:avLst/>
+          </a:prstGeom>
+          <a:noFill/>
+        </p:spPr>
+        <p:txBody>
+          <a:bodyPr wrap="none">
+            <a:spAutoFit/>
+          </a:bodyPr>
+          <a:lstStyle/>
+          <a:p>
+            <a:pPr algn="l">
+              <a:defRPr sz="1400" b="1">
+                <a:solidFill>
+                  <a:srgbClr val="FFFFFF"/>
+                </a:solidFill>
+                <a:latin typeface="Arial"/>
+              </a:defRPr>
+            </a:pPr>
+            <a:r>
+              <a:t>Spanisch Klasse 7 · LP-05a</a:t>
+            </a:r>
+          </a:p>
+        </p:txBody>
+      </p:sp>
+      <p:sp>
+        <p:nvSpPr>
+          <p:cNvPr id="4" name="Rectangle 3"/>
+          <p:cNvSpPr/>
+          <p:nvPr/>
+        </p:nvSpPr>
+        <p:spPr>
+          <a:xfrm>
+            <a:off x="0" y="6583680"/>
+            <a:ext cx="12191695" cy="274320"/>
+          </a:xfrm>
+          <a:prstGeom prst="rect">
+            <a:avLst/>
+          </a:prstGeom>
+          <a:solidFill>
+            <a:srgbClr val="F5F5F5"/>
+          </a:solidFill>
+          <a:ln>
+            <a:noFill/>
+          </a:ln>
+        </p:spPr>
+        <p:style>
+          <a:lnRef idx="1">
+            <a:schemeClr val="accent1"/>
+          </a:lnRef>
+          <a:fillRef idx="3">
+            <a:schemeClr val="accent1"/>
+          </a:fillRef>
+          <a:effectRef idx="2">
+            <a:schemeClr val="accent1"/>
+          </a:effectRef>
+          <a:fontRef idx="minor">
+            <a:schemeClr val="lt1"/>
+          </a:fontRef>
+        </p:style>
+        <p:txBody>
+          <a:bodyPr rtlCol="0" anchor="ctr"/>
+          <a:lstStyle/>
+          <a:p>
+            <a:pPr algn="ctr"/>
+          </a:p>
+        </p:txBody>
+      </p:sp>
+      <p:sp>
+        <p:nvSpPr>
+          <p:cNvPr id="5" name="TextBox 4"/>
+          <p:cNvSpPr txBox="1"/>
+          <p:nvPr/>
+        </p:nvSpPr>
+        <p:spPr>
+          <a:xfrm>
+            <a:off x="274320" y="6601968"/>
+            <a:ext cx="4572000" cy="228600"/>
+          </a:xfrm>
+          <a:prstGeom prst="rect">
+            <a:avLst/>
+          </a:prstGeom>
+          <a:noFill/>
+        </p:spPr>
+        <p:txBody>
+          <a:bodyPr wrap="none">
+            <a:spAutoFit/>
+          </a:bodyPr>
+          <a:lstStyle/>
+          <a:p>
+            <a:pPr algn="l">
+              <a:defRPr sz="1000" b="0">
+                <a:solidFill>
+                  <a:srgbClr val="555555"/>
+                </a:solidFill>
+                <a:latin typeface="Arial"/>
+              </a:defRPr>
+            </a:pPr>
+            <a:r>
+              <a:t>Los hobbys</a:t>
+            </a:r>
+          </a:p>
+        </p:txBody>
+      </p:sp>
+      <p:sp>
+        <p:nvSpPr>
+          <p:cNvPr id="6" name="TextBox 5"/>
+          <p:cNvSpPr txBox="1"/>
+          <p:nvPr/>
+        </p:nvSpPr>
+        <p:spPr>
+          <a:xfrm>
+            <a:off x="9144000" y="6601968"/>
+            <a:ext cx="2743200" cy="228600"/>
+          </a:xfrm>
+          <a:prstGeom prst="rect">
+            <a:avLst/>
+          </a:prstGeom>
+          <a:noFill/>
+        </p:spPr>
+        <p:txBody>
+          <a:bodyPr wrap="none">
+            <a:spAutoFit/>
+          </a:bodyPr>
+          <a:lstStyle/>
+          <a:p>
+            <a:pPr algn="r">
+              <a:defRPr sz="1000" b="0">
+                <a:solidFill>
+                  <a:srgbClr val="555555"/>
+                </a:solidFill>
+                <a:latin typeface="Arial"/>
+              </a:defRPr>
+            </a:pPr>
+            <a:r>
+              <a:t>Sequenz 5</a:t>
+            </a:r>
+          </a:p>
+        </p:txBody>
+      </p:sp>
+      <p:sp>
+        <p:nvSpPr>
+          <p:cNvPr id="7" name="Rectangle 6"/>
+          <p:cNvSpPr/>
+          <p:nvPr/>
+        </p:nvSpPr>
+        <p:spPr>
+          <a:xfrm>
+            <a:off x="457200" y="640080"/>
+            <a:ext cx="1828800" cy="457200"/>
+          </a:xfrm>
+          <a:prstGeom prst="rect">
+            <a:avLst/>
+          </a:prstGeom>
+          <a:solidFill>
+            <a:srgbClr val="C41E3A"/>
+          </a:solidFill>
+          <a:ln>
+            <a:noFill/>
+          </a:ln>
+        </p:spPr>
+        <p:style>
+          <a:lnRef idx="1">
+            <a:schemeClr val="accent1"/>
+          </a:lnRef>
+          <a:fillRef idx="3">
+            <a:schemeClr val="accent1"/>
+          </a:fillRef>
+          <a:effectRef idx="2">
+            <a:schemeClr val="accent1"/>
+          </a:effectRef>
+          <a:fontRef idx="minor">
+            <a:schemeClr val="lt1"/>
+          </a:fontRef>
+        </p:style>
+        <p:txBody>
+          <a:bodyPr rtlCol="0" anchor="ctr"/>
+          <a:lstStyle/>
+          <a:p>
+            <a:pPr algn="ctr"/>
+          </a:p>
+        </p:txBody>
+      </p:sp>
+      <p:sp>
+        <p:nvSpPr>
+          <p:cNvPr id="8" name="TextBox 7"/>
+          <p:cNvSpPr txBox="1"/>
+          <p:nvPr/>
+        </p:nvSpPr>
+        <p:spPr>
+          <a:xfrm>
+            <a:off x="548640" y="713231"/>
+            <a:ext cx="1645920" cy="320040"/>
+          </a:xfrm>
+          <a:prstGeom prst="rect">
+            <a:avLst/>
+          </a:prstGeom>
+          <a:noFill/>
+        </p:spPr>
+        <p:txBody>
+          <a:bodyPr wrap="none">
+            <a:spAutoFit/>
+          </a:bodyPr>
+          <a:lstStyle/>
+          <a:p>
+            <a:pPr algn="ctr">
+              <a:defRPr sz="1400" b="1">
+                <a:solidFill>
+                  <a:srgbClr val="FFFFFF"/>
+                </a:solidFill>
+                <a:latin typeface="Arial"/>
+              </a:defRPr>
+            </a:pPr>
+            <a:r>
+              <a:t>HAUSAUFGABE</a:t>
+            </a:r>
+          </a:p>
+        </p:txBody>
+      </p:sp>
+      <p:sp>
+        <p:nvSpPr>
+          <p:cNvPr id="9" name="TextBox 8"/>
+          <p:cNvSpPr txBox="1"/>
+          <p:nvPr/>
+        </p:nvSpPr>
+        <p:spPr>
+          <a:xfrm>
+            <a:off x="457200" y="1280160"/>
+            <a:ext cx="11274552" cy="731520"/>
+          </a:xfrm>
+          <a:prstGeom prst="rect">
+            <a:avLst/>
+          </a:prstGeom>
+          <a:noFill/>
+        </p:spPr>
+        <p:txBody>
+          <a:bodyPr wrap="none">
+            <a:spAutoFit/>
+          </a:bodyPr>
+          <a:lstStyle/>
+          <a:p>
+            <a:pPr algn="l">
+              <a:defRPr sz="3200" b="1">
+                <a:solidFill>
+                  <a:srgbClr val="C41E3A"/>
+                </a:solidFill>
+                <a:latin typeface="Arial"/>
+              </a:defRPr>
+            </a:pPr>
+            <a:r>
+              <a:t>📚 Para casa</a:t>
+            </a:r>
+          </a:p>
+        </p:txBody>
+      </p:sp>
+      <p:sp>
+        <p:nvSpPr>
+          <p:cNvPr id="10" name="TextBox 9"/>
+          <p:cNvSpPr txBox="1"/>
+          <p:nvPr/>
+        </p:nvSpPr>
+        <p:spPr>
+          <a:xfrm>
+            <a:off x="640080" y="2103120"/>
+            <a:ext cx="457200" cy="457200"/>
+          </a:xfrm>
+          <a:prstGeom prst="rect">
+            <a:avLst/>
+          </a:prstGeom>
+          <a:noFill/>
+        </p:spPr>
+        <p:txBody>
+          <a:bodyPr wrap="none">
+            <a:spAutoFit/>
+          </a:bodyPr>
+          <a:lstStyle/>
+          <a:p>
+            <a:pPr algn="l">
+              <a:defRPr sz="2400" b="1">
+                <a:solidFill>
+                  <a:srgbClr val="2A7A4B"/>
+                </a:solidFill>
+                <a:latin typeface="Arial"/>
+              </a:defRPr>
+            </a:pPr>
+            <a:r>
+              <a:t>✓</a:t>
+            </a:r>
+          </a:p>
+        </p:txBody>
+      </p:sp>
+      <p:sp>
+        <p:nvSpPr>
+          <p:cNvPr id="11" name="TextBox 10"/>
+          <p:cNvSpPr txBox="1"/>
+          <p:nvPr/>
+        </p:nvSpPr>
+        <p:spPr>
+          <a:xfrm>
+            <a:off x="1188720" y="2103120"/>
+            <a:ext cx="10058400" cy="457200"/>
+          </a:xfrm>
+          <a:prstGeom prst="rect">
+            <a:avLst/>
+          </a:prstGeom>
+          <a:noFill/>
+        </p:spPr>
+        <p:txBody>
+          <a:bodyPr wrap="none">
+            <a:spAutoFit/>
+          </a:bodyPr>
+          <a:lstStyle/>
+          <a:p>
+            <a:pPr algn="l">
+              <a:defRPr sz="2000" b="0">
+                <a:solidFill>
+                  <a:srgbClr val="222222"/>
+                </a:solidFill>
+                <a:latin typeface="Arial"/>
+              </a:defRPr>
+            </a:pPr>
+            <a:r>
+              <a:t>Hobby-Vokabeln lernen</a:t>
+            </a:r>
+          </a:p>
+        </p:txBody>
+      </p:sp>
+      <p:sp>
+        <p:nvSpPr>
+          <p:cNvPr id="12" name="TextBox 11"/>
+          <p:cNvSpPr txBox="1"/>
+          <p:nvPr/>
+        </p:nvSpPr>
+        <p:spPr>
+          <a:xfrm>
+            <a:off x="640080" y="2926079"/>
+            <a:ext cx="457200" cy="457200"/>
+          </a:xfrm>
+          <a:prstGeom prst="rect">
+            <a:avLst/>
+          </a:prstGeom>
+          <a:noFill/>
+        </p:spPr>
+        <p:txBody>
+          <a:bodyPr wrap="none">
+            <a:spAutoFit/>
+          </a:bodyPr>
+          <a:lstStyle/>
+          <a:p>
+            <a:pPr algn="l">
+              <a:defRPr sz="2400" b="1">
+                <a:solidFill>
+                  <a:srgbClr val="2A7A4B"/>
+                </a:solidFill>
+                <a:latin typeface="Arial"/>
+              </a:defRPr>
+            </a:pPr>
+            <a:r>
+              <a:t>✓</a:t>
+            </a:r>
+          </a:p>
+        </p:txBody>
+      </p:sp>
+      <p:sp>
+        <p:nvSpPr>
+          <p:cNvPr id="13" name="TextBox 12"/>
+          <p:cNvSpPr txBox="1"/>
+          <p:nvPr/>
+        </p:nvSpPr>
+        <p:spPr>
+          <a:xfrm>
+            <a:off x="1188720" y="2926079"/>
+            <a:ext cx="10058400" cy="457200"/>
+          </a:xfrm>
+          <a:prstGeom prst="rect">
+            <a:avLst/>
+          </a:prstGeom>
+          <a:noFill/>
+        </p:spPr>
+        <p:txBody>
+          <a:bodyPr wrap="none">
+            <a:spAutoFit/>
+          </a:bodyPr>
+          <a:lstStyle/>
+          <a:p>
+            <a:pPr algn="l">
+              <a:defRPr sz="2000" b="0">
+                <a:solidFill>
+                  <a:srgbClr val="222222"/>
+                </a:solidFill>
+                <a:latin typeface="Arial"/>
+              </a:defRPr>
+            </a:pPr>
+            <a:r>
+              <a:t>Deine Hobbys aufschreiben</a:t>
+            </a:r>
+          </a:p>
+        </p:txBody>
+      </p:sp>
+      <p:sp>
+        <p:nvSpPr>
+          <p:cNvPr id="14" name="TextBox 13"/>
+          <p:cNvSpPr txBox="1"/>
+          <p:nvPr/>
+        </p:nvSpPr>
+        <p:spPr>
+          <a:xfrm>
+            <a:off x="640080" y="3749039"/>
+            <a:ext cx="457200" cy="457200"/>
+          </a:xfrm>
+          <a:prstGeom prst="rect">
+            <a:avLst/>
+          </a:prstGeom>
+          <a:noFill/>
+        </p:spPr>
+        <p:txBody>
+          <a:bodyPr wrap="none">
+            <a:spAutoFit/>
+          </a:bodyPr>
+          <a:lstStyle/>
+          <a:p>
+            <a:pPr algn="l">
+              <a:defRPr sz="2400" b="1">
+                <a:solidFill>
+                  <a:srgbClr val="2A7A4B"/>
+                </a:solidFill>
+                <a:latin typeface="Arial"/>
+              </a:defRPr>
+            </a:pPr>
+            <a:r>
+              <a:t>✓</a:t>
+            </a:r>
+          </a:p>
+        </p:txBody>
+      </p:sp>
+      <p:sp>
+        <p:nvSpPr>
+          <p:cNvPr id="15" name="TextBox 14"/>
+          <p:cNvSpPr txBox="1"/>
+          <p:nvPr/>
+        </p:nvSpPr>
+        <p:spPr>
+          <a:xfrm>
+            <a:off x="1188720" y="3749039"/>
+            <a:ext cx="10058400" cy="457200"/>
+          </a:xfrm>
+          <a:prstGeom prst="rect">
+            <a:avLst/>
+          </a:prstGeom>
+          <a:noFill/>
+        </p:spPr>
+        <p:txBody>
+          <a:bodyPr wrap="none">
+            <a:spAutoFit/>
+          </a:bodyPr>
+          <a:lstStyle/>
+          <a:p>
+            <a:pPr algn="l">
+              <a:defRPr sz="2000" b="0">
+                <a:solidFill>
+                  <a:srgbClr val="222222"/>
+                </a:solidFill>
+                <a:latin typeface="Arial"/>
+              </a:defRPr>
+            </a:pPr>
+            <a:r>
+              <a:t>AB-05a vollständig</a:t>
+            </a:r>
+          </a:p>
+        </p:txBody>
+      </p:sp>
+      <p:sp>
+        <p:nvSpPr>
+          <p:cNvPr id="16" name="TextBox 15"/>
+          <p:cNvSpPr txBox="1"/>
+          <p:nvPr/>
+        </p:nvSpPr>
+        <p:spPr>
+          <a:xfrm>
+            <a:off x="457200" y="5760720"/>
+            <a:ext cx="11274552" cy="548640"/>
+          </a:xfrm>
+          <a:prstGeom prst="rect">
+            <a:avLst/>
+          </a:prstGeom>
+          <a:noFill/>
+        </p:spPr>
+        <p:txBody>
+          <a:bodyPr wrap="none">
+            <a:spAutoFit/>
+          </a:bodyPr>
+          <a:lstStyle/>
+          <a:p>
+            <a:pPr algn="ctr">
+              <a:defRPr sz="3200" b="1">
+                <a:solidFill>
+                  <a:srgbClr val="C41E3A"/>
+                </a:solidFill>
+                <a:latin typeface="Arial"/>
+              </a:defRPr>
+            </a:pPr>
+            <a:r>
+              <a:t>¡Hasta luego!</a:t>
+            </a:r>
+          </a:p>
+        </p:txBody>
+      </p:sp>
+    </p:spTree>
+  </p:cSld>
+  <p:clrMapOvr>
+    <a:masterClrMapping/>
+  </p:clrMapOvr>
+</p:sld>
+</file>
+
 <file path=ppt/slides/slide2.xml><?xml version="1.0" encoding="utf-8"?>
 <p:sld xmlns:a="http://schemas.openxmlformats.org/drawingml/2006/main" xmlns:p="http://schemas.openxmlformats.org/presentationml/2006/main" xmlns:r="http://schemas.openxmlformats.org/officeDocument/2006/relationships">
   <p:cSld>
@@ -3557,51 +5776,44 @@
               </a:defRPr>
             </a:pPr>
             <a:r>
-              <a:t>📚 Hobbys</a:t>
-            </a:r>
-          </a:p>
-        </p:txBody>
-      </p:sp>
-      <p:sp>
-        <p:nvSpPr>
-          <p:cNvPr id="8" name="Rectangle 7"/>
-          <p:cNvSpPr/>
-          <p:nvPr/>
-        </p:nvSpPr>
-        <p:spPr>
-          <a:xfrm>
-            <a:off x="457200" y="1371600"/>
-            <a:ext cx="11274552" cy="594360"/>
-          </a:xfrm>
-          <a:prstGeom prst="rect">
-            <a:avLst/>
-          </a:prstGeom>
-          <a:solidFill>
-            <a:srgbClr val="C41E3A"/>
-          </a:solidFill>
-          <a:ln>
-            <a:noFill/>
-          </a:ln>
-        </p:spPr>
-        <p:style>
-          <a:lnRef idx="1">
-            <a:schemeClr val="accent1"/>
-          </a:lnRef>
-          <a:fillRef idx="3">
-            <a:schemeClr val="accent1"/>
-          </a:fillRef>
-          <a:effectRef idx="2">
-            <a:schemeClr val="accent1"/>
-          </a:effectRef>
-          <a:fontRef idx="minor">
-            <a:schemeClr val="lt1"/>
-          </a:fontRef>
-        </p:style>
-        <p:txBody>
-          <a:bodyPr rtlCol="0" anchor="ctr"/>
-          <a:lstStyle/>
-          <a:p>
-            <a:pPr algn="ctr"/>
+              <a:t>Lernziele</a:t>
+            </a:r>
+          </a:p>
+        </p:txBody>
+      </p:sp>
+      <p:sp>
+        <p:nvSpPr>
+          <p:cNvPr id="8" name="TextBox 7"/>
+          <p:cNvSpPr txBox="1"/>
+          <p:nvPr/>
+        </p:nvSpPr>
+        <p:spPr>
+          <a:xfrm>
+            <a:off x="640080" y="1463040"/>
+            <a:ext cx="10972800" cy="548640"/>
+          </a:xfrm>
+          <a:prstGeom prst="rect">
+            <a:avLst/>
+          </a:prstGeom>
+          <a:noFill/>
+        </p:spPr>
+        <p:txBody>
+          <a:bodyPr wrap="none">
+            <a:spAutoFit/>
+          </a:bodyPr>
+          <a:lstStyle/>
+          <a:p>
+            <a:pPr algn="l">
+              <a:defRPr sz="2000" b="0">
+                <a:solidFill>
+                  <a:srgbClr val="222222"/>
+                </a:solidFill>
+                <a:latin typeface="Arial"/>
+              </a:defRPr>
+            </a:pPr>
+            <a:r>
+              <a:t>Hobbys benennen</a:t>
+            </a:r>
           </a:p>
         </p:txBody>
       </p:sp>
@@ -3613,30 +5825,30 @@
         </p:nvSpPr>
         <p:spPr>
           <a:xfrm>
-            <a:off x="640080" y="1481328"/>
-            <a:ext cx="5029200" cy="365760"/>
-          </a:xfrm>
-          <a:prstGeom prst="rect">
-            <a:avLst/>
-          </a:prstGeom>
-          <a:noFill/>
-        </p:spPr>
-        <p:txBody>
-          <a:bodyPr wrap="none">
-            <a:spAutoFit/>
-          </a:bodyPr>
-          <a:lstStyle/>
-          <a:p>
-            <a:pPr algn="l">
-              <a:defRPr sz="1800" b="1">
-                <a:solidFill>
-                  <a:srgbClr val="FFFFFF"/>
-                </a:solidFill>
-                <a:latin typeface="Arial"/>
-              </a:defRPr>
-            </a:pPr>
-            <a:r>
-              <a:t>Spanisch</a:t>
+            <a:off x="640080" y="2194560"/>
+            <a:ext cx="10972800" cy="548640"/>
+          </a:xfrm>
+          <a:prstGeom prst="rect">
+            <a:avLst/>
+          </a:prstGeom>
+          <a:noFill/>
+        </p:spPr>
+        <p:txBody>
+          <a:bodyPr wrap="none">
+            <a:spAutoFit/>
+          </a:bodyPr>
+          <a:lstStyle/>
+          <a:p>
+            <a:pPr algn="l">
+              <a:defRPr sz="2000" b="0">
+                <a:solidFill>
+                  <a:srgbClr val="222222"/>
+                </a:solidFill>
+                <a:latin typeface="Arial"/>
+              </a:defRPr>
+            </a:pPr>
+            <a:r>
+              <a:t>Über Freizeit sprechen</a:t>
             </a:r>
           </a:p>
         </p:txBody>
@@ -3649,80 +5861,8 @@
         </p:nvSpPr>
         <p:spPr>
           <a:xfrm>
-            <a:off x="5943600" y="1481328"/>
-            <a:ext cx="5029200" cy="365760"/>
-          </a:xfrm>
-          <a:prstGeom prst="rect">
-            <a:avLst/>
-          </a:prstGeom>
-          <a:noFill/>
-        </p:spPr>
-        <p:txBody>
-          <a:bodyPr wrap="none">
-            <a:spAutoFit/>
-          </a:bodyPr>
-          <a:lstStyle/>
-          <a:p>
-            <a:pPr algn="l">
-              <a:defRPr sz="1800" b="1">
-                <a:solidFill>
-                  <a:srgbClr val="FFFFFF"/>
-                </a:solidFill>
-                <a:latin typeface="Arial"/>
-              </a:defRPr>
-            </a:pPr>
-            <a:r>
-              <a:t>Deutsch</a:t>
-            </a:r>
-          </a:p>
-        </p:txBody>
-      </p:sp>
-      <p:sp>
-        <p:nvSpPr>
-          <p:cNvPr id="11" name="TextBox 10"/>
-          <p:cNvSpPr txBox="1"/>
-          <p:nvPr/>
-        </p:nvSpPr>
-        <p:spPr>
-          <a:xfrm>
-            <a:off x="640080" y="2075688"/>
-            <a:ext cx="5029200" cy="365760"/>
-          </a:xfrm>
-          <a:prstGeom prst="rect">
-            <a:avLst/>
-          </a:prstGeom>
-          <a:noFill/>
-        </p:spPr>
-        <p:txBody>
-          <a:bodyPr wrap="none">
-            <a:spAutoFit/>
-          </a:bodyPr>
-          <a:lstStyle/>
-          <a:p>
-            <a:pPr algn="l">
-              <a:defRPr sz="2000" b="1">
-                <a:solidFill>
-                  <a:srgbClr val="C41E3A"/>
-                </a:solidFill>
-                <a:latin typeface="Arial"/>
-              </a:defRPr>
-            </a:pPr>
-            <a:r>
-              <a:t>jugar al fútbol</a:t>
-            </a:r>
-          </a:p>
-        </p:txBody>
-      </p:sp>
-      <p:sp>
-        <p:nvSpPr>
-          <p:cNvPr id="12" name="TextBox 11"/>
-          <p:cNvSpPr txBox="1"/>
-          <p:nvPr/>
-        </p:nvSpPr>
-        <p:spPr>
-          <a:xfrm>
-            <a:off x="5943600" y="2075688"/>
-            <a:ext cx="5029200" cy="365760"/>
+            <a:off x="640080" y="2926080"/>
+            <a:ext cx="10972800" cy="548640"/>
           </a:xfrm>
           <a:prstGeom prst="rect">
             <a:avLst/>
@@ -3744,390 +5884,7 @@
               </a:defRPr>
             </a:pPr>
             <a:r>
-              <a:t>Fußball spielen</a:t>
-            </a:r>
-          </a:p>
-        </p:txBody>
-      </p:sp>
-      <p:sp>
-        <p:nvSpPr>
-          <p:cNvPr id="13" name="Rectangle 12"/>
-          <p:cNvSpPr/>
-          <p:nvPr/>
-        </p:nvSpPr>
-        <p:spPr>
-          <a:xfrm>
-            <a:off x="457200" y="2560320"/>
-            <a:ext cx="11274552" cy="594360"/>
-          </a:xfrm>
-          <a:prstGeom prst="rect">
-            <a:avLst/>
-          </a:prstGeom>
-          <a:solidFill>
-            <a:srgbClr val="F5F5F5"/>
-          </a:solidFill>
-          <a:ln>
-            <a:noFill/>
-          </a:ln>
-        </p:spPr>
-        <p:style>
-          <a:lnRef idx="1">
-            <a:schemeClr val="accent1"/>
-          </a:lnRef>
-          <a:fillRef idx="3">
-            <a:schemeClr val="accent1"/>
-          </a:fillRef>
-          <a:effectRef idx="2">
-            <a:schemeClr val="accent1"/>
-          </a:effectRef>
-          <a:fontRef idx="minor">
-            <a:schemeClr val="lt1"/>
-          </a:fontRef>
-        </p:style>
-        <p:txBody>
-          <a:bodyPr rtlCol="0" anchor="ctr"/>
-          <a:lstStyle/>
-          <a:p>
-            <a:pPr algn="ctr"/>
-          </a:p>
-        </p:txBody>
-      </p:sp>
-      <p:sp>
-        <p:nvSpPr>
-          <p:cNvPr id="14" name="TextBox 13"/>
-          <p:cNvSpPr txBox="1"/>
-          <p:nvPr/>
-        </p:nvSpPr>
-        <p:spPr>
-          <a:xfrm>
-            <a:off x="640080" y="2670048"/>
-            <a:ext cx="5029200" cy="365760"/>
-          </a:xfrm>
-          <a:prstGeom prst="rect">
-            <a:avLst/>
-          </a:prstGeom>
-          <a:noFill/>
-        </p:spPr>
-        <p:txBody>
-          <a:bodyPr wrap="none">
-            <a:spAutoFit/>
-          </a:bodyPr>
-          <a:lstStyle/>
-          <a:p>
-            <a:pPr algn="l">
-              <a:defRPr sz="2000" b="1">
-                <a:solidFill>
-                  <a:srgbClr val="C41E3A"/>
-                </a:solidFill>
-                <a:latin typeface="Arial"/>
-              </a:defRPr>
-            </a:pPr>
-            <a:r>
-              <a:t>tocar la guitarra</a:t>
-            </a:r>
-          </a:p>
-        </p:txBody>
-      </p:sp>
-      <p:sp>
-        <p:nvSpPr>
-          <p:cNvPr id="15" name="TextBox 14"/>
-          <p:cNvSpPr txBox="1"/>
-          <p:nvPr/>
-        </p:nvSpPr>
-        <p:spPr>
-          <a:xfrm>
-            <a:off x="5943600" y="2670048"/>
-            <a:ext cx="5029200" cy="365760"/>
-          </a:xfrm>
-          <a:prstGeom prst="rect">
-            <a:avLst/>
-          </a:prstGeom>
-          <a:noFill/>
-        </p:spPr>
-        <p:txBody>
-          <a:bodyPr wrap="none">
-            <a:spAutoFit/>
-          </a:bodyPr>
-          <a:lstStyle/>
-          <a:p>
-            <a:pPr algn="l">
-              <a:defRPr sz="2000" b="0">
-                <a:solidFill>
-                  <a:srgbClr val="222222"/>
-                </a:solidFill>
-                <a:latin typeface="Arial"/>
-              </a:defRPr>
-            </a:pPr>
-            <a:r>
-              <a:t>Gitarre spielen</a:t>
-            </a:r>
-          </a:p>
-        </p:txBody>
-      </p:sp>
-      <p:sp>
-        <p:nvSpPr>
-          <p:cNvPr id="16" name="TextBox 15"/>
-          <p:cNvSpPr txBox="1"/>
-          <p:nvPr/>
-        </p:nvSpPr>
-        <p:spPr>
-          <a:xfrm>
-            <a:off x="640080" y="3264408"/>
-            <a:ext cx="5029200" cy="365760"/>
-          </a:xfrm>
-          <a:prstGeom prst="rect">
-            <a:avLst/>
-          </a:prstGeom>
-          <a:noFill/>
-        </p:spPr>
-        <p:txBody>
-          <a:bodyPr wrap="none">
-            <a:spAutoFit/>
-          </a:bodyPr>
-          <a:lstStyle/>
-          <a:p>
-            <a:pPr algn="l">
-              <a:defRPr sz="2000" b="1">
-                <a:solidFill>
-                  <a:srgbClr val="C41E3A"/>
-                </a:solidFill>
-                <a:latin typeface="Arial"/>
-              </a:defRPr>
-            </a:pPr>
-            <a:r>
-              <a:t>ver la tele</a:t>
-            </a:r>
-          </a:p>
-        </p:txBody>
-      </p:sp>
-      <p:sp>
-        <p:nvSpPr>
-          <p:cNvPr id="17" name="TextBox 16"/>
-          <p:cNvSpPr txBox="1"/>
-          <p:nvPr/>
-        </p:nvSpPr>
-        <p:spPr>
-          <a:xfrm>
-            <a:off x="5943600" y="3264408"/>
-            <a:ext cx="5029200" cy="365760"/>
-          </a:xfrm>
-          <a:prstGeom prst="rect">
-            <a:avLst/>
-          </a:prstGeom>
-          <a:noFill/>
-        </p:spPr>
-        <p:txBody>
-          <a:bodyPr wrap="none">
-            <a:spAutoFit/>
-          </a:bodyPr>
-          <a:lstStyle/>
-          <a:p>
-            <a:pPr algn="l">
-              <a:defRPr sz="2000" b="0">
-                <a:solidFill>
-                  <a:srgbClr val="222222"/>
-                </a:solidFill>
-                <a:latin typeface="Arial"/>
-              </a:defRPr>
-            </a:pPr>
-            <a:r>
-              <a:t>fernsehen</a:t>
-            </a:r>
-          </a:p>
-        </p:txBody>
-      </p:sp>
-      <p:sp>
-        <p:nvSpPr>
-          <p:cNvPr id="18" name="Rectangle 17"/>
-          <p:cNvSpPr/>
-          <p:nvPr/>
-        </p:nvSpPr>
-        <p:spPr>
-          <a:xfrm>
-            <a:off x="457200" y="3749039"/>
-            <a:ext cx="11274552" cy="594360"/>
-          </a:xfrm>
-          <a:prstGeom prst="rect">
-            <a:avLst/>
-          </a:prstGeom>
-          <a:solidFill>
-            <a:srgbClr val="F5F5F5"/>
-          </a:solidFill>
-          <a:ln>
-            <a:noFill/>
-          </a:ln>
-        </p:spPr>
-        <p:style>
-          <a:lnRef idx="1">
-            <a:schemeClr val="accent1"/>
-          </a:lnRef>
-          <a:fillRef idx="3">
-            <a:schemeClr val="accent1"/>
-          </a:fillRef>
-          <a:effectRef idx="2">
-            <a:schemeClr val="accent1"/>
-          </a:effectRef>
-          <a:fontRef idx="minor">
-            <a:schemeClr val="lt1"/>
-          </a:fontRef>
-        </p:style>
-        <p:txBody>
-          <a:bodyPr rtlCol="0" anchor="ctr"/>
-          <a:lstStyle/>
-          <a:p>
-            <a:pPr algn="ctr"/>
-          </a:p>
-        </p:txBody>
-      </p:sp>
-      <p:sp>
-        <p:nvSpPr>
-          <p:cNvPr id="19" name="TextBox 18"/>
-          <p:cNvSpPr txBox="1"/>
-          <p:nvPr/>
-        </p:nvSpPr>
-        <p:spPr>
-          <a:xfrm>
-            <a:off x="640080" y="3858768"/>
-            <a:ext cx="5029200" cy="365760"/>
-          </a:xfrm>
-          <a:prstGeom prst="rect">
-            <a:avLst/>
-          </a:prstGeom>
-          <a:noFill/>
-        </p:spPr>
-        <p:txBody>
-          <a:bodyPr wrap="none">
-            <a:spAutoFit/>
-          </a:bodyPr>
-          <a:lstStyle/>
-          <a:p>
-            <a:pPr algn="l">
-              <a:defRPr sz="2000" b="1">
-                <a:solidFill>
-                  <a:srgbClr val="C41E3A"/>
-                </a:solidFill>
-                <a:latin typeface="Arial"/>
-              </a:defRPr>
-            </a:pPr>
-            <a:r>
-              <a:t>leer libros</a:t>
-            </a:r>
-          </a:p>
-        </p:txBody>
-      </p:sp>
-      <p:sp>
-        <p:nvSpPr>
-          <p:cNvPr id="20" name="TextBox 19"/>
-          <p:cNvSpPr txBox="1"/>
-          <p:nvPr/>
-        </p:nvSpPr>
-        <p:spPr>
-          <a:xfrm>
-            <a:off x="5943600" y="3858768"/>
-            <a:ext cx="5029200" cy="365760"/>
-          </a:xfrm>
-          <a:prstGeom prst="rect">
-            <a:avLst/>
-          </a:prstGeom>
-          <a:noFill/>
-        </p:spPr>
-        <p:txBody>
-          <a:bodyPr wrap="none">
-            <a:spAutoFit/>
-          </a:bodyPr>
-          <a:lstStyle/>
-          <a:p>
-            <a:pPr algn="l">
-              <a:defRPr sz="2000" b="0">
-                <a:solidFill>
-                  <a:srgbClr val="222222"/>
-                </a:solidFill>
-                <a:latin typeface="Arial"/>
-              </a:defRPr>
-            </a:pPr>
-            <a:r>
-              <a:t>Bücher lesen</a:t>
-            </a:r>
-          </a:p>
-        </p:txBody>
-      </p:sp>
-      <p:sp>
-        <p:nvSpPr>
-          <p:cNvPr id="21" name="Rectangle 20"/>
-          <p:cNvSpPr/>
-          <p:nvPr/>
-        </p:nvSpPr>
-        <p:spPr>
-          <a:xfrm>
-            <a:off x="457200" y="5943600"/>
-            <a:ext cx="11274552" cy="548640"/>
-          </a:xfrm>
-          <a:prstGeom prst="rect">
-            <a:avLst/>
-          </a:prstGeom>
-          <a:solidFill>
-            <a:srgbClr val="FDF2F4"/>
-          </a:solidFill>
-          <a:ln>
-            <a:solidFill>
-              <a:srgbClr val="C41E3A"/>
-            </a:solidFill>
-          </a:ln>
-        </p:spPr>
-        <p:style>
-          <a:lnRef idx="1">
-            <a:schemeClr val="accent1"/>
-          </a:lnRef>
-          <a:fillRef idx="3">
-            <a:schemeClr val="accent1"/>
-          </a:fillRef>
-          <a:effectRef idx="2">
-            <a:schemeClr val="accent1"/>
-          </a:effectRef>
-          <a:fontRef idx="minor">
-            <a:schemeClr val="lt1"/>
-          </a:fontRef>
-        </p:style>
-        <p:txBody>
-          <a:bodyPr rtlCol="0" anchor="ctr"/>
-          <a:lstStyle/>
-          <a:p>
-            <a:pPr algn="ctr"/>
-          </a:p>
-        </p:txBody>
-      </p:sp>
-      <p:sp>
-        <p:nvSpPr>
-          <p:cNvPr id="22" name="TextBox 21"/>
-          <p:cNvSpPr txBox="1"/>
-          <p:nvPr/>
-        </p:nvSpPr>
-        <p:spPr>
-          <a:xfrm>
-            <a:off x="640080" y="6053328"/>
-            <a:ext cx="10972800" cy="365760"/>
-          </a:xfrm>
-          <a:prstGeom prst="rect">
-            <a:avLst/>
-          </a:prstGeom>
-          <a:noFill/>
-        </p:spPr>
-        <p:txBody>
-          <a:bodyPr wrap="none">
-            <a:spAutoFit/>
-          </a:bodyPr>
-          <a:lstStyle/>
-          <a:p>
-            <a:pPr algn="l">
-              <a:defRPr sz="1400" b="1">
-                <a:solidFill>
-                  <a:srgbClr val="C41E3A"/>
-                </a:solidFill>
-                <a:latin typeface="Arial"/>
-              </a:defRPr>
-            </a:pPr>
-            <a:r>
-              <a:t>📝 AB-05a: Kasten 1</a:t>
+              <a:t>jugar a / tocar unterscheiden</a:t>
             </a:r>
           </a:p>
         </p:txBody>
@@ -4346,14 +6103,50 @@
       </p:sp>
       <p:sp>
         <p:nvSpPr>
-          <p:cNvPr id="7" name="Rectangle 6"/>
+          <p:cNvPr id="7" name="TextBox 6"/>
+          <p:cNvSpPr txBox="1"/>
+          <p:nvPr/>
+        </p:nvSpPr>
+        <p:spPr>
+          <a:xfrm>
+            <a:off x="457200" y="640080"/>
+            <a:ext cx="11274552" cy="731520"/>
+          </a:xfrm>
+          <a:prstGeom prst="rect">
+            <a:avLst/>
+          </a:prstGeom>
+          <a:noFill/>
+        </p:spPr>
+        <p:txBody>
+          <a:bodyPr wrap="none">
+            <a:spAutoFit/>
+          </a:bodyPr>
+          <a:lstStyle/>
+          <a:p>
+            <a:pPr algn="l">
+              <a:defRPr sz="3200" b="1">
+                <a:solidFill>
+                  <a:srgbClr val="C41E3A"/>
+                </a:solidFill>
+                <a:latin typeface="Arial"/>
+              </a:defRPr>
+            </a:pPr>
+            <a:r>
+              <a:t>📚 Sport</a:t>
+            </a:r>
+          </a:p>
+        </p:txBody>
+      </p:sp>
+      <p:sp>
+        <p:nvSpPr>
+          <p:cNvPr id="8" name="Rectangle 7"/>
           <p:cNvSpPr/>
           <p:nvPr/>
         </p:nvSpPr>
         <p:spPr>
           <a:xfrm>
-            <a:off x="457200" y="640080"/>
-            <a:ext cx="1828800" cy="457200"/>
+            <a:off x="457200" y="1371600"/>
+            <a:ext cx="11274552" cy="594360"/>
           </a:xfrm>
           <a:prstGeom prst="rect">
             <a:avLst/>
@@ -4389,28 +6182,28 @@
       </p:sp>
       <p:sp>
         <p:nvSpPr>
-          <p:cNvPr id="8" name="TextBox 7"/>
-          <p:cNvSpPr txBox="1"/>
-          <p:nvPr/>
-        </p:nvSpPr>
-        <p:spPr>
-          <a:xfrm>
-            <a:off x="548640" y="713231"/>
-            <a:ext cx="1645920" cy="320040"/>
-          </a:xfrm>
-          <a:prstGeom prst="rect">
-            <a:avLst/>
-          </a:prstGeom>
-          <a:noFill/>
-        </p:spPr>
-        <p:txBody>
-          <a:bodyPr wrap="none">
-            <a:spAutoFit/>
-          </a:bodyPr>
-          <a:lstStyle/>
-          <a:p>
-            <a:pPr algn="ctr">
-              <a:defRPr sz="1400" b="1">
+          <p:cNvPr id="9" name="TextBox 8"/>
+          <p:cNvSpPr txBox="1"/>
+          <p:nvPr/>
+        </p:nvSpPr>
+        <p:spPr>
+          <a:xfrm>
+            <a:off x="640080" y="1481328"/>
+            <a:ext cx="5029200" cy="365760"/>
+          </a:xfrm>
+          <a:prstGeom prst="rect">
+            <a:avLst/>
+          </a:prstGeom>
+          <a:noFill/>
+        </p:spPr>
+        <p:txBody>
+          <a:bodyPr wrap="none">
+            <a:spAutoFit/>
+          </a:bodyPr>
+          <a:lstStyle/>
+          <a:p>
+            <a:pPr algn="l">
+              <a:defRPr sz="1800" b="1">
                 <a:solidFill>
                   <a:srgbClr val="FFFFFF"/>
                 </a:solidFill>
@@ -4418,35 +6211,71 @@
               </a:defRPr>
             </a:pPr>
             <a:r>
-              <a:t>ÜBUNG</a:t>
-            </a:r>
-          </a:p>
-        </p:txBody>
-      </p:sp>
-      <p:sp>
-        <p:nvSpPr>
-          <p:cNvPr id="9" name="TextBox 8"/>
-          <p:cNvSpPr txBox="1"/>
-          <p:nvPr/>
-        </p:nvSpPr>
-        <p:spPr>
-          <a:xfrm>
-            <a:off x="457200" y="1280160"/>
-            <a:ext cx="11274552" cy="731520"/>
-          </a:xfrm>
-          <a:prstGeom prst="rect">
-            <a:avLst/>
-          </a:prstGeom>
-          <a:noFill/>
-        </p:spPr>
-        <p:txBody>
-          <a:bodyPr wrap="none">
-            <a:spAutoFit/>
-          </a:bodyPr>
-          <a:lstStyle/>
-          <a:p>
-            <a:pPr algn="l">
-              <a:defRPr sz="3200" b="1">
+              <a:t>Spanisch</a:t>
+            </a:r>
+          </a:p>
+        </p:txBody>
+      </p:sp>
+      <p:sp>
+        <p:nvSpPr>
+          <p:cNvPr id="10" name="TextBox 9"/>
+          <p:cNvSpPr txBox="1"/>
+          <p:nvPr/>
+        </p:nvSpPr>
+        <p:spPr>
+          <a:xfrm>
+            <a:off x="5943600" y="1481328"/>
+            <a:ext cx="5029200" cy="365760"/>
+          </a:xfrm>
+          <a:prstGeom prst="rect">
+            <a:avLst/>
+          </a:prstGeom>
+          <a:noFill/>
+        </p:spPr>
+        <p:txBody>
+          <a:bodyPr wrap="none">
+            <a:spAutoFit/>
+          </a:bodyPr>
+          <a:lstStyle/>
+          <a:p>
+            <a:pPr algn="l">
+              <a:defRPr sz="1800" b="1">
+                <a:solidFill>
+                  <a:srgbClr val="FFFFFF"/>
+                </a:solidFill>
+                <a:latin typeface="Arial"/>
+              </a:defRPr>
+            </a:pPr>
+            <a:r>
+              <a:t>Deutsch</a:t>
+            </a:r>
+          </a:p>
+        </p:txBody>
+      </p:sp>
+      <p:sp>
+        <p:nvSpPr>
+          <p:cNvPr id="11" name="TextBox 10"/>
+          <p:cNvSpPr txBox="1"/>
+          <p:nvPr/>
+        </p:nvSpPr>
+        <p:spPr>
+          <a:xfrm>
+            <a:off x="640080" y="2075688"/>
+            <a:ext cx="5029200" cy="365760"/>
+          </a:xfrm>
+          <a:prstGeom prst="rect">
+            <a:avLst/>
+          </a:prstGeom>
+          <a:noFill/>
+        </p:spPr>
+        <p:txBody>
+          <a:bodyPr wrap="none">
+            <a:spAutoFit/>
+          </a:bodyPr>
+          <a:lstStyle/>
+          <a:p>
+            <a:pPr algn="l">
+              <a:defRPr sz="2000" b="1">
                 <a:solidFill>
                   <a:srgbClr val="C41E3A"/>
                 </a:solidFill>
@@ -4454,35 +6283,114 @@
               </a:defRPr>
             </a:pPr>
             <a:r>
-              <a:t>✏️ Zuordnen</a:t>
-            </a:r>
-          </a:p>
-        </p:txBody>
-      </p:sp>
-      <p:sp>
-        <p:nvSpPr>
-          <p:cNvPr id="10" name="TextBox 9"/>
-          <p:cNvSpPr txBox="1"/>
-          <p:nvPr/>
-        </p:nvSpPr>
-        <p:spPr>
-          <a:xfrm>
-            <a:off x="640080" y="2011680"/>
-            <a:ext cx="5029200" cy="548640"/>
-          </a:xfrm>
-          <a:prstGeom prst="rect">
-            <a:avLst/>
-          </a:prstGeom>
-          <a:noFill/>
-        </p:spPr>
-        <p:txBody>
-          <a:bodyPr wrap="none">
-            <a:spAutoFit/>
-          </a:bodyPr>
-          <a:lstStyle/>
-          <a:p>
-            <a:pPr algn="l">
-              <a:defRPr sz="2200" b="1">
+              <a:t>jugar al fútbol</a:t>
+            </a:r>
+          </a:p>
+        </p:txBody>
+      </p:sp>
+      <p:sp>
+        <p:nvSpPr>
+          <p:cNvPr id="12" name="TextBox 11"/>
+          <p:cNvSpPr txBox="1"/>
+          <p:nvPr/>
+        </p:nvSpPr>
+        <p:spPr>
+          <a:xfrm>
+            <a:off x="5943600" y="2075688"/>
+            <a:ext cx="5029200" cy="365760"/>
+          </a:xfrm>
+          <a:prstGeom prst="rect">
+            <a:avLst/>
+          </a:prstGeom>
+          <a:noFill/>
+        </p:spPr>
+        <p:txBody>
+          <a:bodyPr wrap="none">
+            <a:spAutoFit/>
+          </a:bodyPr>
+          <a:lstStyle/>
+          <a:p>
+            <a:pPr algn="l">
+              <a:defRPr sz="2000" b="0">
+                <a:solidFill>
+                  <a:srgbClr val="222222"/>
+                </a:solidFill>
+                <a:latin typeface="Arial"/>
+              </a:defRPr>
+            </a:pPr>
+            <a:r>
+              <a:t>Fußball spielen</a:t>
+            </a:r>
+          </a:p>
+        </p:txBody>
+      </p:sp>
+      <p:sp>
+        <p:nvSpPr>
+          <p:cNvPr id="13" name="Rectangle 12"/>
+          <p:cNvSpPr/>
+          <p:nvPr/>
+        </p:nvSpPr>
+        <p:spPr>
+          <a:xfrm>
+            <a:off x="457200" y="2560320"/>
+            <a:ext cx="11274552" cy="594360"/>
+          </a:xfrm>
+          <a:prstGeom prst="rect">
+            <a:avLst/>
+          </a:prstGeom>
+          <a:solidFill>
+            <a:srgbClr val="F5F5F5"/>
+          </a:solidFill>
+          <a:ln>
+            <a:noFill/>
+          </a:ln>
+        </p:spPr>
+        <p:style>
+          <a:lnRef idx="1">
+            <a:schemeClr val="accent1"/>
+          </a:lnRef>
+          <a:fillRef idx="3">
+            <a:schemeClr val="accent1"/>
+          </a:fillRef>
+          <a:effectRef idx="2">
+            <a:schemeClr val="accent1"/>
+          </a:effectRef>
+          <a:fontRef idx="minor">
+            <a:schemeClr val="lt1"/>
+          </a:fontRef>
+        </p:style>
+        <p:txBody>
+          <a:bodyPr rtlCol="0" anchor="ctr"/>
+          <a:lstStyle/>
+          <a:p>
+            <a:pPr algn="ctr"/>
+          </a:p>
+        </p:txBody>
+      </p:sp>
+      <p:sp>
+        <p:nvSpPr>
+          <p:cNvPr id="14" name="TextBox 13"/>
+          <p:cNvSpPr txBox="1"/>
+          <p:nvPr/>
+        </p:nvSpPr>
+        <p:spPr>
+          <a:xfrm>
+            <a:off x="640080" y="2670048"/>
+            <a:ext cx="5029200" cy="365760"/>
+          </a:xfrm>
+          <a:prstGeom prst="rect">
+            <a:avLst/>
+          </a:prstGeom>
+          <a:noFill/>
+        </p:spPr>
+        <p:txBody>
+          <a:bodyPr wrap="none">
+            <a:spAutoFit/>
+          </a:bodyPr>
+          <a:lstStyle/>
+          <a:p>
+            <a:pPr algn="l">
+              <a:defRPr sz="2000" b="1">
                 <a:solidFill>
                   <a:srgbClr val="C41E3A"/>
                 </a:solidFill>
@@ -4490,71 +6398,71 @@
               </a:defRPr>
             </a:pPr>
             <a:r>
-              <a:t>⚽</a:t>
-            </a:r>
-          </a:p>
-        </p:txBody>
-      </p:sp>
-      <p:sp>
-        <p:nvSpPr>
-          <p:cNvPr id="11" name="TextBox 10"/>
-          <p:cNvSpPr txBox="1"/>
-          <p:nvPr/>
-        </p:nvSpPr>
-        <p:spPr>
-          <a:xfrm>
-            <a:off x="5943600" y="2011680"/>
-            <a:ext cx="5029200" cy="548640"/>
-          </a:xfrm>
-          <a:prstGeom prst="rect">
-            <a:avLst/>
-          </a:prstGeom>
-          <a:noFill/>
-        </p:spPr>
-        <p:txBody>
-          <a:bodyPr wrap="none">
-            <a:spAutoFit/>
-          </a:bodyPr>
-          <a:lstStyle/>
-          <a:p>
-            <a:pPr algn="l">
-              <a:defRPr sz="2200" b="0">
-                <a:solidFill>
-                  <a:srgbClr val="888888"/>
-                </a:solidFill>
-                <a:latin typeface="Arial"/>
-              </a:defRPr>
-            </a:pPr>
-            <a:r>
-              <a:t>jugar al fútbol</a:t>
-            </a:r>
-          </a:p>
-        </p:txBody>
-      </p:sp>
-      <p:sp>
-        <p:nvSpPr>
-          <p:cNvPr id="12" name="TextBox 11"/>
-          <p:cNvSpPr txBox="1"/>
-          <p:nvPr/>
-        </p:nvSpPr>
-        <p:spPr>
-          <a:xfrm>
-            <a:off x="640080" y="2926080"/>
-            <a:ext cx="5029200" cy="548640"/>
-          </a:xfrm>
-          <a:prstGeom prst="rect">
-            <a:avLst/>
-          </a:prstGeom>
-          <a:noFill/>
-        </p:spPr>
-        <p:txBody>
-          <a:bodyPr wrap="none">
-            <a:spAutoFit/>
-          </a:bodyPr>
-          <a:lstStyle/>
-          <a:p>
-            <a:pPr algn="l">
-              <a:defRPr sz="2200" b="1">
+              <a:t>jugar al baloncesto</a:t>
+            </a:r>
+          </a:p>
+        </p:txBody>
+      </p:sp>
+      <p:sp>
+        <p:nvSpPr>
+          <p:cNvPr id="15" name="TextBox 14"/>
+          <p:cNvSpPr txBox="1"/>
+          <p:nvPr/>
+        </p:nvSpPr>
+        <p:spPr>
+          <a:xfrm>
+            <a:off x="5943600" y="2670048"/>
+            <a:ext cx="5029200" cy="365760"/>
+          </a:xfrm>
+          <a:prstGeom prst="rect">
+            <a:avLst/>
+          </a:prstGeom>
+          <a:noFill/>
+        </p:spPr>
+        <p:txBody>
+          <a:bodyPr wrap="none">
+            <a:spAutoFit/>
+          </a:bodyPr>
+          <a:lstStyle/>
+          <a:p>
+            <a:pPr algn="l">
+              <a:defRPr sz="2000" b="0">
+                <a:solidFill>
+                  <a:srgbClr val="222222"/>
+                </a:solidFill>
+                <a:latin typeface="Arial"/>
+              </a:defRPr>
+            </a:pPr>
+            <a:r>
+              <a:t>Basketball spielen</a:t>
+            </a:r>
+          </a:p>
+        </p:txBody>
+      </p:sp>
+      <p:sp>
+        <p:nvSpPr>
+          <p:cNvPr id="16" name="TextBox 15"/>
+          <p:cNvSpPr txBox="1"/>
+          <p:nvPr/>
+        </p:nvSpPr>
+        <p:spPr>
+          <a:xfrm>
+            <a:off x="640080" y="3264408"/>
+            <a:ext cx="5029200" cy="365760"/>
+          </a:xfrm>
+          <a:prstGeom prst="rect">
+            <a:avLst/>
+          </a:prstGeom>
+          <a:noFill/>
+        </p:spPr>
+        <p:txBody>
+          <a:bodyPr wrap="none">
+            <a:spAutoFit/>
+          </a:bodyPr>
+          <a:lstStyle/>
+          <a:p>
+            <a:pPr algn="l">
+              <a:defRPr sz="2000" b="1">
                 <a:solidFill>
                   <a:srgbClr val="C41E3A"/>
                 </a:solidFill>
@@ -4562,50 +6470,165 @@
               </a:defRPr>
             </a:pPr>
             <a:r>
-              <a:t>🎸</a:t>
-            </a:r>
-          </a:p>
-        </p:txBody>
-      </p:sp>
-      <p:sp>
-        <p:nvSpPr>
-          <p:cNvPr id="13" name="TextBox 12"/>
-          <p:cNvSpPr txBox="1"/>
-          <p:nvPr/>
-        </p:nvSpPr>
-        <p:spPr>
-          <a:xfrm>
-            <a:off x="5943600" y="2926080"/>
-            <a:ext cx="5029200" cy="548640"/>
-          </a:xfrm>
-          <a:prstGeom prst="rect">
-            <a:avLst/>
-          </a:prstGeom>
-          <a:noFill/>
-        </p:spPr>
-        <p:txBody>
-          <a:bodyPr wrap="none">
-            <a:spAutoFit/>
-          </a:bodyPr>
-          <a:lstStyle/>
-          <a:p>
-            <a:pPr algn="l">
-              <a:defRPr sz="2200" b="0">
-                <a:solidFill>
-                  <a:srgbClr val="888888"/>
-                </a:solidFill>
-                <a:latin typeface="Arial"/>
-              </a:defRPr>
-            </a:pPr>
-            <a:r>
-              <a:t>tocar la guitarra</a:t>
-            </a:r>
-          </a:p>
-        </p:txBody>
-      </p:sp>
-      <p:sp>
-        <p:nvSpPr>
-          <p:cNvPr id="14" name="Rectangle 13"/>
+              <a:t>nadar</a:t>
+            </a:r>
+          </a:p>
+        </p:txBody>
+      </p:sp>
+      <p:sp>
+        <p:nvSpPr>
+          <p:cNvPr id="17" name="TextBox 16"/>
+          <p:cNvSpPr txBox="1"/>
+          <p:nvPr/>
+        </p:nvSpPr>
+        <p:spPr>
+          <a:xfrm>
+            <a:off x="5943600" y="3264408"/>
+            <a:ext cx="5029200" cy="365760"/>
+          </a:xfrm>
+          <a:prstGeom prst="rect">
+            <a:avLst/>
+          </a:prstGeom>
+          <a:noFill/>
+        </p:spPr>
+        <p:txBody>
+          <a:bodyPr wrap="none">
+            <a:spAutoFit/>
+          </a:bodyPr>
+          <a:lstStyle/>
+          <a:p>
+            <a:pPr algn="l">
+              <a:defRPr sz="2000" b="0">
+                <a:solidFill>
+                  <a:srgbClr val="222222"/>
+                </a:solidFill>
+                <a:latin typeface="Arial"/>
+              </a:defRPr>
+            </a:pPr>
+            <a:r>
+              <a:t>schwimmen</a:t>
+            </a:r>
+          </a:p>
+        </p:txBody>
+      </p:sp>
+      <p:sp>
+        <p:nvSpPr>
+          <p:cNvPr id="18" name="Rectangle 17"/>
+          <p:cNvSpPr/>
+          <p:nvPr/>
+        </p:nvSpPr>
+        <p:spPr>
+          <a:xfrm>
+            <a:off x="457200" y="3749039"/>
+            <a:ext cx="11274552" cy="594360"/>
+          </a:xfrm>
+          <a:prstGeom prst="rect">
+            <a:avLst/>
+          </a:prstGeom>
+          <a:solidFill>
+            <a:srgbClr val="F5F5F5"/>
+          </a:solidFill>
+          <a:ln>
+            <a:noFill/>
+          </a:ln>
+        </p:spPr>
+        <p:style>
+          <a:lnRef idx="1">
+            <a:schemeClr val="accent1"/>
+          </a:lnRef>
+          <a:fillRef idx="3">
+            <a:schemeClr val="accent1"/>
+          </a:fillRef>
+          <a:effectRef idx="2">
+            <a:schemeClr val="accent1"/>
+          </a:effectRef>
+          <a:fontRef idx="minor">
+            <a:schemeClr val="lt1"/>
+          </a:fontRef>
+        </p:style>
+        <p:txBody>
+          <a:bodyPr rtlCol="0" anchor="ctr"/>
+          <a:lstStyle/>
+          <a:p>
+            <a:pPr algn="ctr"/>
+          </a:p>
+        </p:txBody>
+      </p:sp>
+      <p:sp>
+        <p:nvSpPr>
+          <p:cNvPr id="19" name="TextBox 18"/>
+          <p:cNvSpPr txBox="1"/>
+          <p:nvPr/>
+        </p:nvSpPr>
+        <p:spPr>
+          <a:xfrm>
+            <a:off x="640080" y="3858768"/>
+            <a:ext cx="5029200" cy="365760"/>
+          </a:xfrm>
+          <a:prstGeom prst="rect">
+            <a:avLst/>
+          </a:prstGeom>
+          <a:noFill/>
+        </p:spPr>
+        <p:txBody>
+          <a:bodyPr wrap="none">
+            <a:spAutoFit/>
+          </a:bodyPr>
+          <a:lstStyle/>
+          <a:p>
+            <a:pPr algn="l">
+              <a:defRPr sz="2000" b="1">
+                <a:solidFill>
+                  <a:srgbClr val="C41E3A"/>
+                </a:solidFill>
+                <a:latin typeface="Arial"/>
+              </a:defRPr>
+            </a:pPr>
+            <a:r>
+              <a:t>correr</a:t>
+            </a:r>
+          </a:p>
+        </p:txBody>
+      </p:sp>
+      <p:sp>
+        <p:nvSpPr>
+          <p:cNvPr id="20" name="TextBox 19"/>
+          <p:cNvSpPr txBox="1"/>
+          <p:nvPr/>
+        </p:nvSpPr>
+        <p:spPr>
+          <a:xfrm>
+            <a:off x="5943600" y="3858768"/>
+            <a:ext cx="5029200" cy="365760"/>
+          </a:xfrm>
+          <a:prstGeom prst="rect">
+            <a:avLst/>
+          </a:prstGeom>
+          <a:noFill/>
+        </p:spPr>
+        <p:txBody>
+          <a:bodyPr wrap="none">
+            <a:spAutoFit/>
+          </a:bodyPr>
+          <a:lstStyle/>
+          <a:p>
+            <a:pPr algn="l">
+              <a:defRPr sz="2000" b="0">
+                <a:solidFill>
+                  <a:srgbClr val="222222"/>
+                </a:solidFill>
+                <a:latin typeface="Arial"/>
+              </a:defRPr>
+            </a:pPr>
+            <a:r>
+              <a:t>laufen</a:t>
+            </a:r>
+          </a:p>
+        </p:txBody>
+      </p:sp>
+      <p:sp>
+        <p:nvSpPr>
+          <p:cNvPr id="21" name="Rectangle 20"/>
           <p:cNvSpPr/>
           <p:nvPr/>
         </p:nvSpPr>
@@ -4650,7 +6673,7 @@
       </p:sp>
       <p:sp>
         <p:nvSpPr>
-          <p:cNvPr id="15" name="TextBox 14"/>
+          <p:cNvPr id="22" name="TextBox 21"/>
           <p:cNvSpPr txBox="1"/>
           <p:nvPr/>
         </p:nvSpPr>
@@ -4679,7 +6702,7 @@
               </a:defRPr>
             </a:pPr>
             <a:r>
-              <a:t>📝 AB-05a: Aufgabe 1</a:t>
+              <a:t>📝 AB-05a: Kasten 1</a:t>
             </a:r>
           </a:p>
         </p:txBody>
@@ -4898,14 +6921,50 @@
       </p:sp>
       <p:sp>
         <p:nvSpPr>
-          <p:cNvPr id="7" name="Rectangle 6"/>
+          <p:cNvPr id="7" name="TextBox 6"/>
+          <p:cNvSpPr txBox="1"/>
+          <p:nvPr/>
+        </p:nvSpPr>
+        <p:spPr>
+          <a:xfrm>
+            <a:off x="457200" y="640080"/>
+            <a:ext cx="11274552" cy="731520"/>
+          </a:xfrm>
+          <a:prstGeom prst="rect">
+            <a:avLst/>
+          </a:prstGeom>
+          <a:noFill/>
+        </p:spPr>
+        <p:txBody>
+          <a:bodyPr wrap="none">
+            <a:spAutoFit/>
+          </a:bodyPr>
+          <a:lstStyle/>
+          <a:p>
+            <a:pPr algn="l">
+              <a:defRPr sz="3200" b="1">
+                <a:solidFill>
+                  <a:srgbClr val="C41E3A"/>
+                </a:solidFill>
+                <a:latin typeface="Arial"/>
+              </a:defRPr>
+            </a:pPr>
+            <a:r>
+              <a:t>📚 Musik</a:t>
+            </a:r>
+          </a:p>
+        </p:txBody>
+      </p:sp>
+      <p:sp>
+        <p:nvSpPr>
+          <p:cNvPr id="8" name="Rectangle 7"/>
           <p:cNvSpPr/>
           <p:nvPr/>
         </p:nvSpPr>
         <p:spPr>
           <a:xfrm>
-            <a:off x="457200" y="640080"/>
-            <a:ext cx="1828800" cy="457200"/>
+            <a:off x="457200" y="1371600"/>
+            <a:ext cx="11274552" cy="594360"/>
           </a:xfrm>
           <a:prstGeom prst="rect">
             <a:avLst/>
@@ -4941,6 +7000,2944 @@
       </p:sp>
       <p:sp>
         <p:nvSpPr>
+          <p:cNvPr id="9" name="TextBox 8"/>
+          <p:cNvSpPr txBox="1"/>
+          <p:nvPr/>
+        </p:nvSpPr>
+        <p:spPr>
+          <a:xfrm>
+            <a:off x="640080" y="1481328"/>
+            <a:ext cx="5029200" cy="365760"/>
+          </a:xfrm>
+          <a:prstGeom prst="rect">
+            <a:avLst/>
+          </a:prstGeom>
+          <a:noFill/>
+        </p:spPr>
+        <p:txBody>
+          <a:bodyPr wrap="none">
+            <a:spAutoFit/>
+          </a:bodyPr>
+          <a:lstStyle/>
+          <a:p>
+            <a:pPr algn="l">
+              <a:defRPr sz="1800" b="1">
+                <a:solidFill>
+                  <a:srgbClr val="FFFFFF"/>
+                </a:solidFill>
+                <a:latin typeface="Arial"/>
+              </a:defRPr>
+            </a:pPr>
+            <a:r>
+              <a:t>Spanisch</a:t>
+            </a:r>
+          </a:p>
+        </p:txBody>
+      </p:sp>
+      <p:sp>
+        <p:nvSpPr>
+          <p:cNvPr id="10" name="TextBox 9"/>
+          <p:cNvSpPr txBox="1"/>
+          <p:nvPr/>
+        </p:nvSpPr>
+        <p:spPr>
+          <a:xfrm>
+            <a:off x="5943600" y="1481328"/>
+            <a:ext cx="5029200" cy="365760"/>
+          </a:xfrm>
+          <a:prstGeom prst="rect">
+            <a:avLst/>
+          </a:prstGeom>
+          <a:noFill/>
+        </p:spPr>
+        <p:txBody>
+          <a:bodyPr wrap="none">
+            <a:spAutoFit/>
+          </a:bodyPr>
+          <a:lstStyle/>
+          <a:p>
+            <a:pPr algn="l">
+              <a:defRPr sz="1800" b="1">
+                <a:solidFill>
+                  <a:srgbClr val="FFFFFF"/>
+                </a:solidFill>
+                <a:latin typeface="Arial"/>
+              </a:defRPr>
+            </a:pPr>
+            <a:r>
+              <a:t>Deutsch</a:t>
+            </a:r>
+          </a:p>
+        </p:txBody>
+      </p:sp>
+      <p:sp>
+        <p:nvSpPr>
+          <p:cNvPr id="11" name="TextBox 10"/>
+          <p:cNvSpPr txBox="1"/>
+          <p:nvPr/>
+        </p:nvSpPr>
+        <p:spPr>
+          <a:xfrm>
+            <a:off x="640080" y="2075688"/>
+            <a:ext cx="5029200" cy="365760"/>
+          </a:xfrm>
+          <a:prstGeom prst="rect">
+            <a:avLst/>
+          </a:prstGeom>
+          <a:noFill/>
+        </p:spPr>
+        <p:txBody>
+          <a:bodyPr wrap="none">
+            <a:spAutoFit/>
+          </a:bodyPr>
+          <a:lstStyle/>
+          <a:p>
+            <a:pPr algn="l">
+              <a:defRPr sz="2000" b="1">
+                <a:solidFill>
+                  <a:srgbClr val="C41E3A"/>
+                </a:solidFill>
+                <a:latin typeface="Arial"/>
+              </a:defRPr>
+            </a:pPr>
+            <a:r>
+              <a:t>tocar la guitarra</a:t>
+            </a:r>
+          </a:p>
+        </p:txBody>
+      </p:sp>
+      <p:sp>
+        <p:nvSpPr>
+          <p:cNvPr id="12" name="TextBox 11"/>
+          <p:cNvSpPr txBox="1"/>
+          <p:nvPr/>
+        </p:nvSpPr>
+        <p:spPr>
+          <a:xfrm>
+            <a:off x="5943600" y="2075688"/>
+            <a:ext cx="5029200" cy="365760"/>
+          </a:xfrm>
+          <a:prstGeom prst="rect">
+            <a:avLst/>
+          </a:prstGeom>
+          <a:noFill/>
+        </p:spPr>
+        <p:txBody>
+          <a:bodyPr wrap="none">
+            <a:spAutoFit/>
+          </a:bodyPr>
+          <a:lstStyle/>
+          <a:p>
+            <a:pPr algn="l">
+              <a:defRPr sz="2000" b="0">
+                <a:solidFill>
+                  <a:srgbClr val="222222"/>
+                </a:solidFill>
+                <a:latin typeface="Arial"/>
+              </a:defRPr>
+            </a:pPr>
+            <a:r>
+              <a:t>Gitarre spielen</a:t>
+            </a:r>
+          </a:p>
+        </p:txBody>
+      </p:sp>
+      <p:sp>
+        <p:nvSpPr>
+          <p:cNvPr id="13" name="Rectangle 12"/>
+          <p:cNvSpPr/>
+          <p:nvPr/>
+        </p:nvSpPr>
+        <p:spPr>
+          <a:xfrm>
+            <a:off x="457200" y="2560320"/>
+            <a:ext cx="11274552" cy="594360"/>
+          </a:xfrm>
+          <a:prstGeom prst="rect">
+            <a:avLst/>
+          </a:prstGeom>
+          <a:solidFill>
+            <a:srgbClr val="F5F5F5"/>
+          </a:solidFill>
+          <a:ln>
+            <a:noFill/>
+          </a:ln>
+        </p:spPr>
+        <p:style>
+          <a:lnRef idx="1">
+            <a:schemeClr val="accent1"/>
+          </a:lnRef>
+          <a:fillRef idx="3">
+            <a:schemeClr val="accent1"/>
+          </a:fillRef>
+          <a:effectRef idx="2">
+            <a:schemeClr val="accent1"/>
+          </a:effectRef>
+          <a:fontRef idx="minor">
+            <a:schemeClr val="lt1"/>
+          </a:fontRef>
+        </p:style>
+        <p:txBody>
+          <a:bodyPr rtlCol="0" anchor="ctr"/>
+          <a:lstStyle/>
+          <a:p>
+            <a:pPr algn="ctr"/>
+          </a:p>
+        </p:txBody>
+      </p:sp>
+      <p:sp>
+        <p:nvSpPr>
+          <p:cNvPr id="14" name="TextBox 13"/>
+          <p:cNvSpPr txBox="1"/>
+          <p:nvPr/>
+        </p:nvSpPr>
+        <p:spPr>
+          <a:xfrm>
+            <a:off x="640080" y="2670048"/>
+            <a:ext cx="5029200" cy="365760"/>
+          </a:xfrm>
+          <a:prstGeom prst="rect">
+            <a:avLst/>
+          </a:prstGeom>
+          <a:noFill/>
+        </p:spPr>
+        <p:txBody>
+          <a:bodyPr wrap="none">
+            <a:spAutoFit/>
+          </a:bodyPr>
+          <a:lstStyle/>
+          <a:p>
+            <a:pPr algn="l">
+              <a:defRPr sz="2000" b="1">
+                <a:solidFill>
+                  <a:srgbClr val="C41E3A"/>
+                </a:solidFill>
+                <a:latin typeface="Arial"/>
+              </a:defRPr>
+            </a:pPr>
+            <a:r>
+              <a:t>tocar el piano</a:t>
+            </a:r>
+          </a:p>
+        </p:txBody>
+      </p:sp>
+      <p:sp>
+        <p:nvSpPr>
+          <p:cNvPr id="15" name="TextBox 14"/>
+          <p:cNvSpPr txBox="1"/>
+          <p:nvPr/>
+        </p:nvSpPr>
+        <p:spPr>
+          <a:xfrm>
+            <a:off x="5943600" y="2670048"/>
+            <a:ext cx="5029200" cy="365760"/>
+          </a:xfrm>
+          <a:prstGeom prst="rect">
+            <a:avLst/>
+          </a:prstGeom>
+          <a:noFill/>
+        </p:spPr>
+        <p:txBody>
+          <a:bodyPr wrap="none">
+            <a:spAutoFit/>
+          </a:bodyPr>
+          <a:lstStyle/>
+          <a:p>
+            <a:pPr algn="l">
+              <a:defRPr sz="2000" b="0">
+                <a:solidFill>
+                  <a:srgbClr val="222222"/>
+                </a:solidFill>
+                <a:latin typeface="Arial"/>
+              </a:defRPr>
+            </a:pPr>
+            <a:r>
+              <a:t>Klavier spielen</a:t>
+            </a:r>
+          </a:p>
+        </p:txBody>
+      </p:sp>
+      <p:sp>
+        <p:nvSpPr>
+          <p:cNvPr id="16" name="TextBox 15"/>
+          <p:cNvSpPr txBox="1"/>
+          <p:nvPr/>
+        </p:nvSpPr>
+        <p:spPr>
+          <a:xfrm>
+            <a:off x="640080" y="3264408"/>
+            <a:ext cx="5029200" cy="365760"/>
+          </a:xfrm>
+          <a:prstGeom prst="rect">
+            <a:avLst/>
+          </a:prstGeom>
+          <a:noFill/>
+        </p:spPr>
+        <p:txBody>
+          <a:bodyPr wrap="none">
+            <a:spAutoFit/>
+          </a:bodyPr>
+          <a:lstStyle/>
+          <a:p>
+            <a:pPr algn="l">
+              <a:defRPr sz="2000" b="1">
+                <a:solidFill>
+                  <a:srgbClr val="C41E3A"/>
+                </a:solidFill>
+                <a:latin typeface="Arial"/>
+              </a:defRPr>
+            </a:pPr>
+            <a:r>
+              <a:t>escuchar música</a:t>
+            </a:r>
+          </a:p>
+        </p:txBody>
+      </p:sp>
+      <p:sp>
+        <p:nvSpPr>
+          <p:cNvPr id="17" name="TextBox 16"/>
+          <p:cNvSpPr txBox="1"/>
+          <p:nvPr/>
+        </p:nvSpPr>
+        <p:spPr>
+          <a:xfrm>
+            <a:off x="5943600" y="3264408"/>
+            <a:ext cx="5029200" cy="365760"/>
+          </a:xfrm>
+          <a:prstGeom prst="rect">
+            <a:avLst/>
+          </a:prstGeom>
+          <a:noFill/>
+        </p:spPr>
+        <p:txBody>
+          <a:bodyPr wrap="none">
+            <a:spAutoFit/>
+          </a:bodyPr>
+          <a:lstStyle/>
+          <a:p>
+            <a:pPr algn="l">
+              <a:defRPr sz="2000" b="0">
+                <a:solidFill>
+                  <a:srgbClr val="222222"/>
+                </a:solidFill>
+                <a:latin typeface="Arial"/>
+              </a:defRPr>
+            </a:pPr>
+            <a:r>
+              <a:t>Musik hören</a:t>
+            </a:r>
+          </a:p>
+        </p:txBody>
+      </p:sp>
+      <p:sp>
+        <p:nvSpPr>
+          <p:cNvPr id="18" name="Rectangle 17"/>
+          <p:cNvSpPr/>
+          <p:nvPr/>
+        </p:nvSpPr>
+        <p:spPr>
+          <a:xfrm>
+            <a:off x="457200" y="3749039"/>
+            <a:ext cx="11274552" cy="594360"/>
+          </a:xfrm>
+          <a:prstGeom prst="rect">
+            <a:avLst/>
+          </a:prstGeom>
+          <a:solidFill>
+            <a:srgbClr val="F5F5F5"/>
+          </a:solidFill>
+          <a:ln>
+            <a:noFill/>
+          </a:ln>
+        </p:spPr>
+        <p:style>
+          <a:lnRef idx="1">
+            <a:schemeClr val="accent1"/>
+          </a:lnRef>
+          <a:fillRef idx="3">
+            <a:schemeClr val="accent1"/>
+          </a:fillRef>
+          <a:effectRef idx="2">
+            <a:schemeClr val="accent1"/>
+          </a:effectRef>
+          <a:fontRef idx="minor">
+            <a:schemeClr val="lt1"/>
+          </a:fontRef>
+        </p:style>
+        <p:txBody>
+          <a:bodyPr rtlCol="0" anchor="ctr"/>
+          <a:lstStyle/>
+          <a:p>
+            <a:pPr algn="ctr"/>
+          </a:p>
+        </p:txBody>
+      </p:sp>
+      <p:sp>
+        <p:nvSpPr>
+          <p:cNvPr id="19" name="TextBox 18"/>
+          <p:cNvSpPr txBox="1"/>
+          <p:nvPr/>
+        </p:nvSpPr>
+        <p:spPr>
+          <a:xfrm>
+            <a:off x="640080" y="3858768"/>
+            <a:ext cx="5029200" cy="365760"/>
+          </a:xfrm>
+          <a:prstGeom prst="rect">
+            <a:avLst/>
+          </a:prstGeom>
+          <a:noFill/>
+        </p:spPr>
+        <p:txBody>
+          <a:bodyPr wrap="none">
+            <a:spAutoFit/>
+          </a:bodyPr>
+          <a:lstStyle/>
+          <a:p>
+            <a:pPr algn="l">
+              <a:defRPr sz="2000" b="1">
+                <a:solidFill>
+                  <a:srgbClr val="C41E3A"/>
+                </a:solidFill>
+                <a:latin typeface="Arial"/>
+              </a:defRPr>
+            </a:pPr>
+            <a:r>
+              <a:t>cantar</a:t>
+            </a:r>
+          </a:p>
+        </p:txBody>
+      </p:sp>
+      <p:sp>
+        <p:nvSpPr>
+          <p:cNvPr id="20" name="TextBox 19"/>
+          <p:cNvSpPr txBox="1"/>
+          <p:nvPr/>
+        </p:nvSpPr>
+        <p:spPr>
+          <a:xfrm>
+            <a:off x="5943600" y="3858768"/>
+            <a:ext cx="5029200" cy="365760"/>
+          </a:xfrm>
+          <a:prstGeom prst="rect">
+            <a:avLst/>
+          </a:prstGeom>
+          <a:noFill/>
+        </p:spPr>
+        <p:txBody>
+          <a:bodyPr wrap="none">
+            <a:spAutoFit/>
+          </a:bodyPr>
+          <a:lstStyle/>
+          <a:p>
+            <a:pPr algn="l">
+              <a:defRPr sz="2000" b="0">
+                <a:solidFill>
+                  <a:srgbClr val="222222"/>
+                </a:solidFill>
+                <a:latin typeface="Arial"/>
+              </a:defRPr>
+            </a:pPr>
+            <a:r>
+              <a:t>singen</a:t>
+            </a:r>
+          </a:p>
+        </p:txBody>
+      </p:sp>
+      <p:sp>
+        <p:nvSpPr>
+          <p:cNvPr id="21" name="Rectangle 20"/>
+          <p:cNvSpPr/>
+          <p:nvPr/>
+        </p:nvSpPr>
+        <p:spPr>
+          <a:xfrm>
+            <a:off x="457200" y="5943600"/>
+            <a:ext cx="11274552" cy="548640"/>
+          </a:xfrm>
+          <a:prstGeom prst="rect">
+            <a:avLst/>
+          </a:prstGeom>
+          <a:solidFill>
+            <a:srgbClr val="FDF2F4"/>
+          </a:solidFill>
+          <a:ln>
+            <a:solidFill>
+              <a:srgbClr val="C41E3A"/>
+            </a:solidFill>
+          </a:ln>
+        </p:spPr>
+        <p:style>
+          <a:lnRef idx="1">
+            <a:schemeClr val="accent1"/>
+          </a:lnRef>
+          <a:fillRef idx="3">
+            <a:schemeClr val="accent1"/>
+          </a:fillRef>
+          <a:effectRef idx="2">
+            <a:schemeClr val="accent1"/>
+          </a:effectRef>
+          <a:fontRef idx="minor">
+            <a:schemeClr val="lt1"/>
+          </a:fontRef>
+        </p:style>
+        <p:txBody>
+          <a:bodyPr rtlCol="0" anchor="ctr"/>
+          <a:lstStyle/>
+          <a:p>
+            <a:pPr algn="ctr"/>
+          </a:p>
+        </p:txBody>
+      </p:sp>
+      <p:sp>
+        <p:nvSpPr>
+          <p:cNvPr id="22" name="TextBox 21"/>
+          <p:cNvSpPr txBox="1"/>
+          <p:nvPr/>
+        </p:nvSpPr>
+        <p:spPr>
+          <a:xfrm>
+            <a:off x="640080" y="6053328"/>
+            <a:ext cx="10972800" cy="365760"/>
+          </a:xfrm>
+          <a:prstGeom prst="rect">
+            <a:avLst/>
+          </a:prstGeom>
+          <a:noFill/>
+        </p:spPr>
+        <p:txBody>
+          <a:bodyPr wrap="none">
+            <a:spAutoFit/>
+          </a:bodyPr>
+          <a:lstStyle/>
+          <a:p>
+            <a:pPr algn="l">
+              <a:defRPr sz="1400" b="1">
+                <a:solidFill>
+                  <a:srgbClr val="C41E3A"/>
+                </a:solidFill>
+                <a:latin typeface="Arial"/>
+              </a:defRPr>
+            </a:pPr>
+            <a:r>
+              <a:t>📝 AB-05a: Kasten 1</a:t>
+            </a:r>
+          </a:p>
+        </p:txBody>
+      </p:sp>
+    </p:spTree>
+  </p:cSld>
+  <p:clrMapOvr>
+    <a:masterClrMapping/>
+  </p:clrMapOvr>
+</p:sld>
+</file>
+
+<file path=ppt/slides/slide5.xml><?xml version="1.0" encoding="utf-8"?>
+<p:sld xmlns:a="http://schemas.openxmlformats.org/drawingml/2006/main" xmlns:p="http://schemas.openxmlformats.org/presentationml/2006/main" xmlns:r="http://schemas.openxmlformats.org/officeDocument/2006/relationships">
+  <p:cSld>
+    <p:spTree>
+      <p:nvGrpSpPr>
+        <p:cNvPr id="1" name=""/>
+        <p:cNvGrpSpPr/>
+        <p:nvPr/>
+      </p:nvGrpSpPr>
+      <p:grpSpPr/>
+      <p:sp>
+        <p:nvSpPr>
+          <p:cNvPr id="2" name="Rectangle 1"/>
+          <p:cNvSpPr/>
+          <p:nvPr/>
+        </p:nvSpPr>
+        <p:spPr>
+          <a:xfrm>
+            <a:off x="0" y="0"/>
+            <a:ext cx="12191695" cy="457200"/>
+          </a:xfrm>
+          <a:prstGeom prst="rect">
+            <a:avLst/>
+          </a:prstGeom>
+          <a:solidFill>
+            <a:srgbClr val="C41E3A"/>
+          </a:solidFill>
+          <a:ln>
+            <a:noFill/>
+          </a:ln>
+        </p:spPr>
+        <p:style>
+          <a:lnRef idx="1">
+            <a:schemeClr val="accent1"/>
+          </a:lnRef>
+          <a:fillRef idx="3">
+            <a:schemeClr val="accent1"/>
+          </a:fillRef>
+          <a:effectRef idx="2">
+            <a:schemeClr val="accent1"/>
+          </a:effectRef>
+          <a:fontRef idx="minor">
+            <a:schemeClr val="lt1"/>
+          </a:fontRef>
+        </p:style>
+        <p:txBody>
+          <a:bodyPr rtlCol="0" anchor="ctr"/>
+          <a:lstStyle/>
+          <a:p>
+            <a:pPr algn="ctr"/>
+          </a:p>
+        </p:txBody>
+      </p:sp>
+      <p:sp>
+        <p:nvSpPr>
+          <p:cNvPr id="3" name="TextBox 2"/>
+          <p:cNvSpPr txBox="1"/>
+          <p:nvPr/>
+        </p:nvSpPr>
+        <p:spPr>
+          <a:xfrm>
+            <a:off x="274320" y="91440"/>
+            <a:ext cx="3657600" cy="274320"/>
+          </a:xfrm>
+          <a:prstGeom prst="rect">
+            <a:avLst/>
+          </a:prstGeom>
+          <a:noFill/>
+        </p:spPr>
+        <p:txBody>
+          <a:bodyPr wrap="none">
+            <a:spAutoFit/>
+          </a:bodyPr>
+          <a:lstStyle/>
+          <a:p>
+            <a:pPr algn="l">
+              <a:defRPr sz="1400" b="1">
+                <a:solidFill>
+                  <a:srgbClr val="FFFFFF"/>
+                </a:solidFill>
+                <a:latin typeface="Arial"/>
+              </a:defRPr>
+            </a:pPr>
+            <a:r>
+              <a:t>Spanisch Klasse 7 · LP-05a</a:t>
+            </a:r>
+          </a:p>
+        </p:txBody>
+      </p:sp>
+      <p:sp>
+        <p:nvSpPr>
+          <p:cNvPr id="4" name="Rectangle 3"/>
+          <p:cNvSpPr/>
+          <p:nvPr/>
+        </p:nvSpPr>
+        <p:spPr>
+          <a:xfrm>
+            <a:off x="0" y="6583680"/>
+            <a:ext cx="12191695" cy="274320"/>
+          </a:xfrm>
+          <a:prstGeom prst="rect">
+            <a:avLst/>
+          </a:prstGeom>
+          <a:solidFill>
+            <a:srgbClr val="F5F5F5"/>
+          </a:solidFill>
+          <a:ln>
+            <a:noFill/>
+          </a:ln>
+        </p:spPr>
+        <p:style>
+          <a:lnRef idx="1">
+            <a:schemeClr val="accent1"/>
+          </a:lnRef>
+          <a:fillRef idx="3">
+            <a:schemeClr val="accent1"/>
+          </a:fillRef>
+          <a:effectRef idx="2">
+            <a:schemeClr val="accent1"/>
+          </a:effectRef>
+          <a:fontRef idx="minor">
+            <a:schemeClr val="lt1"/>
+          </a:fontRef>
+        </p:style>
+        <p:txBody>
+          <a:bodyPr rtlCol="0" anchor="ctr"/>
+          <a:lstStyle/>
+          <a:p>
+            <a:pPr algn="ctr"/>
+          </a:p>
+        </p:txBody>
+      </p:sp>
+      <p:sp>
+        <p:nvSpPr>
+          <p:cNvPr id="5" name="TextBox 4"/>
+          <p:cNvSpPr txBox="1"/>
+          <p:nvPr/>
+        </p:nvSpPr>
+        <p:spPr>
+          <a:xfrm>
+            <a:off x="274320" y="6601968"/>
+            <a:ext cx="4572000" cy="228600"/>
+          </a:xfrm>
+          <a:prstGeom prst="rect">
+            <a:avLst/>
+          </a:prstGeom>
+          <a:noFill/>
+        </p:spPr>
+        <p:txBody>
+          <a:bodyPr wrap="none">
+            <a:spAutoFit/>
+          </a:bodyPr>
+          <a:lstStyle/>
+          <a:p>
+            <a:pPr algn="l">
+              <a:defRPr sz="1000" b="0">
+                <a:solidFill>
+                  <a:srgbClr val="555555"/>
+                </a:solidFill>
+                <a:latin typeface="Arial"/>
+              </a:defRPr>
+            </a:pPr>
+            <a:r>
+              <a:t>Los hobbys</a:t>
+            </a:r>
+          </a:p>
+        </p:txBody>
+      </p:sp>
+      <p:sp>
+        <p:nvSpPr>
+          <p:cNvPr id="6" name="TextBox 5"/>
+          <p:cNvSpPr txBox="1"/>
+          <p:nvPr/>
+        </p:nvSpPr>
+        <p:spPr>
+          <a:xfrm>
+            <a:off x="9144000" y="6601968"/>
+            <a:ext cx="2743200" cy="228600"/>
+          </a:xfrm>
+          <a:prstGeom prst="rect">
+            <a:avLst/>
+          </a:prstGeom>
+          <a:noFill/>
+        </p:spPr>
+        <p:txBody>
+          <a:bodyPr wrap="none">
+            <a:spAutoFit/>
+          </a:bodyPr>
+          <a:lstStyle/>
+          <a:p>
+            <a:pPr algn="r">
+              <a:defRPr sz="1000" b="0">
+                <a:solidFill>
+                  <a:srgbClr val="555555"/>
+                </a:solidFill>
+                <a:latin typeface="Arial"/>
+              </a:defRPr>
+            </a:pPr>
+            <a:r>
+              <a:t>Sequenz 5</a:t>
+            </a:r>
+          </a:p>
+        </p:txBody>
+      </p:sp>
+      <p:sp>
+        <p:nvSpPr>
+          <p:cNvPr id="7" name="TextBox 6"/>
+          <p:cNvSpPr txBox="1"/>
+          <p:nvPr/>
+        </p:nvSpPr>
+        <p:spPr>
+          <a:xfrm>
+            <a:off x="457200" y="640080"/>
+            <a:ext cx="11274552" cy="731520"/>
+          </a:xfrm>
+          <a:prstGeom prst="rect">
+            <a:avLst/>
+          </a:prstGeom>
+          <a:noFill/>
+        </p:spPr>
+        <p:txBody>
+          <a:bodyPr wrap="none">
+            <a:spAutoFit/>
+          </a:bodyPr>
+          <a:lstStyle/>
+          <a:p>
+            <a:pPr algn="l">
+              <a:defRPr sz="3200" b="1">
+                <a:solidFill>
+                  <a:srgbClr val="C41E3A"/>
+                </a:solidFill>
+                <a:latin typeface="Arial"/>
+              </a:defRPr>
+            </a:pPr>
+            <a:r>
+              <a:t>📚 Weitere Hobbys</a:t>
+            </a:r>
+          </a:p>
+        </p:txBody>
+      </p:sp>
+      <p:sp>
+        <p:nvSpPr>
+          <p:cNvPr id="8" name="Rectangle 7"/>
+          <p:cNvSpPr/>
+          <p:nvPr/>
+        </p:nvSpPr>
+        <p:spPr>
+          <a:xfrm>
+            <a:off x="457200" y="1371600"/>
+            <a:ext cx="11274552" cy="594360"/>
+          </a:xfrm>
+          <a:prstGeom prst="rect">
+            <a:avLst/>
+          </a:prstGeom>
+          <a:solidFill>
+            <a:srgbClr val="C41E3A"/>
+          </a:solidFill>
+          <a:ln>
+            <a:noFill/>
+          </a:ln>
+        </p:spPr>
+        <p:style>
+          <a:lnRef idx="1">
+            <a:schemeClr val="accent1"/>
+          </a:lnRef>
+          <a:fillRef idx="3">
+            <a:schemeClr val="accent1"/>
+          </a:fillRef>
+          <a:effectRef idx="2">
+            <a:schemeClr val="accent1"/>
+          </a:effectRef>
+          <a:fontRef idx="minor">
+            <a:schemeClr val="lt1"/>
+          </a:fontRef>
+        </p:style>
+        <p:txBody>
+          <a:bodyPr rtlCol="0" anchor="ctr"/>
+          <a:lstStyle/>
+          <a:p>
+            <a:pPr algn="ctr"/>
+          </a:p>
+        </p:txBody>
+      </p:sp>
+      <p:sp>
+        <p:nvSpPr>
+          <p:cNvPr id="9" name="TextBox 8"/>
+          <p:cNvSpPr txBox="1"/>
+          <p:nvPr/>
+        </p:nvSpPr>
+        <p:spPr>
+          <a:xfrm>
+            <a:off x="640080" y="1481328"/>
+            <a:ext cx="5029200" cy="365760"/>
+          </a:xfrm>
+          <a:prstGeom prst="rect">
+            <a:avLst/>
+          </a:prstGeom>
+          <a:noFill/>
+        </p:spPr>
+        <p:txBody>
+          <a:bodyPr wrap="none">
+            <a:spAutoFit/>
+          </a:bodyPr>
+          <a:lstStyle/>
+          <a:p>
+            <a:pPr algn="l">
+              <a:defRPr sz="1800" b="1">
+                <a:solidFill>
+                  <a:srgbClr val="FFFFFF"/>
+                </a:solidFill>
+                <a:latin typeface="Arial"/>
+              </a:defRPr>
+            </a:pPr>
+            <a:r>
+              <a:t>Spanisch</a:t>
+            </a:r>
+          </a:p>
+        </p:txBody>
+      </p:sp>
+      <p:sp>
+        <p:nvSpPr>
+          <p:cNvPr id="10" name="TextBox 9"/>
+          <p:cNvSpPr txBox="1"/>
+          <p:nvPr/>
+        </p:nvSpPr>
+        <p:spPr>
+          <a:xfrm>
+            <a:off x="5943600" y="1481328"/>
+            <a:ext cx="5029200" cy="365760"/>
+          </a:xfrm>
+          <a:prstGeom prst="rect">
+            <a:avLst/>
+          </a:prstGeom>
+          <a:noFill/>
+        </p:spPr>
+        <p:txBody>
+          <a:bodyPr wrap="none">
+            <a:spAutoFit/>
+          </a:bodyPr>
+          <a:lstStyle/>
+          <a:p>
+            <a:pPr algn="l">
+              <a:defRPr sz="1800" b="1">
+                <a:solidFill>
+                  <a:srgbClr val="FFFFFF"/>
+                </a:solidFill>
+                <a:latin typeface="Arial"/>
+              </a:defRPr>
+            </a:pPr>
+            <a:r>
+              <a:t>Deutsch</a:t>
+            </a:r>
+          </a:p>
+        </p:txBody>
+      </p:sp>
+      <p:sp>
+        <p:nvSpPr>
+          <p:cNvPr id="11" name="TextBox 10"/>
+          <p:cNvSpPr txBox="1"/>
+          <p:nvPr/>
+        </p:nvSpPr>
+        <p:spPr>
+          <a:xfrm>
+            <a:off x="640080" y="2075688"/>
+            <a:ext cx="5029200" cy="365760"/>
+          </a:xfrm>
+          <a:prstGeom prst="rect">
+            <a:avLst/>
+          </a:prstGeom>
+          <a:noFill/>
+        </p:spPr>
+        <p:txBody>
+          <a:bodyPr wrap="none">
+            <a:spAutoFit/>
+          </a:bodyPr>
+          <a:lstStyle/>
+          <a:p>
+            <a:pPr algn="l">
+              <a:defRPr sz="2000" b="1">
+                <a:solidFill>
+                  <a:srgbClr val="C41E3A"/>
+                </a:solidFill>
+                <a:latin typeface="Arial"/>
+              </a:defRPr>
+            </a:pPr>
+            <a:r>
+              <a:t>ver la tele</a:t>
+            </a:r>
+          </a:p>
+        </p:txBody>
+      </p:sp>
+      <p:sp>
+        <p:nvSpPr>
+          <p:cNvPr id="12" name="TextBox 11"/>
+          <p:cNvSpPr txBox="1"/>
+          <p:nvPr/>
+        </p:nvSpPr>
+        <p:spPr>
+          <a:xfrm>
+            <a:off x="5943600" y="2075688"/>
+            <a:ext cx="5029200" cy="365760"/>
+          </a:xfrm>
+          <a:prstGeom prst="rect">
+            <a:avLst/>
+          </a:prstGeom>
+          <a:noFill/>
+        </p:spPr>
+        <p:txBody>
+          <a:bodyPr wrap="none">
+            <a:spAutoFit/>
+          </a:bodyPr>
+          <a:lstStyle/>
+          <a:p>
+            <a:pPr algn="l">
+              <a:defRPr sz="2000" b="0">
+                <a:solidFill>
+                  <a:srgbClr val="222222"/>
+                </a:solidFill>
+                <a:latin typeface="Arial"/>
+              </a:defRPr>
+            </a:pPr>
+            <a:r>
+              <a:t>fernsehen</a:t>
+            </a:r>
+          </a:p>
+        </p:txBody>
+      </p:sp>
+      <p:sp>
+        <p:nvSpPr>
+          <p:cNvPr id="13" name="Rectangle 12"/>
+          <p:cNvSpPr/>
+          <p:nvPr/>
+        </p:nvSpPr>
+        <p:spPr>
+          <a:xfrm>
+            <a:off x="457200" y="2560320"/>
+            <a:ext cx="11274552" cy="594360"/>
+          </a:xfrm>
+          <a:prstGeom prst="rect">
+            <a:avLst/>
+          </a:prstGeom>
+          <a:solidFill>
+            <a:srgbClr val="F5F5F5"/>
+          </a:solidFill>
+          <a:ln>
+            <a:noFill/>
+          </a:ln>
+        </p:spPr>
+        <p:style>
+          <a:lnRef idx="1">
+            <a:schemeClr val="accent1"/>
+          </a:lnRef>
+          <a:fillRef idx="3">
+            <a:schemeClr val="accent1"/>
+          </a:fillRef>
+          <a:effectRef idx="2">
+            <a:schemeClr val="accent1"/>
+          </a:effectRef>
+          <a:fontRef idx="minor">
+            <a:schemeClr val="lt1"/>
+          </a:fontRef>
+        </p:style>
+        <p:txBody>
+          <a:bodyPr rtlCol="0" anchor="ctr"/>
+          <a:lstStyle/>
+          <a:p>
+            <a:pPr algn="ctr"/>
+          </a:p>
+        </p:txBody>
+      </p:sp>
+      <p:sp>
+        <p:nvSpPr>
+          <p:cNvPr id="14" name="TextBox 13"/>
+          <p:cNvSpPr txBox="1"/>
+          <p:nvPr/>
+        </p:nvSpPr>
+        <p:spPr>
+          <a:xfrm>
+            <a:off x="640080" y="2670048"/>
+            <a:ext cx="5029200" cy="365760"/>
+          </a:xfrm>
+          <a:prstGeom prst="rect">
+            <a:avLst/>
+          </a:prstGeom>
+          <a:noFill/>
+        </p:spPr>
+        <p:txBody>
+          <a:bodyPr wrap="none">
+            <a:spAutoFit/>
+          </a:bodyPr>
+          <a:lstStyle/>
+          <a:p>
+            <a:pPr algn="l">
+              <a:defRPr sz="2000" b="1">
+                <a:solidFill>
+                  <a:srgbClr val="C41E3A"/>
+                </a:solidFill>
+                <a:latin typeface="Arial"/>
+              </a:defRPr>
+            </a:pPr>
+            <a:r>
+              <a:t>leer libros</a:t>
+            </a:r>
+          </a:p>
+        </p:txBody>
+      </p:sp>
+      <p:sp>
+        <p:nvSpPr>
+          <p:cNvPr id="15" name="TextBox 14"/>
+          <p:cNvSpPr txBox="1"/>
+          <p:nvPr/>
+        </p:nvSpPr>
+        <p:spPr>
+          <a:xfrm>
+            <a:off x="5943600" y="2670048"/>
+            <a:ext cx="5029200" cy="365760"/>
+          </a:xfrm>
+          <a:prstGeom prst="rect">
+            <a:avLst/>
+          </a:prstGeom>
+          <a:noFill/>
+        </p:spPr>
+        <p:txBody>
+          <a:bodyPr wrap="none">
+            <a:spAutoFit/>
+          </a:bodyPr>
+          <a:lstStyle/>
+          <a:p>
+            <a:pPr algn="l">
+              <a:defRPr sz="2000" b="0">
+                <a:solidFill>
+                  <a:srgbClr val="222222"/>
+                </a:solidFill>
+                <a:latin typeface="Arial"/>
+              </a:defRPr>
+            </a:pPr>
+            <a:r>
+              <a:t>Bücher lesen</a:t>
+            </a:r>
+          </a:p>
+        </p:txBody>
+      </p:sp>
+      <p:sp>
+        <p:nvSpPr>
+          <p:cNvPr id="16" name="TextBox 15"/>
+          <p:cNvSpPr txBox="1"/>
+          <p:nvPr/>
+        </p:nvSpPr>
+        <p:spPr>
+          <a:xfrm>
+            <a:off x="640080" y="3264408"/>
+            <a:ext cx="5029200" cy="365760"/>
+          </a:xfrm>
+          <a:prstGeom prst="rect">
+            <a:avLst/>
+          </a:prstGeom>
+          <a:noFill/>
+        </p:spPr>
+        <p:txBody>
+          <a:bodyPr wrap="none">
+            <a:spAutoFit/>
+          </a:bodyPr>
+          <a:lstStyle/>
+          <a:p>
+            <a:pPr algn="l">
+              <a:defRPr sz="2000" b="1">
+                <a:solidFill>
+                  <a:srgbClr val="C41E3A"/>
+                </a:solidFill>
+                <a:latin typeface="Arial"/>
+              </a:defRPr>
+            </a:pPr>
+            <a:r>
+              <a:t>jugar a videojuegos</a:t>
+            </a:r>
+          </a:p>
+        </p:txBody>
+      </p:sp>
+      <p:sp>
+        <p:nvSpPr>
+          <p:cNvPr id="17" name="TextBox 16"/>
+          <p:cNvSpPr txBox="1"/>
+          <p:nvPr/>
+        </p:nvSpPr>
+        <p:spPr>
+          <a:xfrm>
+            <a:off x="5943600" y="3264408"/>
+            <a:ext cx="5029200" cy="365760"/>
+          </a:xfrm>
+          <a:prstGeom prst="rect">
+            <a:avLst/>
+          </a:prstGeom>
+          <a:noFill/>
+        </p:spPr>
+        <p:txBody>
+          <a:bodyPr wrap="none">
+            <a:spAutoFit/>
+          </a:bodyPr>
+          <a:lstStyle/>
+          <a:p>
+            <a:pPr algn="l">
+              <a:defRPr sz="2000" b="0">
+                <a:solidFill>
+                  <a:srgbClr val="222222"/>
+                </a:solidFill>
+                <a:latin typeface="Arial"/>
+              </a:defRPr>
+            </a:pPr>
+            <a:r>
+              <a:t>Videospiele spielen</a:t>
+            </a:r>
+          </a:p>
+        </p:txBody>
+      </p:sp>
+      <p:sp>
+        <p:nvSpPr>
+          <p:cNvPr id="18" name="Rectangle 17"/>
+          <p:cNvSpPr/>
+          <p:nvPr/>
+        </p:nvSpPr>
+        <p:spPr>
+          <a:xfrm>
+            <a:off x="457200" y="3749039"/>
+            <a:ext cx="11274552" cy="594360"/>
+          </a:xfrm>
+          <a:prstGeom prst="rect">
+            <a:avLst/>
+          </a:prstGeom>
+          <a:solidFill>
+            <a:srgbClr val="F5F5F5"/>
+          </a:solidFill>
+          <a:ln>
+            <a:noFill/>
+          </a:ln>
+        </p:spPr>
+        <p:style>
+          <a:lnRef idx="1">
+            <a:schemeClr val="accent1"/>
+          </a:lnRef>
+          <a:fillRef idx="3">
+            <a:schemeClr val="accent1"/>
+          </a:fillRef>
+          <a:effectRef idx="2">
+            <a:schemeClr val="accent1"/>
+          </a:effectRef>
+          <a:fontRef idx="minor">
+            <a:schemeClr val="lt1"/>
+          </a:fontRef>
+        </p:style>
+        <p:txBody>
+          <a:bodyPr rtlCol="0" anchor="ctr"/>
+          <a:lstStyle/>
+          <a:p>
+            <a:pPr algn="ctr"/>
+          </a:p>
+        </p:txBody>
+      </p:sp>
+      <p:sp>
+        <p:nvSpPr>
+          <p:cNvPr id="19" name="TextBox 18"/>
+          <p:cNvSpPr txBox="1"/>
+          <p:nvPr/>
+        </p:nvSpPr>
+        <p:spPr>
+          <a:xfrm>
+            <a:off x="640080" y="3858768"/>
+            <a:ext cx="5029200" cy="365760"/>
+          </a:xfrm>
+          <a:prstGeom prst="rect">
+            <a:avLst/>
+          </a:prstGeom>
+          <a:noFill/>
+        </p:spPr>
+        <p:txBody>
+          <a:bodyPr wrap="none">
+            <a:spAutoFit/>
+          </a:bodyPr>
+          <a:lstStyle/>
+          <a:p>
+            <a:pPr algn="l">
+              <a:defRPr sz="2000" b="1">
+                <a:solidFill>
+                  <a:srgbClr val="C41E3A"/>
+                </a:solidFill>
+                <a:latin typeface="Arial"/>
+              </a:defRPr>
+            </a:pPr>
+            <a:r>
+              <a:t>dibujar</a:t>
+            </a:r>
+          </a:p>
+        </p:txBody>
+      </p:sp>
+      <p:sp>
+        <p:nvSpPr>
+          <p:cNvPr id="20" name="TextBox 19"/>
+          <p:cNvSpPr txBox="1"/>
+          <p:nvPr/>
+        </p:nvSpPr>
+        <p:spPr>
+          <a:xfrm>
+            <a:off x="5943600" y="3858768"/>
+            <a:ext cx="5029200" cy="365760"/>
+          </a:xfrm>
+          <a:prstGeom prst="rect">
+            <a:avLst/>
+          </a:prstGeom>
+          <a:noFill/>
+        </p:spPr>
+        <p:txBody>
+          <a:bodyPr wrap="none">
+            <a:spAutoFit/>
+          </a:bodyPr>
+          <a:lstStyle/>
+          <a:p>
+            <a:pPr algn="l">
+              <a:defRPr sz="2000" b="0">
+                <a:solidFill>
+                  <a:srgbClr val="222222"/>
+                </a:solidFill>
+                <a:latin typeface="Arial"/>
+              </a:defRPr>
+            </a:pPr>
+            <a:r>
+              <a:t>zeichnen</a:t>
+            </a:r>
+          </a:p>
+        </p:txBody>
+      </p:sp>
+      <p:sp>
+        <p:nvSpPr>
+          <p:cNvPr id="21" name="Rectangle 20"/>
+          <p:cNvSpPr/>
+          <p:nvPr/>
+        </p:nvSpPr>
+        <p:spPr>
+          <a:xfrm>
+            <a:off x="457200" y="5943600"/>
+            <a:ext cx="11274552" cy="548640"/>
+          </a:xfrm>
+          <a:prstGeom prst="rect">
+            <a:avLst/>
+          </a:prstGeom>
+          <a:solidFill>
+            <a:srgbClr val="FDF2F4"/>
+          </a:solidFill>
+          <a:ln>
+            <a:solidFill>
+              <a:srgbClr val="C41E3A"/>
+            </a:solidFill>
+          </a:ln>
+        </p:spPr>
+        <p:style>
+          <a:lnRef idx="1">
+            <a:schemeClr val="accent1"/>
+          </a:lnRef>
+          <a:fillRef idx="3">
+            <a:schemeClr val="accent1"/>
+          </a:fillRef>
+          <a:effectRef idx="2">
+            <a:schemeClr val="accent1"/>
+          </a:effectRef>
+          <a:fontRef idx="minor">
+            <a:schemeClr val="lt1"/>
+          </a:fontRef>
+        </p:style>
+        <p:txBody>
+          <a:bodyPr rtlCol="0" anchor="ctr"/>
+          <a:lstStyle/>
+          <a:p>
+            <a:pPr algn="ctr"/>
+          </a:p>
+        </p:txBody>
+      </p:sp>
+      <p:sp>
+        <p:nvSpPr>
+          <p:cNvPr id="22" name="TextBox 21"/>
+          <p:cNvSpPr txBox="1"/>
+          <p:nvPr/>
+        </p:nvSpPr>
+        <p:spPr>
+          <a:xfrm>
+            <a:off x="640080" y="6053328"/>
+            <a:ext cx="10972800" cy="365760"/>
+          </a:xfrm>
+          <a:prstGeom prst="rect">
+            <a:avLst/>
+          </a:prstGeom>
+          <a:noFill/>
+        </p:spPr>
+        <p:txBody>
+          <a:bodyPr wrap="none">
+            <a:spAutoFit/>
+          </a:bodyPr>
+          <a:lstStyle/>
+          <a:p>
+            <a:pPr algn="l">
+              <a:defRPr sz="1400" b="1">
+                <a:solidFill>
+                  <a:srgbClr val="C41E3A"/>
+                </a:solidFill>
+                <a:latin typeface="Arial"/>
+              </a:defRPr>
+            </a:pPr>
+            <a:r>
+              <a:t>📝 AB-05a: Kasten 2</a:t>
+            </a:r>
+          </a:p>
+        </p:txBody>
+      </p:sp>
+    </p:spTree>
+  </p:cSld>
+  <p:clrMapOvr>
+    <a:masterClrMapping/>
+  </p:clrMapOvr>
+</p:sld>
+</file>
+
+<file path=ppt/slides/slide6.xml><?xml version="1.0" encoding="utf-8"?>
+<p:sld xmlns:a="http://schemas.openxmlformats.org/drawingml/2006/main" xmlns:p="http://schemas.openxmlformats.org/presentationml/2006/main" xmlns:r="http://schemas.openxmlformats.org/officeDocument/2006/relationships">
+  <p:cSld>
+    <p:spTree>
+      <p:nvGrpSpPr>
+        <p:cNvPr id="1" name=""/>
+        <p:cNvGrpSpPr/>
+        <p:nvPr/>
+      </p:nvGrpSpPr>
+      <p:grpSpPr/>
+      <p:sp>
+        <p:nvSpPr>
+          <p:cNvPr id="2" name="Rectangle 1"/>
+          <p:cNvSpPr/>
+          <p:nvPr/>
+        </p:nvSpPr>
+        <p:spPr>
+          <a:xfrm>
+            <a:off x="0" y="0"/>
+            <a:ext cx="12191695" cy="457200"/>
+          </a:xfrm>
+          <a:prstGeom prst="rect">
+            <a:avLst/>
+          </a:prstGeom>
+          <a:solidFill>
+            <a:srgbClr val="C41E3A"/>
+          </a:solidFill>
+          <a:ln>
+            <a:noFill/>
+          </a:ln>
+        </p:spPr>
+        <p:style>
+          <a:lnRef idx="1">
+            <a:schemeClr val="accent1"/>
+          </a:lnRef>
+          <a:fillRef idx="3">
+            <a:schemeClr val="accent1"/>
+          </a:fillRef>
+          <a:effectRef idx="2">
+            <a:schemeClr val="accent1"/>
+          </a:effectRef>
+          <a:fontRef idx="minor">
+            <a:schemeClr val="lt1"/>
+          </a:fontRef>
+        </p:style>
+        <p:txBody>
+          <a:bodyPr rtlCol="0" anchor="ctr"/>
+          <a:lstStyle/>
+          <a:p>
+            <a:pPr algn="ctr"/>
+          </a:p>
+        </p:txBody>
+      </p:sp>
+      <p:sp>
+        <p:nvSpPr>
+          <p:cNvPr id="3" name="TextBox 2"/>
+          <p:cNvSpPr txBox="1"/>
+          <p:nvPr/>
+        </p:nvSpPr>
+        <p:spPr>
+          <a:xfrm>
+            <a:off x="274320" y="91440"/>
+            <a:ext cx="3657600" cy="274320"/>
+          </a:xfrm>
+          <a:prstGeom prst="rect">
+            <a:avLst/>
+          </a:prstGeom>
+          <a:noFill/>
+        </p:spPr>
+        <p:txBody>
+          <a:bodyPr wrap="none">
+            <a:spAutoFit/>
+          </a:bodyPr>
+          <a:lstStyle/>
+          <a:p>
+            <a:pPr algn="l">
+              <a:defRPr sz="1400" b="1">
+                <a:solidFill>
+                  <a:srgbClr val="FFFFFF"/>
+                </a:solidFill>
+                <a:latin typeface="Arial"/>
+              </a:defRPr>
+            </a:pPr>
+            <a:r>
+              <a:t>Spanisch Klasse 7 · LP-05a</a:t>
+            </a:r>
+          </a:p>
+        </p:txBody>
+      </p:sp>
+      <p:sp>
+        <p:nvSpPr>
+          <p:cNvPr id="4" name="Rectangle 3"/>
+          <p:cNvSpPr/>
+          <p:nvPr/>
+        </p:nvSpPr>
+        <p:spPr>
+          <a:xfrm>
+            <a:off x="0" y="6583680"/>
+            <a:ext cx="12191695" cy="274320"/>
+          </a:xfrm>
+          <a:prstGeom prst="rect">
+            <a:avLst/>
+          </a:prstGeom>
+          <a:solidFill>
+            <a:srgbClr val="F5F5F5"/>
+          </a:solidFill>
+          <a:ln>
+            <a:noFill/>
+          </a:ln>
+        </p:spPr>
+        <p:style>
+          <a:lnRef idx="1">
+            <a:schemeClr val="accent1"/>
+          </a:lnRef>
+          <a:fillRef idx="3">
+            <a:schemeClr val="accent1"/>
+          </a:fillRef>
+          <a:effectRef idx="2">
+            <a:schemeClr val="accent1"/>
+          </a:effectRef>
+          <a:fontRef idx="minor">
+            <a:schemeClr val="lt1"/>
+          </a:fontRef>
+        </p:style>
+        <p:txBody>
+          <a:bodyPr rtlCol="0" anchor="ctr"/>
+          <a:lstStyle/>
+          <a:p>
+            <a:pPr algn="ctr"/>
+          </a:p>
+        </p:txBody>
+      </p:sp>
+      <p:sp>
+        <p:nvSpPr>
+          <p:cNvPr id="5" name="TextBox 4"/>
+          <p:cNvSpPr txBox="1"/>
+          <p:nvPr/>
+        </p:nvSpPr>
+        <p:spPr>
+          <a:xfrm>
+            <a:off x="274320" y="6601968"/>
+            <a:ext cx="4572000" cy="228600"/>
+          </a:xfrm>
+          <a:prstGeom prst="rect">
+            <a:avLst/>
+          </a:prstGeom>
+          <a:noFill/>
+        </p:spPr>
+        <p:txBody>
+          <a:bodyPr wrap="none">
+            <a:spAutoFit/>
+          </a:bodyPr>
+          <a:lstStyle/>
+          <a:p>
+            <a:pPr algn="l">
+              <a:defRPr sz="1000" b="0">
+                <a:solidFill>
+                  <a:srgbClr val="555555"/>
+                </a:solidFill>
+                <a:latin typeface="Arial"/>
+              </a:defRPr>
+            </a:pPr>
+            <a:r>
+              <a:t>Los hobbys</a:t>
+            </a:r>
+          </a:p>
+        </p:txBody>
+      </p:sp>
+      <p:sp>
+        <p:nvSpPr>
+          <p:cNvPr id="6" name="TextBox 5"/>
+          <p:cNvSpPr txBox="1"/>
+          <p:nvPr/>
+        </p:nvSpPr>
+        <p:spPr>
+          <a:xfrm>
+            <a:off x="9144000" y="6601968"/>
+            <a:ext cx="2743200" cy="228600"/>
+          </a:xfrm>
+          <a:prstGeom prst="rect">
+            <a:avLst/>
+          </a:prstGeom>
+          <a:noFill/>
+        </p:spPr>
+        <p:txBody>
+          <a:bodyPr wrap="none">
+            <a:spAutoFit/>
+          </a:bodyPr>
+          <a:lstStyle/>
+          <a:p>
+            <a:pPr algn="r">
+              <a:defRPr sz="1000" b="0">
+                <a:solidFill>
+                  <a:srgbClr val="555555"/>
+                </a:solidFill>
+                <a:latin typeface="Arial"/>
+              </a:defRPr>
+            </a:pPr>
+            <a:r>
+              <a:t>Sequenz 5</a:t>
+            </a:r>
+          </a:p>
+        </p:txBody>
+      </p:sp>
+      <p:sp>
+        <p:nvSpPr>
+          <p:cNvPr id="7" name="TextBox 6"/>
+          <p:cNvSpPr txBox="1"/>
+          <p:nvPr/>
+        </p:nvSpPr>
+        <p:spPr>
+          <a:xfrm>
+            <a:off x="457200" y="640080"/>
+            <a:ext cx="11274552" cy="731520"/>
+          </a:xfrm>
+          <a:prstGeom prst="rect">
+            <a:avLst/>
+          </a:prstGeom>
+          <a:noFill/>
+        </p:spPr>
+        <p:txBody>
+          <a:bodyPr wrap="none">
+            <a:spAutoFit/>
+          </a:bodyPr>
+          <a:lstStyle/>
+          <a:p>
+            <a:pPr algn="l">
+              <a:defRPr sz="3200" b="1">
+                <a:solidFill>
+                  <a:srgbClr val="C41E3A"/>
+                </a:solidFill>
+                <a:latin typeface="Arial"/>
+              </a:defRPr>
+            </a:pPr>
+            <a:r>
+              <a:t>📝 jugar a + Artikel</a:t>
+            </a:r>
+          </a:p>
+        </p:txBody>
+      </p:sp>
+      <p:sp>
+        <p:nvSpPr>
+          <p:cNvPr id="8" name="TextBox 7"/>
+          <p:cNvSpPr txBox="1"/>
+          <p:nvPr/>
+        </p:nvSpPr>
+        <p:spPr>
+          <a:xfrm>
+            <a:off x="640080" y="1463040"/>
+            <a:ext cx="5029200" cy="731520"/>
+          </a:xfrm>
+          <a:prstGeom prst="rect">
+            <a:avLst/>
+          </a:prstGeom>
+          <a:noFill/>
+        </p:spPr>
+        <p:txBody>
+          <a:bodyPr wrap="none">
+            <a:spAutoFit/>
+          </a:bodyPr>
+          <a:lstStyle/>
+          <a:p>
+            <a:pPr algn="l">
+              <a:defRPr sz="2800" b="1">
+                <a:solidFill>
+                  <a:srgbClr val="C41E3A"/>
+                </a:solidFill>
+                <a:latin typeface="Arial"/>
+              </a:defRPr>
+            </a:pPr>
+            <a:r>
+              <a:t>jugar al fútbol</a:t>
+            </a:r>
+          </a:p>
+        </p:txBody>
+      </p:sp>
+      <p:sp>
+        <p:nvSpPr>
+          <p:cNvPr id="9" name="TextBox 8"/>
+          <p:cNvSpPr txBox="1"/>
+          <p:nvPr/>
+        </p:nvSpPr>
+        <p:spPr>
+          <a:xfrm>
+            <a:off x="5943600" y="1554480"/>
+            <a:ext cx="5486400" cy="548640"/>
+          </a:xfrm>
+          <a:prstGeom prst="rect">
+            <a:avLst/>
+          </a:prstGeom>
+          <a:noFill/>
+        </p:spPr>
+        <p:txBody>
+          <a:bodyPr wrap="none">
+            <a:spAutoFit/>
+          </a:bodyPr>
+          <a:lstStyle/>
+          <a:p>
+            <a:pPr algn="l">
+              <a:defRPr sz="1800" b="0">
+                <a:solidFill>
+                  <a:srgbClr val="555555"/>
+                </a:solidFill>
+                <a:latin typeface="Arial"/>
+              </a:defRPr>
+            </a:pPr>
+            <a:r>
+              <a:t>Fußball spielen</a:t>
+            </a:r>
+          </a:p>
+        </p:txBody>
+      </p:sp>
+      <p:sp>
+        <p:nvSpPr>
+          <p:cNvPr id="10" name="TextBox 9"/>
+          <p:cNvSpPr txBox="1"/>
+          <p:nvPr/>
+        </p:nvSpPr>
+        <p:spPr>
+          <a:xfrm>
+            <a:off x="640080" y="2560320"/>
+            <a:ext cx="5029200" cy="731520"/>
+          </a:xfrm>
+          <a:prstGeom prst="rect">
+            <a:avLst/>
+          </a:prstGeom>
+          <a:noFill/>
+        </p:spPr>
+        <p:txBody>
+          <a:bodyPr wrap="none">
+            <a:spAutoFit/>
+          </a:bodyPr>
+          <a:lstStyle/>
+          <a:p>
+            <a:pPr algn="l">
+              <a:defRPr sz="2800" b="1">
+                <a:solidFill>
+                  <a:srgbClr val="C41E3A"/>
+                </a:solidFill>
+                <a:latin typeface="Arial"/>
+              </a:defRPr>
+            </a:pPr>
+            <a:r>
+              <a:t>jugar a la pelota</a:t>
+            </a:r>
+          </a:p>
+        </p:txBody>
+      </p:sp>
+      <p:sp>
+        <p:nvSpPr>
+          <p:cNvPr id="11" name="TextBox 10"/>
+          <p:cNvSpPr txBox="1"/>
+          <p:nvPr/>
+        </p:nvSpPr>
+        <p:spPr>
+          <a:xfrm>
+            <a:off x="5943600" y="2651760"/>
+            <a:ext cx="5486400" cy="548640"/>
+          </a:xfrm>
+          <a:prstGeom prst="rect">
+            <a:avLst/>
+          </a:prstGeom>
+          <a:noFill/>
+        </p:spPr>
+        <p:txBody>
+          <a:bodyPr wrap="none">
+            <a:spAutoFit/>
+          </a:bodyPr>
+          <a:lstStyle/>
+          <a:p>
+            <a:pPr algn="l">
+              <a:defRPr sz="1800" b="0">
+                <a:solidFill>
+                  <a:srgbClr val="555555"/>
+                </a:solidFill>
+                <a:latin typeface="Arial"/>
+              </a:defRPr>
+            </a:pPr>
+            <a:r>
+              <a:t>Ball spielen</a:t>
+            </a:r>
+          </a:p>
+        </p:txBody>
+      </p:sp>
+      <p:sp>
+        <p:nvSpPr>
+          <p:cNvPr id="12" name="Rectangle 11"/>
+          <p:cNvSpPr/>
+          <p:nvPr/>
+        </p:nvSpPr>
+        <p:spPr>
+          <a:xfrm>
+            <a:off x="457200" y="5029200"/>
+            <a:ext cx="11274552" cy="1097280"/>
+          </a:xfrm>
+          <a:prstGeom prst="rect">
+            <a:avLst/>
+          </a:prstGeom>
+          <a:solidFill>
+            <a:srgbClr val="FFF8F0"/>
+          </a:solidFill>
+          <a:ln>
+            <a:solidFill>
+              <a:srgbClr val="B35C00"/>
+            </a:solidFill>
+          </a:ln>
+        </p:spPr>
+        <p:style>
+          <a:lnRef idx="1">
+            <a:schemeClr val="accent1"/>
+          </a:lnRef>
+          <a:fillRef idx="3">
+            <a:schemeClr val="accent1"/>
+          </a:fillRef>
+          <a:effectRef idx="2">
+            <a:schemeClr val="accent1"/>
+          </a:effectRef>
+          <a:fontRef idx="minor">
+            <a:schemeClr val="lt1"/>
+          </a:fontRef>
+        </p:style>
+        <p:txBody>
+          <a:bodyPr rtlCol="0" anchor="ctr"/>
+          <a:lstStyle/>
+          <a:p>
+            <a:pPr algn="ctr"/>
+          </a:p>
+        </p:txBody>
+      </p:sp>
+      <p:sp>
+        <p:nvSpPr>
+          <p:cNvPr id="13" name="TextBox 12"/>
+          <p:cNvSpPr txBox="1"/>
+          <p:nvPr/>
+        </p:nvSpPr>
+        <p:spPr>
+          <a:xfrm>
+            <a:off x="640080" y="5212080"/>
+            <a:ext cx="10972800" cy="731520"/>
+          </a:xfrm>
+          <a:prstGeom prst="rect">
+            <a:avLst/>
+          </a:prstGeom>
+          <a:noFill/>
+        </p:spPr>
+        <p:txBody>
+          <a:bodyPr wrap="none">
+            <a:spAutoFit/>
+          </a:bodyPr>
+          <a:lstStyle/>
+          <a:p>
+            <a:pPr algn="l">
+              <a:defRPr sz="1600" b="0">
+                <a:solidFill>
+                  <a:srgbClr val="222222"/>
+                </a:solidFill>
+                <a:latin typeface="Arial"/>
+              </a:defRPr>
+            </a:pPr>
+            <a:r>
+              <a:t>💡 a + el = al</a:t>
+            </a:r>
+          </a:p>
+        </p:txBody>
+      </p:sp>
+    </p:spTree>
+  </p:cSld>
+  <p:clrMapOvr>
+    <a:masterClrMapping/>
+  </p:clrMapOvr>
+</p:sld>
+</file>
+
+<file path=ppt/slides/slide7.xml><?xml version="1.0" encoding="utf-8"?>
+<p:sld xmlns:a="http://schemas.openxmlformats.org/drawingml/2006/main" xmlns:p="http://schemas.openxmlformats.org/presentationml/2006/main" xmlns:r="http://schemas.openxmlformats.org/officeDocument/2006/relationships">
+  <p:cSld>
+    <p:spTree>
+      <p:nvGrpSpPr>
+        <p:cNvPr id="1" name=""/>
+        <p:cNvGrpSpPr/>
+        <p:nvPr/>
+      </p:nvGrpSpPr>
+      <p:grpSpPr/>
+      <p:sp>
+        <p:nvSpPr>
+          <p:cNvPr id="2" name="Rectangle 1"/>
+          <p:cNvSpPr/>
+          <p:nvPr/>
+        </p:nvSpPr>
+        <p:spPr>
+          <a:xfrm>
+            <a:off x="0" y="0"/>
+            <a:ext cx="12191695" cy="457200"/>
+          </a:xfrm>
+          <a:prstGeom prst="rect">
+            <a:avLst/>
+          </a:prstGeom>
+          <a:solidFill>
+            <a:srgbClr val="C41E3A"/>
+          </a:solidFill>
+          <a:ln>
+            <a:noFill/>
+          </a:ln>
+        </p:spPr>
+        <p:style>
+          <a:lnRef idx="1">
+            <a:schemeClr val="accent1"/>
+          </a:lnRef>
+          <a:fillRef idx="3">
+            <a:schemeClr val="accent1"/>
+          </a:fillRef>
+          <a:effectRef idx="2">
+            <a:schemeClr val="accent1"/>
+          </a:effectRef>
+          <a:fontRef idx="minor">
+            <a:schemeClr val="lt1"/>
+          </a:fontRef>
+        </p:style>
+        <p:txBody>
+          <a:bodyPr rtlCol="0" anchor="ctr"/>
+          <a:lstStyle/>
+          <a:p>
+            <a:pPr algn="ctr"/>
+          </a:p>
+        </p:txBody>
+      </p:sp>
+      <p:sp>
+        <p:nvSpPr>
+          <p:cNvPr id="3" name="TextBox 2"/>
+          <p:cNvSpPr txBox="1"/>
+          <p:nvPr/>
+        </p:nvSpPr>
+        <p:spPr>
+          <a:xfrm>
+            <a:off x="274320" y="91440"/>
+            <a:ext cx="3657600" cy="274320"/>
+          </a:xfrm>
+          <a:prstGeom prst="rect">
+            <a:avLst/>
+          </a:prstGeom>
+          <a:noFill/>
+        </p:spPr>
+        <p:txBody>
+          <a:bodyPr wrap="none">
+            <a:spAutoFit/>
+          </a:bodyPr>
+          <a:lstStyle/>
+          <a:p>
+            <a:pPr algn="l">
+              <a:defRPr sz="1400" b="1">
+                <a:solidFill>
+                  <a:srgbClr val="FFFFFF"/>
+                </a:solidFill>
+                <a:latin typeface="Arial"/>
+              </a:defRPr>
+            </a:pPr>
+            <a:r>
+              <a:t>Spanisch Klasse 7 · LP-05a</a:t>
+            </a:r>
+          </a:p>
+        </p:txBody>
+      </p:sp>
+      <p:sp>
+        <p:nvSpPr>
+          <p:cNvPr id="4" name="Rectangle 3"/>
+          <p:cNvSpPr/>
+          <p:nvPr/>
+        </p:nvSpPr>
+        <p:spPr>
+          <a:xfrm>
+            <a:off x="0" y="6583680"/>
+            <a:ext cx="12191695" cy="274320"/>
+          </a:xfrm>
+          <a:prstGeom prst="rect">
+            <a:avLst/>
+          </a:prstGeom>
+          <a:solidFill>
+            <a:srgbClr val="F5F5F5"/>
+          </a:solidFill>
+          <a:ln>
+            <a:noFill/>
+          </a:ln>
+        </p:spPr>
+        <p:style>
+          <a:lnRef idx="1">
+            <a:schemeClr val="accent1"/>
+          </a:lnRef>
+          <a:fillRef idx="3">
+            <a:schemeClr val="accent1"/>
+          </a:fillRef>
+          <a:effectRef idx="2">
+            <a:schemeClr val="accent1"/>
+          </a:effectRef>
+          <a:fontRef idx="minor">
+            <a:schemeClr val="lt1"/>
+          </a:fontRef>
+        </p:style>
+        <p:txBody>
+          <a:bodyPr rtlCol="0" anchor="ctr"/>
+          <a:lstStyle/>
+          <a:p>
+            <a:pPr algn="ctr"/>
+          </a:p>
+        </p:txBody>
+      </p:sp>
+      <p:sp>
+        <p:nvSpPr>
+          <p:cNvPr id="5" name="TextBox 4"/>
+          <p:cNvSpPr txBox="1"/>
+          <p:nvPr/>
+        </p:nvSpPr>
+        <p:spPr>
+          <a:xfrm>
+            <a:off x="274320" y="6601968"/>
+            <a:ext cx="4572000" cy="228600"/>
+          </a:xfrm>
+          <a:prstGeom prst="rect">
+            <a:avLst/>
+          </a:prstGeom>
+          <a:noFill/>
+        </p:spPr>
+        <p:txBody>
+          <a:bodyPr wrap="none">
+            <a:spAutoFit/>
+          </a:bodyPr>
+          <a:lstStyle/>
+          <a:p>
+            <a:pPr algn="l">
+              <a:defRPr sz="1000" b="0">
+                <a:solidFill>
+                  <a:srgbClr val="555555"/>
+                </a:solidFill>
+                <a:latin typeface="Arial"/>
+              </a:defRPr>
+            </a:pPr>
+            <a:r>
+              <a:t>Los hobbys</a:t>
+            </a:r>
+          </a:p>
+        </p:txBody>
+      </p:sp>
+      <p:sp>
+        <p:nvSpPr>
+          <p:cNvPr id="6" name="TextBox 5"/>
+          <p:cNvSpPr txBox="1"/>
+          <p:nvPr/>
+        </p:nvSpPr>
+        <p:spPr>
+          <a:xfrm>
+            <a:off x="9144000" y="6601968"/>
+            <a:ext cx="2743200" cy="228600"/>
+          </a:xfrm>
+          <a:prstGeom prst="rect">
+            <a:avLst/>
+          </a:prstGeom>
+          <a:noFill/>
+        </p:spPr>
+        <p:txBody>
+          <a:bodyPr wrap="none">
+            <a:spAutoFit/>
+          </a:bodyPr>
+          <a:lstStyle/>
+          <a:p>
+            <a:pPr algn="r">
+              <a:defRPr sz="1000" b="0">
+                <a:solidFill>
+                  <a:srgbClr val="555555"/>
+                </a:solidFill>
+                <a:latin typeface="Arial"/>
+              </a:defRPr>
+            </a:pPr>
+            <a:r>
+              <a:t>Sequenz 5</a:t>
+            </a:r>
+          </a:p>
+        </p:txBody>
+      </p:sp>
+      <p:sp>
+        <p:nvSpPr>
+          <p:cNvPr id="7" name="TextBox 6"/>
+          <p:cNvSpPr txBox="1"/>
+          <p:nvPr/>
+        </p:nvSpPr>
+        <p:spPr>
+          <a:xfrm>
+            <a:off x="457200" y="640080"/>
+            <a:ext cx="11274552" cy="731520"/>
+          </a:xfrm>
+          <a:prstGeom prst="rect">
+            <a:avLst/>
+          </a:prstGeom>
+          <a:noFill/>
+        </p:spPr>
+        <p:txBody>
+          <a:bodyPr wrap="none">
+            <a:spAutoFit/>
+          </a:bodyPr>
+          <a:lstStyle/>
+          <a:p>
+            <a:pPr algn="l">
+              <a:defRPr sz="3200" b="1">
+                <a:solidFill>
+                  <a:srgbClr val="C41E3A"/>
+                </a:solidFill>
+                <a:latin typeface="Arial"/>
+              </a:defRPr>
+            </a:pPr>
+            <a:r>
+              <a:t>📝 tocar + Artikel</a:t>
+            </a:r>
+          </a:p>
+        </p:txBody>
+      </p:sp>
+      <p:sp>
+        <p:nvSpPr>
+          <p:cNvPr id="8" name="TextBox 7"/>
+          <p:cNvSpPr txBox="1"/>
+          <p:nvPr/>
+        </p:nvSpPr>
+        <p:spPr>
+          <a:xfrm>
+            <a:off x="640080" y="1463040"/>
+            <a:ext cx="5029200" cy="731520"/>
+          </a:xfrm>
+          <a:prstGeom prst="rect">
+            <a:avLst/>
+          </a:prstGeom>
+          <a:noFill/>
+        </p:spPr>
+        <p:txBody>
+          <a:bodyPr wrap="none">
+            <a:spAutoFit/>
+          </a:bodyPr>
+          <a:lstStyle/>
+          <a:p>
+            <a:pPr algn="l">
+              <a:defRPr sz="2800" b="1">
+                <a:solidFill>
+                  <a:srgbClr val="C41E3A"/>
+                </a:solidFill>
+                <a:latin typeface="Arial"/>
+              </a:defRPr>
+            </a:pPr>
+            <a:r>
+              <a:t>tocar la guitarra</a:t>
+            </a:r>
+          </a:p>
+        </p:txBody>
+      </p:sp>
+      <p:sp>
+        <p:nvSpPr>
+          <p:cNvPr id="9" name="TextBox 8"/>
+          <p:cNvSpPr txBox="1"/>
+          <p:nvPr/>
+        </p:nvSpPr>
+        <p:spPr>
+          <a:xfrm>
+            <a:off x="5943600" y="1554480"/>
+            <a:ext cx="5486400" cy="548640"/>
+          </a:xfrm>
+          <a:prstGeom prst="rect">
+            <a:avLst/>
+          </a:prstGeom>
+          <a:noFill/>
+        </p:spPr>
+        <p:txBody>
+          <a:bodyPr wrap="none">
+            <a:spAutoFit/>
+          </a:bodyPr>
+          <a:lstStyle/>
+          <a:p>
+            <a:pPr algn="l">
+              <a:defRPr sz="1800" b="0">
+                <a:solidFill>
+                  <a:srgbClr val="555555"/>
+                </a:solidFill>
+                <a:latin typeface="Arial"/>
+              </a:defRPr>
+            </a:pPr>
+            <a:r>
+              <a:t>Gitarre spielen</a:t>
+            </a:r>
+          </a:p>
+        </p:txBody>
+      </p:sp>
+      <p:sp>
+        <p:nvSpPr>
+          <p:cNvPr id="10" name="TextBox 9"/>
+          <p:cNvSpPr txBox="1"/>
+          <p:nvPr/>
+        </p:nvSpPr>
+        <p:spPr>
+          <a:xfrm>
+            <a:off x="640080" y="2560320"/>
+            <a:ext cx="5029200" cy="731520"/>
+          </a:xfrm>
+          <a:prstGeom prst="rect">
+            <a:avLst/>
+          </a:prstGeom>
+          <a:noFill/>
+        </p:spPr>
+        <p:txBody>
+          <a:bodyPr wrap="none">
+            <a:spAutoFit/>
+          </a:bodyPr>
+          <a:lstStyle/>
+          <a:p>
+            <a:pPr algn="l">
+              <a:defRPr sz="2800" b="1">
+                <a:solidFill>
+                  <a:srgbClr val="C41E3A"/>
+                </a:solidFill>
+                <a:latin typeface="Arial"/>
+              </a:defRPr>
+            </a:pPr>
+            <a:r>
+              <a:t>tocar el piano</a:t>
+            </a:r>
+          </a:p>
+        </p:txBody>
+      </p:sp>
+      <p:sp>
+        <p:nvSpPr>
+          <p:cNvPr id="11" name="TextBox 10"/>
+          <p:cNvSpPr txBox="1"/>
+          <p:nvPr/>
+        </p:nvSpPr>
+        <p:spPr>
+          <a:xfrm>
+            <a:off x="5943600" y="2651760"/>
+            <a:ext cx="5486400" cy="548640"/>
+          </a:xfrm>
+          <a:prstGeom prst="rect">
+            <a:avLst/>
+          </a:prstGeom>
+          <a:noFill/>
+        </p:spPr>
+        <p:txBody>
+          <a:bodyPr wrap="none">
+            <a:spAutoFit/>
+          </a:bodyPr>
+          <a:lstStyle/>
+          <a:p>
+            <a:pPr algn="l">
+              <a:defRPr sz="1800" b="0">
+                <a:solidFill>
+                  <a:srgbClr val="555555"/>
+                </a:solidFill>
+                <a:latin typeface="Arial"/>
+              </a:defRPr>
+            </a:pPr>
+            <a:r>
+              <a:t>Klavier spielen</a:t>
+            </a:r>
+          </a:p>
+        </p:txBody>
+      </p:sp>
+      <p:sp>
+        <p:nvSpPr>
+          <p:cNvPr id="12" name="Rectangle 11"/>
+          <p:cNvSpPr/>
+          <p:nvPr/>
+        </p:nvSpPr>
+        <p:spPr>
+          <a:xfrm>
+            <a:off x="457200" y="5029200"/>
+            <a:ext cx="11274552" cy="1097280"/>
+          </a:xfrm>
+          <a:prstGeom prst="rect">
+            <a:avLst/>
+          </a:prstGeom>
+          <a:solidFill>
+            <a:srgbClr val="FFF8F0"/>
+          </a:solidFill>
+          <a:ln>
+            <a:solidFill>
+              <a:srgbClr val="B35C00"/>
+            </a:solidFill>
+          </a:ln>
+        </p:spPr>
+        <p:style>
+          <a:lnRef idx="1">
+            <a:schemeClr val="accent1"/>
+          </a:lnRef>
+          <a:fillRef idx="3">
+            <a:schemeClr val="accent1"/>
+          </a:fillRef>
+          <a:effectRef idx="2">
+            <a:schemeClr val="accent1"/>
+          </a:effectRef>
+          <a:fontRef idx="minor">
+            <a:schemeClr val="lt1"/>
+          </a:fontRef>
+        </p:style>
+        <p:txBody>
+          <a:bodyPr rtlCol="0" anchor="ctr"/>
+          <a:lstStyle/>
+          <a:p>
+            <a:pPr algn="ctr"/>
+          </a:p>
+        </p:txBody>
+      </p:sp>
+      <p:sp>
+        <p:nvSpPr>
+          <p:cNvPr id="13" name="TextBox 12"/>
+          <p:cNvSpPr txBox="1"/>
+          <p:nvPr/>
+        </p:nvSpPr>
+        <p:spPr>
+          <a:xfrm>
+            <a:off x="640080" y="5212080"/>
+            <a:ext cx="10972800" cy="731520"/>
+          </a:xfrm>
+          <a:prstGeom prst="rect">
+            <a:avLst/>
+          </a:prstGeom>
+          <a:noFill/>
+        </p:spPr>
+        <p:txBody>
+          <a:bodyPr wrap="none">
+            <a:spAutoFit/>
+          </a:bodyPr>
+          <a:lstStyle/>
+          <a:p>
+            <a:pPr algn="l">
+              <a:defRPr sz="1600" b="0">
+                <a:solidFill>
+                  <a:srgbClr val="222222"/>
+                </a:solidFill>
+                <a:latin typeface="Arial"/>
+              </a:defRPr>
+            </a:pPr>
+            <a:r>
+              <a:t>💡 Instrumente mit tocar</a:t>
+            </a:r>
+          </a:p>
+        </p:txBody>
+      </p:sp>
+    </p:spTree>
+  </p:cSld>
+  <p:clrMapOvr>
+    <a:masterClrMapping/>
+  </p:clrMapOvr>
+</p:sld>
+</file>
+
+<file path=ppt/slides/slide8.xml><?xml version="1.0" encoding="utf-8"?>
+<p:sld xmlns:a="http://schemas.openxmlformats.org/drawingml/2006/main" xmlns:p="http://schemas.openxmlformats.org/presentationml/2006/main" xmlns:r="http://schemas.openxmlformats.org/officeDocument/2006/relationships">
+  <p:cSld>
+    <p:spTree>
+      <p:nvGrpSpPr>
+        <p:cNvPr id="1" name=""/>
+        <p:cNvGrpSpPr/>
+        <p:nvPr/>
+      </p:nvGrpSpPr>
+      <p:grpSpPr/>
+      <p:sp>
+        <p:nvSpPr>
+          <p:cNvPr id="2" name="Rectangle 1"/>
+          <p:cNvSpPr/>
+          <p:nvPr/>
+        </p:nvSpPr>
+        <p:spPr>
+          <a:xfrm>
+            <a:off x="0" y="0"/>
+            <a:ext cx="12191695" cy="457200"/>
+          </a:xfrm>
+          <a:prstGeom prst="rect">
+            <a:avLst/>
+          </a:prstGeom>
+          <a:solidFill>
+            <a:srgbClr val="C41E3A"/>
+          </a:solidFill>
+          <a:ln>
+            <a:noFill/>
+          </a:ln>
+        </p:spPr>
+        <p:style>
+          <a:lnRef idx="1">
+            <a:schemeClr val="accent1"/>
+          </a:lnRef>
+          <a:fillRef idx="3">
+            <a:schemeClr val="accent1"/>
+          </a:fillRef>
+          <a:effectRef idx="2">
+            <a:schemeClr val="accent1"/>
+          </a:effectRef>
+          <a:fontRef idx="minor">
+            <a:schemeClr val="lt1"/>
+          </a:fontRef>
+        </p:style>
+        <p:txBody>
+          <a:bodyPr rtlCol="0" anchor="ctr"/>
+          <a:lstStyle/>
+          <a:p>
+            <a:pPr algn="ctr"/>
+          </a:p>
+        </p:txBody>
+      </p:sp>
+      <p:sp>
+        <p:nvSpPr>
+          <p:cNvPr id="3" name="TextBox 2"/>
+          <p:cNvSpPr txBox="1"/>
+          <p:nvPr/>
+        </p:nvSpPr>
+        <p:spPr>
+          <a:xfrm>
+            <a:off x="274320" y="91440"/>
+            <a:ext cx="3657600" cy="274320"/>
+          </a:xfrm>
+          <a:prstGeom prst="rect">
+            <a:avLst/>
+          </a:prstGeom>
+          <a:noFill/>
+        </p:spPr>
+        <p:txBody>
+          <a:bodyPr wrap="none">
+            <a:spAutoFit/>
+          </a:bodyPr>
+          <a:lstStyle/>
+          <a:p>
+            <a:pPr algn="l">
+              <a:defRPr sz="1400" b="1">
+                <a:solidFill>
+                  <a:srgbClr val="FFFFFF"/>
+                </a:solidFill>
+                <a:latin typeface="Arial"/>
+              </a:defRPr>
+            </a:pPr>
+            <a:r>
+              <a:t>Spanisch Klasse 7 · LP-05a</a:t>
+            </a:r>
+          </a:p>
+        </p:txBody>
+      </p:sp>
+      <p:sp>
+        <p:nvSpPr>
+          <p:cNvPr id="4" name="Rectangle 3"/>
+          <p:cNvSpPr/>
+          <p:nvPr/>
+        </p:nvSpPr>
+        <p:spPr>
+          <a:xfrm>
+            <a:off x="0" y="6583680"/>
+            <a:ext cx="12191695" cy="274320"/>
+          </a:xfrm>
+          <a:prstGeom prst="rect">
+            <a:avLst/>
+          </a:prstGeom>
+          <a:solidFill>
+            <a:srgbClr val="F5F5F5"/>
+          </a:solidFill>
+          <a:ln>
+            <a:noFill/>
+          </a:ln>
+        </p:spPr>
+        <p:style>
+          <a:lnRef idx="1">
+            <a:schemeClr val="accent1"/>
+          </a:lnRef>
+          <a:fillRef idx="3">
+            <a:schemeClr val="accent1"/>
+          </a:fillRef>
+          <a:effectRef idx="2">
+            <a:schemeClr val="accent1"/>
+          </a:effectRef>
+          <a:fontRef idx="minor">
+            <a:schemeClr val="lt1"/>
+          </a:fontRef>
+        </p:style>
+        <p:txBody>
+          <a:bodyPr rtlCol="0" anchor="ctr"/>
+          <a:lstStyle/>
+          <a:p>
+            <a:pPr algn="ctr"/>
+          </a:p>
+        </p:txBody>
+      </p:sp>
+      <p:sp>
+        <p:nvSpPr>
+          <p:cNvPr id="5" name="TextBox 4"/>
+          <p:cNvSpPr txBox="1"/>
+          <p:nvPr/>
+        </p:nvSpPr>
+        <p:spPr>
+          <a:xfrm>
+            <a:off x="274320" y="6601968"/>
+            <a:ext cx="4572000" cy="228600"/>
+          </a:xfrm>
+          <a:prstGeom prst="rect">
+            <a:avLst/>
+          </a:prstGeom>
+          <a:noFill/>
+        </p:spPr>
+        <p:txBody>
+          <a:bodyPr wrap="none">
+            <a:spAutoFit/>
+          </a:bodyPr>
+          <a:lstStyle/>
+          <a:p>
+            <a:pPr algn="l">
+              <a:defRPr sz="1000" b="0">
+                <a:solidFill>
+                  <a:srgbClr val="555555"/>
+                </a:solidFill>
+                <a:latin typeface="Arial"/>
+              </a:defRPr>
+            </a:pPr>
+            <a:r>
+              <a:t>Los hobbys</a:t>
+            </a:r>
+          </a:p>
+        </p:txBody>
+      </p:sp>
+      <p:sp>
+        <p:nvSpPr>
+          <p:cNvPr id="6" name="TextBox 5"/>
+          <p:cNvSpPr txBox="1"/>
+          <p:nvPr/>
+        </p:nvSpPr>
+        <p:spPr>
+          <a:xfrm>
+            <a:off x="9144000" y="6601968"/>
+            <a:ext cx="2743200" cy="228600"/>
+          </a:xfrm>
+          <a:prstGeom prst="rect">
+            <a:avLst/>
+          </a:prstGeom>
+          <a:noFill/>
+        </p:spPr>
+        <p:txBody>
+          <a:bodyPr wrap="none">
+            <a:spAutoFit/>
+          </a:bodyPr>
+          <a:lstStyle/>
+          <a:p>
+            <a:pPr algn="r">
+              <a:defRPr sz="1000" b="0">
+                <a:solidFill>
+                  <a:srgbClr val="555555"/>
+                </a:solidFill>
+                <a:latin typeface="Arial"/>
+              </a:defRPr>
+            </a:pPr>
+            <a:r>
+              <a:t>Sequenz 5</a:t>
+            </a:r>
+          </a:p>
+        </p:txBody>
+      </p:sp>
+      <p:sp>
+        <p:nvSpPr>
+          <p:cNvPr id="7" name="TextBox 6"/>
+          <p:cNvSpPr txBox="1"/>
+          <p:nvPr/>
+        </p:nvSpPr>
+        <p:spPr>
+          <a:xfrm>
+            <a:off x="457200" y="640080"/>
+            <a:ext cx="11274552" cy="731520"/>
+          </a:xfrm>
+          <a:prstGeom prst="rect">
+            <a:avLst/>
+          </a:prstGeom>
+          <a:noFill/>
+        </p:spPr>
+        <p:txBody>
+          <a:bodyPr wrap="none">
+            <a:spAutoFit/>
+          </a:bodyPr>
+          <a:lstStyle/>
+          <a:p>
+            <a:pPr algn="l">
+              <a:defRPr sz="3200" b="1">
+                <a:solidFill>
+                  <a:srgbClr val="C41E3A"/>
+                </a:solidFill>
+                <a:latin typeface="Arial"/>
+              </a:defRPr>
+            </a:pPr>
+            <a:r>
+              <a:t>Beispieldialog</a:t>
+            </a:r>
+          </a:p>
+        </p:txBody>
+      </p:sp>
+      <p:sp>
+        <p:nvSpPr>
+          <p:cNvPr id="8" name="TextBox 7"/>
+          <p:cNvSpPr txBox="1"/>
+          <p:nvPr/>
+        </p:nvSpPr>
+        <p:spPr>
+          <a:xfrm>
+            <a:off x="640080" y="1463040"/>
+            <a:ext cx="10972800" cy="548640"/>
+          </a:xfrm>
+          <a:prstGeom prst="rect">
+            <a:avLst/>
+          </a:prstGeom>
+          <a:noFill/>
+        </p:spPr>
+        <p:txBody>
+          <a:bodyPr wrap="none">
+            <a:spAutoFit/>
+          </a:bodyPr>
+          <a:lstStyle/>
+          <a:p>
+            <a:pPr algn="l">
+              <a:defRPr sz="2000" b="0">
+                <a:solidFill>
+                  <a:srgbClr val="222222"/>
+                </a:solidFill>
+                <a:latin typeface="Arial"/>
+              </a:defRPr>
+            </a:pPr>
+            <a:r>
+              <a:t>– ¿Qué haces en tu tiempo libre?</a:t>
+            </a:r>
+          </a:p>
+        </p:txBody>
+      </p:sp>
+      <p:sp>
+        <p:nvSpPr>
+          <p:cNvPr id="9" name="TextBox 8"/>
+          <p:cNvSpPr txBox="1"/>
+          <p:nvPr/>
+        </p:nvSpPr>
+        <p:spPr>
+          <a:xfrm>
+            <a:off x="640080" y="2194560"/>
+            <a:ext cx="10972800" cy="548640"/>
+          </a:xfrm>
+          <a:prstGeom prst="rect">
+            <a:avLst/>
+          </a:prstGeom>
+          <a:noFill/>
+        </p:spPr>
+        <p:txBody>
+          <a:bodyPr wrap="none">
+            <a:spAutoFit/>
+          </a:bodyPr>
+          <a:lstStyle/>
+          <a:p>
+            <a:pPr algn="l">
+              <a:defRPr sz="2000" b="0">
+                <a:solidFill>
+                  <a:srgbClr val="222222"/>
+                </a:solidFill>
+                <a:latin typeface="Arial"/>
+              </a:defRPr>
+            </a:pPr>
+            <a:r>
+              <a:t>– Juego al fútbol y toco la guitarra.</a:t>
+            </a:r>
+          </a:p>
+        </p:txBody>
+      </p:sp>
+      <p:sp>
+        <p:nvSpPr>
+          <p:cNvPr id="10" name="TextBox 9"/>
+          <p:cNvSpPr txBox="1"/>
+          <p:nvPr/>
+        </p:nvSpPr>
+        <p:spPr>
+          <a:xfrm>
+            <a:off x="640080" y="2926080"/>
+            <a:ext cx="10972800" cy="548640"/>
+          </a:xfrm>
+          <a:prstGeom prst="rect">
+            <a:avLst/>
+          </a:prstGeom>
+          <a:noFill/>
+        </p:spPr>
+        <p:txBody>
+          <a:bodyPr wrap="none">
+            <a:spAutoFit/>
+          </a:bodyPr>
+          <a:lstStyle/>
+          <a:p>
+            <a:pPr algn="l">
+              <a:defRPr sz="2000" b="0">
+                <a:solidFill>
+                  <a:srgbClr val="222222"/>
+                </a:solidFill>
+                <a:latin typeface="Arial"/>
+              </a:defRPr>
+            </a:pPr>
+            <a:r>
+              <a:t>– ¿Y tú?</a:t>
+            </a:r>
+          </a:p>
+        </p:txBody>
+      </p:sp>
+      <p:sp>
+        <p:nvSpPr>
+          <p:cNvPr id="11" name="TextBox 10"/>
+          <p:cNvSpPr txBox="1"/>
+          <p:nvPr/>
+        </p:nvSpPr>
+        <p:spPr>
+          <a:xfrm>
+            <a:off x="640080" y="3657600"/>
+            <a:ext cx="10972800" cy="548640"/>
+          </a:xfrm>
+          <a:prstGeom prst="rect">
+            <a:avLst/>
+          </a:prstGeom>
+          <a:noFill/>
+        </p:spPr>
+        <p:txBody>
+          <a:bodyPr wrap="none">
+            <a:spAutoFit/>
+          </a:bodyPr>
+          <a:lstStyle/>
+          <a:p>
+            <a:pPr algn="l">
+              <a:defRPr sz="2000" b="0">
+                <a:solidFill>
+                  <a:srgbClr val="222222"/>
+                </a:solidFill>
+                <a:latin typeface="Arial"/>
+              </a:defRPr>
+            </a:pPr>
+            <a:r>
+              <a:t>– Me gusta leer libros.</a:t>
+            </a:r>
+          </a:p>
+        </p:txBody>
+      </p:sp>
+    </p:spTree>
+  </p:cSld>
+  <p:clrMapOvr>
+    <a:masterClrMapping/>
+  </p:clrMapOvr>
+</p:sld>
+</file>
+
+<file path=ppt/slides/slide9.xml><?xml version="1.0" encoding="utf-8"?>
+<p:sld xmlns:a="http://schemas.openxmlformats.org/drawingml/2006/main" xmlns:p="http://schemas.openxmlformats.org/presentationml/2006/main" xmlns:r="http://schemas.openxmlformats.org/officeDocument/2006/relationships">
+  <p:cSld>
+    <p:spTree>
+      <p:nvGrpSpPr>
+        <p:cNvPr id="1" name=""/>
+        <p:cNvGrpSpPr/>
+        <p:nvPr/>
+      </p:nvGrpSpPr>
+      <p:grpSpPr/>
+      <p:sp>
+        <p:nvSpPr>
+          <p:cNvPr id="2" name="Rectangle 1"/>
+          <p:cNvSpPr/>
+          <p:nvPr/>
+        </p:nvSpPr>
+        <p:spPr>
+          <a:xfrm>
+            <a:off x="0" y="0"/>
+            <a:ext cx="12191695" cy="457200"/>
+          </a:xfrm>
+          <a:prstGeom prst="rect">
+            <a:avLst/>
+          </a:prstGeom>
+          <a:solidFill>
+            <a:srgbClr val="C41E3A"/>
+          </a:solidFill>
+          <a:ln>
+            <a:noFill/>
+          </a:ln>
+        </p:spPr>
+        <p:style>
+          <a:lnRef idx="1">
+            <a:schemeClr val="accent1"/>
+          </a:lnRef>
+          <a:fillRef idx="3">
+            <a:schemeClr val="accent1"/>
+          </a:fillRef>
+          <a:effectRef idx="2">
+            <a:schemeClr val="accent1"/>
+          </a:effectRef>
+          <a:fontRef idx="minor">
+            <a:schemeClr val="lt1"/>
+          </a:fontRef>
+        </p:style>
+        <p:txBody>
+          <a:bodyPr rtlCol="0" anchor="ctr"/>
+          <a:lstStyle/>
+          <a:p>
+            <a:pPr algn="ctr"/>
+          </a:p>
+        </p:txBody>
+      </p:sp>
+      <p:sp>
+        <p:nvSpPr>
+          <p:cNvPr id="3" name="TextBox 2"/>
+          <p:cNvSpPr txBox="1"/>
+          <p:nvPr/>
+        </p:nvSpPr>
+        <p:spPr>
+          <a:xfrm>
+            <a:off x="274320" y="91440"/>
+            <a:ext cx="3657600" cy="274320"/>
+          </a:xfrm>
+          <a:prstGeom prst="rect">
+            <a:avLst/>
+          </a:prstGeom>
+          <a:noFill/>
+        </p:spPr>
+        <p:txBody>
+          <a:bodyPr wrap="none">
+            <a:spAutoFit/>
+          </a:bodyPr>
+          <a:lstStyle/>
+          <a:p>
+            <a:pPr algn="l">
+              <a:defRPr sz="1400" b="1">
+                <a:solidFill>
+                  <a:srgbClr val="FFFFFF"/>
+                </a:solidFill>
+                <a:latin typeface="Arial"/>
+              </a:defRPr>
+            </a:pPr>
+            <a:r>
+              <a:t>Spanisch Klasse 7 · LP-05a</a:t>
+            </a:r>
+          </a:p>
+        </p:txBody>
+      </p:sp>
+      <p:sp>
+        <p:nvSpPr>
+          <p:cNvPr id="4" name="Rectangle 3"/>
+          <p:cNvSpPr/>
+          <p:nvPr/>
+        </p:nvSpPr>
+        <p:spPr>
+          <a:xfrm>
+            <a:off x="0" y="6583680"/>
+            <a:ext cx="12191695" cy="274320"/>
+          </a:xfrm>
+          <a:prstGeom prst="rect">
+            <a:avLst/>
+          </a:prstGeom>
+          <a:solidFill>
+            <a:srgbClr val="F5F5F5"/>
+          </a:solidFill>
+          <a:ln>
+            <a:noFill/>
+          </a:ln>
+        </p:spPr>
+        <p:style>
+          <a:lnRef idx="1">
+            <a:schemeClr val="accent1"/>
+          </a:lnRef>
+          <a:fillRef idx="3">
+            <a:schemeClr val="accent1"/>
+          </a:fillRef>
+          <a:effectRef idx="2">
+            <a:schemeClr val="accent1"/>
+          </a:effectRef>
+          <a:fontRef idx="minor">
+            <a:schemeClr val="lt1"/>
+          </a:fontRef>
+        </p:style>
+        <p:txBody>
+          <a:bodyPr rtlCol="0" anchor="ctr"/>
+          <a:lstStyle/>
+          <a:p>
+            <a:pPr algn="ctr"/>
+          </a:p>
+        </p:txBody>
+      </p:sp>
+      <p:sp>
+        <p:nvSpPr>
+          <p:cNvPr id="5" name="TextBox 4"/>
+          <p:cNvSpPr txBox="1"/>
+          <p:nvPr/>
+        </p:nvSpPr>
+        <p:spPr>
+          <a:xfrm>
+            <a:off x="274320" y="6601968"/>
+            <a:ext cx="4572000" cy="228600"/>
+          </a:xfrm>
+          <a:prstGeom prst="rect">
+            <a:avLst/>
+          </a:prstGeom>
+          <a:noFill/>
+        </p:spPr>
+        <p:txBody>
+          <a:bodyPr wrap="none">
+            <a:spAutoFit/>
+          </a:bodyPr>
+          <a:lstStyle/>
+          <a:p>
+            <a:pPr algn="l">
+              <a:defRPr sz="1000" b="0">
+                <a:solidFill>
+                  <a:srgbClr val="555555"/>
+                </a:solidFill>
+                <a:latin typeface="Arial"/>
+              </a:defRPr>
+            </a:pPr>
+            <a:r>
+              <a:t>Los hobbys</a:t>
+            </a:r>
+          </a:p>
+        </p:txBody>
+      </p:sp>
+      <p:sp>
+        <p:nvSpPr>
+          <p:cNvPr id="6" name="TextBox 5"/>
+          <p:cNvSpPr txBox="1"/>
+          <p:nvPr/>
+        </p:nvSpPr>
+        <p:spPr>
+          <a:xfrm>
+            <a:off x="9144000" y="6601968"/>
+            <a:ext cx="2743200" cy="228600"/>
+          </a:xfrm>
+          <a:prstGeom prst="rect">
+            <a:avLst/>
+          </a:prstGeom>
+          <a:noFill/>
+        </p:spPr>
+        <p:txBody>
+          <a:bodyPr wrap="none">
+            <a:spAutoFit/>
+          </a:bodyPr>
+          <a:lstStyle/>
+          <a:p>
+            <a:pPr algn="r">
+              <a:defRPr sz="1000" b="0">
+                <a:solidFill>
+                  <a:srgbClr val="555555"/>
+                </a:solidFill>
+                <a:latin typeface="Arial"/>
+              </a:defRPr>
+            </a:pPr>
+            <a:r>
+              <a:t>Sequenz 5</a:t>
+            </a:r>
+          </a:p>
+        </p:txBody>
+      </p:sp>
+      <p:sp>
+        <p:nvSpPr>
+          <p:cNvPr id="7" name="Rectangle 6"/>
+          <p:cNvSpPr/>
+          <p:nvPr/>
+        </p:nvSpPr>
+        <p:spPr>
+          <a:xfrm>
+            <a:off x="457200" y="640080"/>
+            <a:ext cx="1828800" cy="457200"/>
+          </a:xfrm>
+          <a:prstGeom prst="rect">
+            <a:avLst/>
+          </a:prstGeom>
+          <a:solidFill>
+            <a:srgbClr val="C41E3A"/>
+          </a:solidFill>
+          <a:ln>
+            <a:noFill/>
+          </a:ln>
+        </p:spPr>
+        <p:style>
+          <a:lnRef idx="1">
+            <a:schemeClr val="accent1"/>
+          </a:lnRef>
+          <a:fillRef idx="3">
+            <a:schemeClr val="accent1"/>
+          </a:fillRef>
+          <a:effectRef idx="2">
+            <a:schemeClr val="accent1"/>
+          </a:effectRef>
+          <a:fontRef idx="minor">
+            <a:schemeClr val="lt1"/>
+          </a:fontRef>
+        </p:style>
+        <p:txBody>
+          <a:bodyPr rtlCol="0" anchor="ctr"/>
+          <a:lstStyle/>
+          <a:p>
+            <a:pPr algn="ctr"/>
+          </a:p>
+        </p:txBody>
+      </p:sp>
+      <p:sp>
+        <p:nvSpPr>
           <p:cNvPr id="8" name="TextBox 7"/>
           <p:cNvSpPr txBox="1"/>
           <p:nvPr/>
@@ -4970,7 +9967,7 @@
               </a:defRPr>
             </a:pPr>
             <a:r>
-              <a:t>HAUSAUFGABE</a:t>
+              <a:t>ÜBUNG</a:t>
             </a:r>
           </a:p>
         </p:txBody>
@@ -5006,7 +10003,7 @@
               </a:defRPr>
             </a:pPr>
             <a:r>
-              <a:t>📚 Para casa</a:t>
+              <a:t>✏️ Übung: jugar oder tocar?</a:t>
             </a:r>
           </a:p>
         </p:txBody>
@@ -5019,30 +10016,30 @@
         </p:nvSpPr>
         <p:spPr>
           <a:xfrm>
-            <a:off x="640080" y="2103120"/>
-            <a:ext cx="457200" cy="457200"/>
-          </a:xfrm>
-          <a:prstGeom prst="rect">
-            <a:avLst/>
-          </a:prstGeom>
-          <a:noFill/>
-        </p:spPr>
-        <p:txBody>
-          <a:bodyPr wrap="none">
-            <a:spAutoFit/>
-          </a:bodyPr>
-          <a:lstStyle/>
-          <a:p>
-            <a:pPr algn="l">
-              <a:defRPr sz="2400" b="1">
-                <a:solidFill>
-                  <a:srgbClr val="2A7A4B"/>
-                </a:solidFill>
-                <a:latin typeface="Arial"/>
-              </a:defRPr>
-            </a:pPr>
-            <a:r>
-              <a:t>✓</a:t>
+            <a:off x="640080" y="2011680"/>
+            <a:ext cx="5029200" cy="548640"/>
+          </a:xfrm>
+          <a:prstGeom prst="rect">
+            <a:avLst/>
+          </a:prstGeom>
+          <a:noFill/>
+        </p:spPr>
+        <p:txBody>
+          <a:bodyPr wrap="none">
+            <a:spAutoFit/>
+          </a:bodyPr>
+          <a:lstStyle/>
+          <a:p>
+            <a:pPr algn="l">
+              <a:defRPr sz="2200" b="1">
+                <a:solidFill>
+                  <a:srgbClr val="C41E3A"/>
+                </a:solidFill>
+                <a:latin typeface="Arial"/>
+              </a:defRPr>
+            </a:pPr>
+            <a:r>
+              <a:t>___ al tenis</a:t>
             </a:r>
           </a:p>
         </p:txBody>
@@ -5055,30 +10052,30 @@
         </p:nvSpPr>
         <p:spPr>
           <a:xfrm>
-            <a:off x="1188720" y="2103120"/>
-            <a:ext cx="10058400" cy="457200"/>
-          </a:xfrm>
-          <a:prstGeom prst="rect">
-            <a:avLst/>
-          </a:prstGeom>
-          <a:noFill/>
-        </p:spPr>
-        <p:txBody>
-          <a:bodyPr wrap="none">
-            <a:spAutoFit/>
-          </a:bodyPr>
-          <a:lstStyle/>
-          <a:p>
-            <a:pPr algn="l">
-              <a:defRPr sz="2000" b="0">
-                <a:solidFill>
-                  <a:srgbClr val="222222"/>
-                </a:solidFill>
-                <a:latin typeface="Arial"/>
-              </a:defRPr>
-            </a:pPr>
-            <a:r>
-              <a:t>Hobby-Vokabeln lernen</a:t>
+            <a:off x="5943600" y="2011680"/>
+            <a:ext cx="5029200" cy="548640"/>
+          </a:xfrm>
+          <a:prstGeom prst="rect">
+            <a:avLst/>
+          </a:prstGeom>
+          <a:noFill/>
+        </p:spPr>
+        <p:txBody>
+          <a:bodyPr wrap="none">
+            <a:spAutoFit/>
+          </a:bodyPr>
+          <a:lstStyle/>
+          <a:p>
+            <a:pPr algn="l">
+              <a:defRPr sz="2200" b="0">
+                <a:solidFill>
+                  <a:srgbClr val="888888"/>
+                </a:solidFill>
+                <a:latin typeface="Arial"/>
+              </a:defRPr>
+            </a:pPr>
+            <a:r>
+              <a:t>___</a:t>
             </a:r>
           </a:p>
         </p:txBody>
@@ -5091,22 +10088,211 @@
         </p:nvSpPr>
         <p:spPr>
           <a:xfrm>
-            <a:off x="457200" y="5760720"/>
+            <a:off x="640080" y="2926080"/>
+            <a:ext cx="5029200" cy="548640"/>
+          </a:xfrm>
+          <a:prstGeom prst="rect">
+            <a:avLst/>
+          </a:prstGeom>
+          <a:noFill/>
+        </p:spPr>
+        <p:txBody>
+          <a:bodyPr wrap="none">
+            <a:spAutoFit/>
+          </a:bodyPr>
+          <a:lstStyle/>
+          <a:p>
+            <a:pPr algn="l">
+              <a:defRPr sz="2200" b="1">
+                <a:solidFill>
+                  <a:srgbClr val="C41E3A"/>
+                </a:solidFill>
+                <a:latin typeface="Arial"/>
+              </a:defRPr>
+            </a:pPr>
+            <a:r>
+              <a:t>___ el violín</a:t>
+            </a:r>
+          </a:p>
+        </p:txBody>
+      </p:sp>
+      <p:sp>
+        <p:nvSpPr>
+          <p:cNvPr id="13" name="TextBox 12"/>
+          <p:cNvSpPr txBox="1"/>
+          <p:nvPr/>
+        </p:nvSpPr>
+        <p:spPr>
+          <a:xfrm>
+            <a:off x="5943600" y="2926080"/>
+            <a:ext cx="5029200" cy="548640"/>
+          </a:xfrm>
+          <a:prstGeom prst="rect">
+            <a:avLst/>
+          </a:prstGeom>
+          <a:noFill/>
+        </p:spPr>
+        <p:txBody>
+          <a:bodyPr wrap="none">
+            <a:spAutoFit/>
+          </a:bodyPr>
+          <a:lstStyle/>
+          <a:p>
+            <a:pPr algn="l">
+              <a:defRPr sz="2200" b="0">
+                <a:solidFill>
+                  <a:srgbClr val="888888"/>
+                </a:solidFill>
+                <a:latin typeface="Arial"/>
+              </a:defRPr>
+            </a:pPr>
+            <a:r>
+              <a:t>___</a:t>
+            </a:r>
+          </a:p>
+        </p:txBody>
+      </p:sp>
+      <p:sp>
+        <p:nvSpPr>
+          <p:cNvPr id="14" name="TextBox 13"/>
+          <p:cNvSpPr txBox="1"/>
+          <p:nvPr/>
+        </p:nvSpPr>
+        <p:spPr>
+          <a:xfrm>
+            <a:off x="640080" y="3840480"/>
+            <a:ext cx="5029200" cy="548640"/>
+          </a:xfrm>
+          <a:prstGeom prst="rect">
+            <a:avLst/>
+          </a:prstGeom>
+          <a:noFill/>
+        </p:spPr>
+        <p:txBody>
+          <a:bodyPr wrap="none">
+            <a:spAutoFit/>
+          </a:bodyPr>
+          <a:lstStyle/>
+          <a:p>
+            <a:pPr algn="l">
+              <a:defRPr sz="2200" b="1">
+                <a:solidFill>
+                  <a:srgbClr val="C41E3A"/>
+                </a:solidFill>
+                <a:latin typeface="Arial"/>
+              </a:defRPr>
+            </a:pPr>
+            <a:r>
+              <a:t>___ a videojuegos</a:t>
+            </a:r>
+          </a:p>
+        </p:txBody>
+      </p:sp>
+      <p:sp>
+        <p:nvSpPr>
+          <p:cNvPr id="15" name="TextBox 14"/>
+          <p:cNvSpPr txBox="1"/>
+          <p:nvPr/>
+        </p:nvSpPr>
+        <p:spPr>
+          <a:xfrm>
+            <a:off x="5943600" y="3840480"/>
+            <a:ext cx="5029200" cy="548640"/>
+          </a:xfrm>
+          <a:prstGeom prst="rect">
+            <a:avLst/>
+          </a:prstGeom>
+          <a:noFill/>
+        </p:spPr>
+        <p:txBody>
+          <a:bodyPr wrap="none">
+            <a:spAutoFit/>
+          </a:bodyPr>
+          <a:lstStyle/>
+          <a:p>
+            <a:pPr algn="l">
+              <a:defRPr sz="2200" b="0">
+                <a:solidFill>
+                  <a:srgbClr val="888888"/>
+                </a:solidFill>
+                <a:latin typeface="Arial"/>
+              </a:defRPr>
+            </a:pPr>
+            <a:r>
+              <a:t>___</a:t>
+            </a:r>
+          </a:p>
+        </p:txBody>
+      </p:sp>
+      <p:sp>
+        <p:nvSpPr>
+          <p:cNvPr id="16" name="Rectangle 15"/>
+          <p:cNvSpPr/>
+          <p:nvPr/>
+        </p:nvSpPr>
+        <p:spPr>
+          <a:xfrm>
+            <a:off x="457200" y="5943600"/>
             <a:ext cx="11274552" cy="548640"/>
           </a:xfrm>
           <a:prstGeom prst="rect">
             <a:avLst/>
           </a:prstGeom>
-          <a:noFill/>
-        </p:spPr>
-        <p:txBody>
-          <a:bodyPr wrap="none">
-            <a:spAutoFit/>
-          </a:bodyPr>
-          <a:lstStyle/>
-          <a:p>
-            <a:pPr algn="ctr">
-              <a:defRPr sz="3200" b="1">
+          <a:solidFill>
+            <a:srgbClr val="FDF2F4"/>
+          </a:solidFill>
+          <a:ln>
+            <a:solidFill>
+              <a:srgbClr val="C41E3A"/>
+            </a:solidFill>
+          </a:ln>
+        </p:spPr>
+        <p:style>
+          <a:lnRef idx="1">
+            <a:schemeClr val="accent1"/>
+          </a:lnRef>
+          <a:fillRef idx="3">
+            <a:schemeClr val="accent1"/>
+          </a:fillRef>
+          <a:effectRef idx="2">
+            <a:schemeClr val="accent1"/>
+          </a:effectRef>
+          <a:fontRef idx="minor">
+            <a:schemeClr val="lt1"/>
+          </a:fontRef>
+        </p:style>
+        <p:txBody>
+          <a:bodyPr rtlCol="0" anchor="ctr"/>
+          <a:lstStyle/>
+          <a:p>
+            <a:pPr algn="ctr"/>
+          </a:p>
+        </p:txBody>
+      </p:sp>
+      <p:sp>
+        <p:nvSpPr>
+          <p:cNvPr id="17" name="TextBox 16"/>
+          <p:cNvSpPr txBox="1"/>
+          <p:nvPr/>
+        </p:nvSpPr>
+        <p:spPr>
+          <a:xfrm>
+            <a:off x="640080" y="6053328"/>
+            <a:ext cx="10972800" cy="365760"/>
+          </a:xfrm>
+          <a:prstGeom prst="rect">
+            <a:avLst/>
+          </a:prstGeom>
+          <a:noFill/>
+        </p:spPr>
+        <p:txBody>
+          <a:bodyPr wrap="none">
+            <a:spAutoFit/>
+          </a:bodyPr>
+          <a:lstStyle/>
+          <a:p>
+            <a:pPr algn="l">
+              <a:defRPr sz="1400" b="1">
                 <a:solidFill>
                   <a:srgbClr val="C41E3A"/>
                 </a:solidFill>
@@ -5114,7 +10300,7 @@
               </a:defRPr>
             </a:pPr>
             <a:r>
-              <a:t>¡Hasta luego!</a:t>
+              <a:t>📝 AB-05a: Aufgabe 1</a:t>
             </a:r>
           </a:p>
         </p:txBody>
